--- a/deck/カンツギ_事業計画書_本編.pptx
+++ b/deck/カンツギ_事業計画書_本編.pptx
@@ -29,9 +29,10 @@
     <p:sldId id="277" r:id="rId23"/>
     <p:sldId id="278" r:id="rId24"/>
     <p:sldId id="279" r:id="rId25"/>
+    <p:sldId id="280" r:id="rId26"/>
   </p:sldIdLst>
   <p:notesMasterIdLst>
-    <p:notesMasterId r:id="rId26"/>
+    <p:notesMasterId r:id="rId27"/>
   </p:notesMasterIdLst>
   <p:sldSz cx="9144000" cy="5143500"/>
   <p:notesSz cx="5143500" cy="9144000"/>
@@ -926,10 +927,10 @@
                   <c:v>-6</c:v>
                 </c:pt>
                 <c:pt idx="3">
-                  <c:v>28</c:v>
+                  <c:v>20</c:v>
                 </c:pt>
                 <c:pt idx="4">
-                  <c:v>69</c:v>
+                  <c:v>61</c:v>
                 </c:pt>
               </c:numCache>
             </c:numRef>
@@ -1079,10 +1080,10 @@
                   <c:v>-65</c:v>
                 </c:pt>
                 <c:pt idx="3">
-                  <c:v>-37</c:v>
+                  <c:v>-45</c:v>
                 </c:pt>
                 <c:pt idx="4">
-                  <c:v>32</c:v>
+                  <c:v>15</c:v>
                 </c:pt>
               </c:numCache>
             </c:numRef>
@@ -1442,7 +1443,7 @@
                 </a:pPr>
               </a:p>
             </c:txPr>
-            <c:dLblPos val="t"/>
+            <c:dLblPos val="r"/>
             <c:showLegendKey val="0"/>
             <c:showVal val="1"/>
             <c:showCatName val="0"/>
@@ -1500,19 +1501,19 @@
                 <c:formatCode>General</c:formatCode>
                 <c:ptCount val="5"/>
                 <c:pt idx="0">
-                  <c:v>92</c:v>
+                  <c:v>108</c:v>
                 </c:pt>
                 <c:pt idx="1">
-                  <c:v>92</c:v>
+                  <c:v>94</c:v>
                 </c:pt>
                 <c:pt idx="2">
                   <c:v>120</c:v>
                 </c:pt>
                 <c:pt idx="3">
-                  <c:v>151</c:v>
+                  <c:v>161</c:v>
                 </c:pt>
                 <c:pt idx="4">
-                  <c:v>196</c:v>
+                  <c:v>205</c:v>
                 </c:pt>
               </c:numCache>
             </c:numRef>
@@ -1535,7 +1536,7 @@
               </a:pPr>
             </a:p>
           </c:txPr>
-          <c:dLblPos val="t"/>
+          <c:dLblPos val="r"/>
           <c:showLegendKey val="0"/>
           <c:showVal val="1"/>
           <c:showCatName val="0"/>
@@ -1792,10 +1793,10 @@
                   <c:v>60</c:v>
                 </c:pt>
                 <c:pt idx="4">
-                  <c:v>88</c:v>
+                  <c:v>80</c:v>
                 </c:pt>
                 <c:pt idx="5">
-                  <c:v>156</c:v>
+                  <c:v>140</c:v>
                 </c:pt>
               </c:numCache>
             </c:numRef>
@@ -3133,8 +3134,8 @@
             <a:r>
               <a:rPr lang="en-US" dirty="0"/>
               <a:t>【9:35 - 10:15】
-要約：1拠点の生涯粗利は約1,865万円、獲得コストは約64万円
-お金の流れです。お客様は1拠点あたり年300万円、初年度だけ導入支援200万円を払います。施工管理者100名の会社なら、約2.1か月で元が取れます。1拠点が生む生涯の粗利、LTVは、年255万円を保守的に7年分と、導入支援の粗利を足して約1,865万円。1拠点を獲得する費用、CACは約64万円。獲得費用は3か月で回収できます。</a:t>
+要約：1拠点の生涯粗利は約1,850万円、獲得コストは約88万円
+お金の流れです。お客様は1拠点あたり年300万円、初年度だけ導入支援200万円を払います。施工管理者100名の会社なら、約2.1か月で元が取れます。1拠点が生む生涯の粗利、LTVは、年255万円を保守的に7年分と、導入支援の粗利を足して約1,850万円。1拠点を獲得する費用、CACは営業3人と広告で約88万円。獲得費用は約4か月で回収できます。</a:t>
             </a:r>
             <a:endParaRPr lang="en-US" dirty="0"/>
           </a:p>
@@ -3403,8 +3404,8 @@
             <a:r>
               <a:rPr lang="en-US" dirty="0"/>
               <a:t>【11:25 - 11:55】
-要約：4年目に損益分岐点を超え、5年目の安全余裕率は32%
-損益分岐点です。販管費を粗利率で割った損益分岐点売上は、4年目で1億5,100万円。売上1億9,000万円がこれを初めて上回ります。5年目は分岐点1億9,600万円に対して売上2億9,000万円で、安全余裕率は32%です。</a:t>
+要約：4年目に損益分岐点を超え、5年目の安全余裕率は29%
+損益分岐点です。販管費を粗利率で割った損益分岐点売上は、4年目で1億6,100万円。売上1億9,000万円がこれを初めて上回ります。5年目は分岐点2億500万円に対して売上2億9,000万円で、安全余裕率は29%です。人で見ると、社員1人の販管費約690万円を1拠点の粗利255万円で割って2.7拠点。新しい拠点は初年度に半年分しか払わないので、期末の拠点数では1人3拠点が目安です。3年目は2.73で届かず、4年目は3.44で超えます。</a:t>
             </a:r>
             <a:endParaRPr lang="en-US" dirty="0"/>
           </a:p>
@@ -3584,7 +3585,7 @@
               <a:rPr lang="en-US" dirty="0"/>
               <a:t>【11:55 - 12:25】
 要約：黒字倒産しない。最低残高は固定費3か月分
-資金計画です。必要資金は1.5億円。今回の500万円で準備期を走り、実証の結果をもって日本政策金融公庫の創業融資1,000万円、CVCとVCから1億1,500万円を調達します。現金残高は最も薄い3年目でも6,000万円で、固定費3か月分を下回りません。利用料は年額前払い、導入支援は着手金をいただき、黒字倒産を防ぎます。</a:t>
+資金計画です。必要資金は1.5億円。今回の500万円で準備期を走り、実証の結果をもって日本政策金融公庫の創業融資1,000万円、CVCとVCから1億1,500万円を調達します。現金残高は最も薄い3年目でも6,000万円で、固定費3か月分を下回りません。利用料は年額前払い、導入支援は着手金をいただき、黒字倒産を防ぎます。正直に申し上げると、この計画は出資1億1,500万円が前提です。公庫の1,000万円だけなら、現金は1年目から足りなくなります。</a:t>
             </a:r>
             <a:endParaRPr lang="en-US" dirty="0"/>
           </a:p>
@@ -3673,8 +3674,8 @@
             <a:r>
               <a:rPr lang="en-US" dirty="0"/>
               <a:t>【12:25 - 13:00】
-要約：チームは現場と技術の両方を揃える。顧問とパートナーで弱みを補う
-チームです。私は電線メーカーで地中送電線の施工管理を5年やり、独学でAIの仕組みを作ってきました。毎朝ニュースを音声で配信する仕組みも、個人で作って動かしています。ただ、私一人では足りません。技術の責任者、電気工事の施工管理経験者、カスタマーサクセスを揃え、業界の顧問、スマートグラスのメーカー、大学と組みます。</a:t>
+要約：計画の6割取れれば黒字。届かなければ、先に決めた線で止まる
+黒字化の条件です。新しいお客様が計画の何割取れたら黒字になるかを、同じ計算で確かめました。採用を実績に合わせて遅らせれば、計画の6割で5年目に黒字、7割なら4年目に黒字です。5割を下回ると黒字になりません。危ないのは、獲得が遅れているのに計画どおり採用することで、7割でも現金が尽きます。だから進むか止まるかの線を先に決めます。1年目の終わりに実証3社のうち2社以上が本契約なら進む、1社なら値段と顧客を見直す、0社なら撤退か方向転換。2年目に新しい拠点が5つに届かなければ採用を止めます。</a:t>
             </a:r>
             <a:endParaRPr lang="en-US" dirty="0"/>
           </a:p>
@@ -3762,9 +3763,9 @@
           <a:p>
             <a:r>
               <a:rPr lang="en-US" dirty="0"/>
-              <a:t>【13:00 - 13:20】
-要約：導入期・成長期を越え、成熟期には上場を目指す
-成長の道筋です。導入期は電気工事会社で記録と報告の自動化をつかみ、成長期は図面との照合で黒字化し、成熟期は電線や素材の工場、フィジカルAIと海外展開で上場を目指します。</a:t>
+              <a:t>【13:00 - 13:35】
+要約：チームは現場と技術の両方を揃える。顧問とパートナーで弱みを補う
+チームです。私は電線メーカーで地中送電線の施工管理を5年やり、独学でAIの仕組みを作ってきました。毎朝ニュースを音声で配信する仕組みも、個人で作って動かしています。ただ、私一人では足りません。技術の責任者、電気工事の施工管理経験者、カスタマーサクセスを揃え、業界の顧問、スマートグラスのメーカー、大学と組みます。</a:t>
             </a:r>
             <a:endParaRPr lang="en-US" dirty="0"/>
           </a:p>
@@ -3852,9 +3853,9 @@
           <a:p>
             <a:r>
               <a:rPr lang="en-US" dirty="0"/>
-              <a:t>【13:20 - 13:45】
-要約：500万円で、6か月以内に最初の1拠点を動かす
-500万円の使い道です。試作品の開発に250万円、端末に80万円、1拠点での実証に100万円、設立と契約に40万円、予備30万円。私の給料はゼロです。3か月で試作品、6か月で実証の結果を出します。条件は10%でのご提案です。</a:t>
+              <a:t>【13:35 - 13:55】
+要約：導入期・成長期を越え、成熟期には上場を目指す
+成長の道筋です。導入期は電気工事会社で記録と報告の自動化をつかみ、成長期は図面との照合で黒字化し、成熟期は電線や素材の工場、フィジカルAIと海外展開で上場を目指します。</a:t>
             </a:r>
             <a:endParaRPr lang="en-US" dirty="0"/>
           </a:p>
@@ -3942,9 +3943,9 @@
           <a:p>
             <a:r>
               <a:rPr lang="en-US" dirty="0"/>
-              <a:t>【13:45 - 14:05】
-要約：最大のリスクは自分。だから役割と判断基準を先に決めておく
-最後にリスクです。最大のリスクは、私自身が律速になること。だから役割を絞り、判断の基準を先に決めて、私がいなくても回る会社にします。日本の品質を支えてきた現場の勘を、人に依存しない形で残したい。その最初の一歩に、500万円をお願いします。</a:t>
+              <a:t>【13:55 - 14:20】
+要約：500万円で、6か月以内に最初の1拠点を動かす
+500万円の使い道です。試作品の開発に250万円、端末に80万円、1拠点での実証に100万円、設立と契約に40万円、予備30万円。私の給料はゼロです。3か月で試作品、6か月で実証の結果を出します。条件は10%でのご提案です。</a:t>
             </a:r>
             <a:endParaRPr lang="en-US" dirty="0"/>
           </a:p>
@@ -3968,6 +3969,96 @@
             <a:fld id="{F7021451-1387-4CA6-816F-3879F97B5CBC}" type="slidenum">
               <a:rPr lang="en-US"/>
               <a:t>24</a:t>
+            </a:fld>
+            <a:endParaRPr lang="en-US"/>
+          </a:p>
+        </p:txBody>
+      </p:sp>
+    </p:spTree>
+    <p:extLst>
+      <p:ext uri="{BB962C8B-B14F-4D97-AF65-F5344CB8AC3E}">
+        <p14:creationId xmlns:p14="http://schemas.microsoft.com/office/powerpoint/2010/main" val="1024086991"/>
+      </p:ext>
+    </p:extLst>
+  </p:cSld>
+  <p:clrMapOvr>
+    <a:masterClrMapping/>
+  </p:clrMapOvr>
+</p:notes>
+</file>
+
+<file path=ppt/notesSlides/notesSlide25.xml><?xml version="1.0" encoding="utf-8"?>
+<p:notes xmlns:a="http://schemas.openxmlformats.org/drawingml/2006/main" xmlns:r="http://schemas.openxmlformats.org/officeDocument/2006/relationships" xmlns:p="http://schemas.openxmlformats.org/presentationml/2006/main">
+  <p:cSld>
+    <p:spTree>
+      <p:nvGrpSpPr>
+        <p:cNvPr id="1" name=""/>
+        <p:cNvGrpSpPr/>
+        <p:nvPr/>
+      </p:nvGrpSpPr>
+      <p:grpSpPr>
+        <a:xfrm>
+          <a:off x="0" y="0"/>
+          <a:ext cx="0" cy="0"/>
+          <a:chOff x="0" y="0"/>
+          <a:chExt cx="0" cy="0"/>
+        </a:xfrm>
+      </p:grpSpPr>
+      <p:sp>
+        <p:nvSpPr>
+          <p:cNvPr id="2" name="Slide Image Placeholder 1"/>
+          <p:cNvSpPr>
+            <a:spLocks noGrp="1" noRot="1" noChangeAspect="1"/>
+          </p:cNvSpPr>
+          <p:nvPr>
+            <p:ph type="sldImg"/>
+          </p:nvPr>
+        </p:nvSpPr>
+        <p:spPr/>
+      </p:sp>
+      <p:sp>
+        <p:nvSpPr>
+          <p:cNvPr id="3" name="Notes Placeholder 2"/>
+          <p:cNvSpPr>
+            <a:spLocks noGrp="1"/>
+          </p:cNvSpPr>
+          <p:nvPr>
+            <p:ph type="body" idx="1"/>
+          </p:nvPr>
+        </p:nvSpPr>
+        <p:spPr/>
+        <p:txBody>
+          <a:bodyPr/>
+          <a:lstStyle/>
+          <a:p>
+            <a:r>
+              <a:rPr lang="en-US" dirty="0"/>
+              <a:t>【14:20 - 14:40】
+要約：最大のリスクは自分。だから役割と判断基準を先に決めておく
+最後にリスクです。最大のリスクは、私自身が律速になること。だから役割を絞り、判断の基準を先に決めて、私がいなくても回る会社にします。日本の品質を支えてきた現場の勘を、人に依存しない形で残したい。その最初の一歩に、500万円をお願いします。</a:t>
+            </a:r>
+            <a:endParaRPr lang="en-US" dirty="0"/>
+          </a:p>
+        </p:txBody>
+      </p:sp>
+      <p:sp>
+        <p:nvSpPr>
+          <p:cNvPr id="4" name="Slide Number Placeholder 3"/>
+          <p:cNvSpPr>
+            <a:spLocks noGrp="1"/>
+          </p:cNvSpPr>
+          <p:nvPr>
+            <p:ph type="sldNum" sz="quarter" idx="10"/>
+          </p:nvPr>
+        </p:nvSpPr>
+        <p:spPr/>
+        <p:txBody>
+          <a:bodyPr/>
+          <a:lstStyle/>
+          <a:p>
+            <a:fld id="{F7021451-1387-4CA6-816F-3879F97B5CBC}" type="slidenum">
+              <a:rPr lang="en-US"/>
+              <a:t>25</a:t>
             </a:fld>
             <a:endParaRPr lang="en-US"/>
           </a:p>
@@ -11589,7 +11680,7 @@
                       <a:r>
                         <a:rPr lang="en-US" sz="800" dirty="0">
                           <a:solidFill>
-                            <a:srgbClr val="1A1A1A"/>
+                            <a:srgbClr val="8C8C8C"/>
                           </a:solidFill>
                           <a:latin typeface="Meiryo" pitchFamily="34" charset="0"/>
                           <a:ea typeface="Meiryo" pitchFamily="34" charset="-122"/>
@@ -11791,7 +11882,7 @@
                       <a:r>
                         <a:rPr lang="en-US" sz="800" dirty="0">
                           <a:solidFill>
-                            <a:srgbClr val="1A1A1A"/>
+                            <a:srgbClr val="8C8C8C"/>
                           </a:solidFill>
                           <a:latin typeface="Meiryo" pitchFamily="34" charset="0"/>
                           <a:ea typeface="Meiryo" pitchFamily="34" charset="-122"/>
@@ -11843,7 +11934,7 @@
                       <a:r>
                         <a:rPr lang="en-US" sz="800" dirty="0">
                           <a:solidFill>
-                            <a:srgbClr val="1A1A1A"/>
+                            <a:srgbClr val="4D4D4D"/>
                           </a:solidFill>
                           <a:latin typeface="Meiryo" pitchFamily="34" charset="0"/>
                           <a:ea typeface="Meiryo" pitchFamily="34" charset="-122"/>
@@ -11893,7 +11984,7 @@
                       <a:r>
                         <a:rPr lang="en-US" sz="800" dirty="0">
                           <a:solidFill>
-                            <a:srgbClr val="1A1A1A"/>
+                            <a:srgbClr val="4D4D4D"/>
                           </a:solidFill>
                           <a:latin typeface="Meiryo" pitchFamily="34" charset="0"/>
                           <a:ea typeface="Meiryo" pitchFamily="34" charset="-122"/>
@@ -13073,7 +13164,7 @@
                       <a:r>
                         <a:rPr lang="en-US" sz="900" b="1" dirty="0">
                           <a:solidFill>
-                            <a:srgbClr val="1A1A1A"/>
+                            <a:srgbClr val="B8692E"/>
                           </a:solidFill>
                           <a:latin typeface="Meiryo" pitchFamily="34" charset="0"/>
                           <a:ea typeface="Meiryo" pitchFamily="34" charset="-122"/>
@@ -16493,7 +16584,7 @@
                 <a:ea typeface="Meiryo" pitchFamily="34" charset="-122"/>
                 <a:cs typeface="Meiryo" pitchFamily="34" charset="-120"/>
               </a:rPr>
-              <a:t>お客様は約2.1か月で回収。当社は社員1人2.8拠点を超える4年目に黒字</a:t>
+              <a:t>お客様は約2.1か月で回収。当社は社員1人3拠点を超える4年目に黒字</a:t>
             </a:r>
             <a:endParaRPr lang="en-US" sz="1000" dirty="0"/>
           </a:p>
@@ -17942,7 +18033,7 @@
                 <a:ea typeface="Meiryo" pitchFamily="34" charset="-122"/>
                 <a:cs typeface="Meiryo" pitchFamily="34" charset="-120"/>
               </a:rPr>
-              <a:t>LTV 約1,865万円</a:t>
+              <a:t>LTV 約1,852万円</a:t>
             </a:r>
             <a:pPr algn="l" indent="0" marL="0">
               <a:lnSpc>
@@ -17962,7 +18053,7 @@
                 <a:ea typeface="Meiryo" pitchFamily="34" charset="-122"/>
                 <a:cs typeface="Meiryo" pitchFamily="34" charset="-120"/>
               </a:rPr>
-              <a:t>（年粗利255万円×保守的に7年＋導入支援の粗利80万円）</a:t>
+              <a:t>（年粗利255万円×保守的に7年＋導入支援の粗利67万円）</a:t>
             </a:r>
             <a:endParaRPr lang="en-US" sz="800" dirty="0"/>
           </a:p>
@@ -17985,7 +18076,7 @@
                 <a:ea typeface="Meiryo" pitchFamily="34" charset="-122"/>
                 <a:cs typeface="Meiryo" pitchFamily="34" charset="-120"/>
               </a:rPr>
-              <a:t>CAC 約64万円</a:t>
+              <a:t>CAC 約88万円</a:t>
             </a:r>
             <a:pPr algn="l" indent="0" marL="0">
               <a:lnSpc>
@@ -18005,7 +18096,7 @@
                 <a:ea typeface="Meiryo" pitchFamily="34" charset="-122"/>
                 <a:cs typeface="Meiryo" pitchFamily="34" charset="-120"/>
               </a:rPr>
-              <a:t>（5年目：営業人件費1,600万円＋広告500万円÷新規33拠点）</a:t>
+              <a:t>（営業3人2,400万円＋広告500万円）÷新規33拠点</a:t>
             </a:r>
             <a:endParaRPr lang="en-US" sz="800" dirty="0"/>
           </a:p>
@@ -18028,7 +18119,7 @@
                 <a:ea typeface="Meiryo" pitchFamily="34" charset="-122"/>
                 <a:cs typeface="Meiryo" pitchFamily="34" charset="-120"/>
               </a:rPr>
-              <a:t>LTV/CAC 約29倍・獲得費用は約3か月で回収</a:t>
+              <a:t>LTV/CAC 約21倍・獲得費用は約4か月で回収</a:t>
             </a:r>
             <a:endParaRPr lang="en-US" sz="800" dirty="0"/>
           </a:p>
@@ -20870,7 +20961,7 @@
                           <a:ea typeface="Meiryo" pitchFamily="34" charset="-122"/>
                           <a:cs typeface="Meiryo" pitchFamily="34" charset="-120"/>
                         </a:rPr>
-                        <a:t>20名</a:t>
+                        <a:t>21名</a:t>
                       </a:r>
                       <a:endParaRPr lang="en-US" sz="800" dirty="0">
                         <a:latin typeface="Meiryo" charset="0"/>
@@ -20972,7 +21063,7 @@
                           <a:ea typeface="Meiryo" pitchFamily="34" charset="-122"/>
                           <a:cs typeface="Meiryo" pitchFamily="34" charset="-120"/>
                         </a:rPr>
-                        <a:t>2,480</a:t>
+                        <a:t>2,400</a:t>
                       </a:r>
                       <a:endParaRPr lang="en-US" sz="800" dirty="0">
                         <a:latin typeface="Meiryo" charset="0"/>
@@ -21022,7 +21113,7 @@
                           <a:ea typeface="Meiryo" pitchFamily="34" charset="-122"/>
                           <a:cs typeface="Meiryo" pitchFamily="34" charset="-120"/>
                         </a:rPr>
-                        <a:t>5,980</a:t>
+                        <a:t>5,667</a:t>
                       </a:r>
                       <a:endParaRPr lang="en-US" sz="800" dirty="0">
                         <a:latin typeface="Meiryo" charset="0"/>
@@ -21072,7 +21163,7 @@
                           <a:ea typeface="Meiryo" pitchFamily="34" charset="-122"/>
                           <a:cs typeface="Meiryo" pitchFamily="34" charset="-120"/>
                         </a:rPr>
-                        <a:t>11,470</a:t>
+                        <a:t>11,767</a:t>
                       </a:r>
                       <a:endParaRPr lang="en-US" sz="800" dirty="0">
                         <a:latin typeface="Meiryo" charset="0"/>
@@ -22392,7 +22483,7 @@
                           <a:ea typeface="Meiryo" pitchFamily="34" charset="-122"/>
                           <a:cs typeface="Meiryo" pitchFamily="34" charset="-120"/>
                         </a:rPr>
-                        <a:t>3,680</a:t>
+                        <a:t>3,600</a:t>
                       </a:r>
                       <a:endParaRPr lang="en-US" sz="800" dirty="0">
                         <a:latin typeface="Meiryo" charset="0"/>
@@ -22448,7 +22539,7 @@
                           <a:ea typeface="Meiryo" pitchFamily="34" charset="-122"/>
                           <a:cs typeface="Meiryo" pitchFamily="34" charset="-120"/>
                         </a:rPr>
-                        <a:t>7,880</a:t>
+                        <a:t>7,567</a:t>
                       </a:r>
                       <a:endParaRPr lang="en-US" sz="800" dirty="0">
                         <a:latin typeface="Meiryo" charset="0"/>
@@ -22504,7 +22595,7 @@
                           <a:ea typeface="Meiryo" pitchFamily="34" charset="-122"/>
                           <a:cs typeface="Meiryo" pitchFamily="34" charset="-120"/>
                         </a:rPr>
-                        <a:t>14,370</a:t>
+                        <a:t>14,667</a:t>
                       </a:r>
                       <a:endParaRPr lang="en-US" sz="800" dirty="0">
                         <a:latin typeface="Meiryo" charset="0"/>
@@ -22584,7 +22675,7 @@
                 <a:ea typeface="Meiryo" pitchFamily="34" charset="-122"/>
                 <a:cs typeface="Meiryo" pitchFamily="34" charset="-120"/>
               </a:rPr>
-              <a:t>所在地案：川崎市（関東一円へ日帰り）。家賃は1年目15坪・月20万円、5年目40坪・月50万円。人件費は1人年800万円</a:t>
+              <a:t>所在地案：川崎市（関東一円へ日帰り）。家賃は1年目15坪・月20万円、5年目40坪・月50万円。人件費は1人年800万円。導入支援に回った分は原価へ</a:t>
             </a:r>
             <a:endParaRPr lang="en-US" sz="800" dirty="0"/>
           </a:p>
@@ -22758,7 +22849,7 @@
                 <a:ea typeface="Meiryo" pitchFamily="34" charset="-122"/>
                 <a:cs typeface="Meiryo" pitchFamily="34" charset="-120"/>
               </a:rPr>
-              <a:t>損益分岐点 ─ 4年目に超え、5年目の余裕率は32%</a:t>
+              <a:t>損益分岐点 ─ 4年目に超え、5年目の余裕率は29%</a:t>
             </a:r>
             <a:endParaRPr lang="en-US" sz="2000" dirty="0"/>
           </a:p>
@@ -23179,7 +23270,7 @@
                           <a:ea typeface="Meiryo" pitchFamily="34" charset="-122"/>
                           <a:cs typeface="Meiryo" pitchFamily="34" charset="-120"/>
                         </a:rPr>
-                        <a:t>79</a:t>
+                        <a:t>76</a:t>
                       </a:r>
                       <a:endParaRPr lang="en-US" sz="850" dirty="0">
                         <a:latin typeface="Meiryo" charset="0"/>
@@ -23229,7 +23320,7 @@
                           <a:ea typeface="Meiryo" pitchFamily="34" charset="-122"/>
                           <a:cs typeface="Meiryo" pitchFamily="34" charset="-120"/>
                         </a:rPr>
-                        <a:t>107</a:t>
+                        <a:t>111</a:t>
                       </a:r>
                       <a:endParaRPr lang="en-US" sz="850" dirty="0">
                         <a:latin typeface="Meiryo" charset="0"/>
@@ -23279,7 +23370,7 @@
                           <a:ea typeface="Meiryo" pitchFamily="34" charset="-122"/>
                           <a:cs typeface="Meiryo" pitchFamily="34" charset="-120"/>
                         </a:rPr>
-                        <a:t>144</a:t>
+                        <a:t>147</a:t>
                       </a:r>
                       <a:endParaRPr lang="en-US" sz="850" dirty="0">
                         <a:latin typeface="Meiryo" charset="0"/>
@@ -23381,7 +23472,7 @@
                           <a:ea typeface="Meiryo" pitchFamily="34" charset="-122"/>
                           <a:cs typeface="Meiryo" pitchFamily="34" charset="-120"/>
                         </a:rPr>
-                        <a:t>66%</a:t>
+                        <a:t>63%</a:t>
                       </a:r>
                       <a:endParaRPr lang="en-US" sz="850" dirty="0">
                         <a:latin typeface="Meiryo" charset="0"/>
@@ -23431,7 +23522,7 @@
                           <a:ea typeface="Meiryo" pitchFamily="34" charset="-122"/>
                           <a:cs typeface="Meiryo" pitchFamily="34" charset="-120"/>
                         </a:rPr>
-                        <a:t>71%</a:t>
+                        <a:t>69%</a:t>
                       </a:r>
                       <a:endParaRPr lang="en-US" sz="850" dirty="0">
                         <a:latin typeface="Meiryo" charset="0"/>
@@ -23481,7 +23572,7 @@
                           <a:ea typeface="Meiryo" pitchFamily="34" charset="-122"/>
                           <a:cs typeface="Meiryo" pitchFamily="34" charset="-120"/>
                         </a:rPr>
-                        <a:t>73%</a:t>
+                        <a:t>72%</a:t>
                       </a:r>
                       <a:endParaRPr lang="en-US" sz="850" dirty="0">
                         <a:latin typeface="Meiryo" charset="0"/>
@@ -23645,7 +23736,7 @@
                           <a:ea typeface="Meiryo" pitchFamily="34" charset="-122"/>
                           <a:cs typeface="Meiryo" pitchFamily="34" charset="-120"/>
                         </a:rPr>
-                        <a:t>151</a:t>
+                        <a:t>161</a:t>
                       </a:r>
                       <a:endParaRPr lang="en-US" sz="850" dirty="0">
                         <a:latin typeface="Meiryo" charset="0"/>
@@ -23701,7 +23792,7 @@
                           <a:ea typeface="Meiryo" pitchFamily="34" charset="-122"/>
                           <a:cs typeface="Meiryo" pitchFamily="34" charset="-120"/>
                         </a:rPr>
-                        <a:t>196</a:t>
+                        <a:t>205</a:t>
                       </a:r>
                       <a:endParaRPr lang="en-US" sz="850" dirty="0">
                         <a:latin typeface="Meiryo" charset="0"/>
@@ -24061,7 +24152,7 @@
                           <a:ea typeface="Meiryo" pitchFamily="34" charset="-122"/>
                           <a:cs typeface="Meiryo" pitchFamily="34" charset="-120"/>
                         </a:rPr>
-                        <a:t>21%</a:t>
+                        <a:t>15%</a:t>
                       </a:r>
                       <a:endParaRPr lang="en-US" sz="850" dirty="0">
                         <a:latin typeface="Meiryo" charset="0"/>
@@ -24111,7 +24202,7 @@
                           <a:ea typeface="Meiryo" pitchFamily="34" charset="-122"/>
                           <a:cs typeface="Meiryo" pitchFamily="34" charset="-120"/>
                         </a:rPr>
-                        <a:t>32%</a:t>
+                        <a:t>29%</a:t>
                       </a:r>
                       <a:endParaRPr lang="en-US" sz="850" dirty="0">
                         <a:latin typeface="Meiryo" charset="0"/>
@@ -24231,7 +24322,7 @@
                 <a:ea typeface="Meiryo" pitchFamily="34" charset="-122"/>
                 <a:cs typeface="Meiryo" pitchFamily="34" charset="-120"/>
               </a:rPr>
-              <a:t>販管費／人 713万円 ÷ 粗利／拠点 255万円</a:t>
+              <a:t>販管費／人 694万円 ÷ 粗利／拠点 255万円 ＝ 2.7</a:t>
             </a:r>
             <a:endParaRPr lang="en-US" sz="900" dirty="0"/>
           </a:p>
@@ -24254,7 +24345,7 @@
                 <a:ea typeface="Meiryo" pitchFamily="34" charset="-122"/>
                 <a:cs typeface="Meiryo" pitchFamily="34" charset="-120"/>
               </a:rPr>
-              <a:t>＝ 社員1人あたり2.8拠点</a:t>
+              <a:t>新規は初年度半額 → 期末で1人3拠点が目安</a:t>
             </a:r>
             <a:endParaRPr lang="en-US" sz="900" dirty="0"/>
           </a:p>
@@ -24277,7 +24368,7 @@
                 <a:ea typeface="Meiryo" pitchFamily="34" charset="-122"/>
                 <a:cs typeface="Meiryo" pitchFamily="34" charset="-120"/>
               </a:rPr>
-              <a:t>3年目 2.73（未達）→ 4年目 3.67（超過）</a:t>
+              <a:t>3年目 2.73（未達）→ 4年目 3.44（超過）</a:t>
             </a:r>
             <a:endParaRPr lang="en-US" sz="900" dirty="0"/>
           </a:p>
@@ -24319,7 +24410,7 @@
                 <a:ea typeface="Meiryo" pitchFamily="34" charset="-122"/>
                 <a:cs typeface="Meiryo" pitchFamily="34" charset="-120"/>
               </a:rPr>
-              <a:t>安全余裕率＝（売上−損益分岐点売上）÷売上。1〜2年目の損益分岐点売上は92・92百万円（売上12・48百万円）</a:t>
+              <a:t>安全余裕率＝（売上−損益分岐点売上）÷売上。1〜2年目の損益分岐点売上は108・94百万円（売上12・48百万円）</a:t>
             </a:r>
             <a:endParaRPr lang="en-US" sz="800" dirty="0"/>
           </a:p>
@@ -26769,7 +26860,7 @@
                 <a:ea typeface="Meiryo" pitchFamily="34" charset="-122"/>
                 <a:cs typeface="Meiryo" pitchFamily="34" charset="-120"/>
               </a:rPr>
-              <a:t>現金残高は簡易計算（期首残高＋調達＋営業損益）。税金・減価償却・融資の返済・運転資本の増減は含めない。固定費3か月分＝3年目の販管費79百万円÷4。公庫の制度：融資限度額7,200万円（うち運転資金4,800万円）</a:t>
+              <a:t>簡易計算（税・償却・返済・運転資本を除く）。固定費3か月分＝3年目の販管費76百万円÷4。出資1.15億円が前提で、公庫だけなら1年目から現金不足</a:t>
             </a:r>
             <a:endParaRPr lang="en-US" sz="800" dirty="0"/>
           </a:p>
@@ -26884,7 +26975,7 @@
                 <a:ea typeface="Meiryo" pitchFamily="34" charset="-122"/>
                 <a:cs typeface="Meiryo" pitchFamily="34" charset="-120"/>
               </a:rPr>
-              <a:t>⑦ </a:t>
+              <a:t>⑥ </a:t>
             </a:r>
             <a:pPr algn="l" indent="0" marL="0">
               <a:lnSpc>
@@ -26901,7 +26992,7 @@
                 <a:ea typeface="Meiryo" pitchFamily="34" charset="-122"/>
                 <a:cs typeface="Meiryo" pitchFamily="34" charset="-120"/>
               </a:rPr>
-              <a:t>チーム ─ 現場と技術を揃え、顧問とパートナーで補う</a:t>
+              <a:t>黒字化の条件 ─ 計画の6割取れれば黒字になる</a:t>
             </a:r>
             <a:endParaRPr lang="en-US" sz="2000" dirty="0"/>
           </a:p>
@@ -26943,7 +27034,7 @@
                 <a:ea typeface="Meiryo" pitchFamily="34" charset="-122"/>
                 <a:cs typeface="Meiryo" pitchFamily="34" charset="-120"/>
               </a:rPr>
-              <a:t>創業者の経歴・チームメンバーのスキル・外部パートナーと顧問</a:t>
+              <a:t>届かなかった場合に備え、進む・直す・止まるの線を先に引いておく</a:t>
             </a:r>
             <a:endParaRPr lang="en-US" sz="1200" dirty="0"/>
           </a:p>
@@ -26951,14 +27042,2026 @@
       </p:sp>
       <p:sp>
         <p:nvSpPr>
-          <p:cNvPr id="5" name="founder"/>
+          <p:cNvPr id="5" name="Text 2"/>
+          <p:cNvSpPr txBox="1"/>
+          <p:nvPr/>
+        </p:nvSpPr>
+        <p:spPr>
+          <a:xfrm>
+            <a:off x="365760" y="1051560"/>
+            <a:ext cx="4846320" cy="237744"/>
+          </a:xfrm>
+          <a:prstGeom prst="rect">
+            <a:avLst/>
+          </a:prstGeom>
+          <a:noFill/>
+          <a:ln/>
+        </p:spPr>
+        <p:txBody>
+          <a:bodyPr wrap="square" lIns="0" tIns="0" rIns="0" bIns="0" rtlCol="0" anchor="t"/>
+          <a:lstStyle/>
+          <a:p>
+            <a:pPr algn="l" indent="0" marL="0">
+              <a:lnSpc>
+                <a:spcPct val="115000"/>
+              </a:lnSpc>
+              <a:buNone/>
+            </a:pPr>
+            <a:r>
+              <a:rPr lang="en-US" sz="1050" b="1" dirty="0">
+                <a:solidFill>
+                  <a:srgbClr val="1A1A1A"/>
+                </a:solidFill>
+                <a:latin typeface="Meiryo" pitchFamily="34" charset="0"/>
+                <a:ea typeface="Meiryo" pitchFamily="34" charset="-122"/>
+                <a:cs typeface="Meiryo" pitchFamily="34" charset="-120"/>
+              </a:rPr>
+              <a:t>新規拠点が計画に届かなかったら（百万円）</a:t>
+            </a:r>
+            <a:endParaRPr lang="en-US" sz="1050" dirty="0"/>
+          </a:p>
+        </p:txBody>
+      </p:sp>
+      <p:graphicFrame>
+        <p:nvGraphicFramePr>
+          <p:cNvPr id="22" name="shortfall"/>
+          <p:cNvGraphicFramePr>
+            <a:graphicFrameLocks noGrp="1"/>
+          </p:cNvGraphicFramePr>
+          <p:nvPr>
+            <p:extLst>
+              <p:ext uri="{D42A27DB-BD31-4B8C-83A1-F6EECF244321}">
+                <p14:modId xmlns:p14="http://schemas.microsoft.com/office/powerpoint/2010/main" val="1579011935"/>
+              </p:ext>
+            </p:extLst>
+          </p:nvPr>
+        </p:nvGraphicFramePr>
+        <p:xfrm>
+          <a:off x="365760" y="1554480"/>
+          <a:ext cx="4846320" cy="914400"/>
+        </p:xfrm>
+        <a:graphic>
+          <a:graphicData uri="http://schemas.openxmlformats.org/drawingml/2006/table">
+            <a:tbl>
+              <a:tblPr/>
+              <a:tblGrid>
+                <a:gridCol w="960120"/>
+                <a:gridCol w="1325880"/>
+                <a:gridCol w="640080"/>
+                <a:gridCol w="640080"/>
+                <a:gridCol w="640080"/>
+                <a:gridCol w="640080"/>
+              </a:tblGrid>
+              <a:tr h="292608">
+                <a:tc>
+                  <a:txBody>
+                    <a:bodyPr/>
+                    <a:lstStyle/>
+                    <a:p>
+                      <a:pPr algn="l" indent="0" marL="0">
+                        <a:buNone/>
+                      </a:pPr>
+                      <a:r>
+                        <a:rPr lang="en-US" sz="850" b="1" dirty="0">
+                          <a:solidFill>
+                            <a:srgbClr val="1A1A1A"/>
+                          </a:solidFill>
+                          <a:latin typeface="Meiryo" pitchFamily="34" charset="0"/>
+                          <a:ea typeface="Meiryo" pitchFamily="34" charset="-122"/>
+                          <a:cs typeface="Meiryo" pitchFamily="34" charset="-120"/>
+                        </a:rPr>
+                        <a:t>新規の達成度</a:t>
+                      </a:r>
+                      <a:endParaRPr lang="en-US" sz="850" dirty="0">
+                        <a:latin typeface="Meiryo" charset="0"/>
+                        <a:ea typeface="Meiryo" charset="0"/>
+                        <a:cs typeface="Meiryo" charset="0"/>
+                      </a:endParaRPr>
+                    </a:p>
+                  </a:txBody>
+                  <a:tcPr marL="54864" marR="54864" marT="18288" marB="18288" anchor="ctr">
+                    <a:lnL w="0" cap="flat" cmpd="sng" algn="ctr">
+                      <a:noFill/>
+                    </a:lnL>
+                    <a:lnR w="0" cap="flat" cmpd="sng" algn="ctr">
+                      <a:noFill/>
+                    </a:lnR>
+                    <a:lnT w="0" cap="flat" cmpd="sng" algn="ctr">
+                      <a:noFill/>
+                    </a:lnT>
+                    <a:lnB w="19050" cap="flat" cmpd="sng" algn="ctr">
+                      <a:solidFill>
+                        <a:srgbClr val="1A1A1A"/>
+                      </a:solidFill>
+                      <a:prstDash val="solid"/>
+                      <a:round/>
+                      <a:headEnd type="none" w="med" len="med"/>
+                      <a:tailEnd type="none" w="med" len="med"/>
+                    </a:lnB>
+                    <a:solidFill>
+                      <a:srgbClr val="F2F2F2"/>
+                    </a:solidFill>
+                  </a:tcPr>
+                </a:tc>
+                <a:tc>
+                  <a:txBody>
+                    <a:bodyPr/>
+                    <a:lstStyle/>
+                    <a:p>
+                      <a:pPr algn="ctr" indent="0" marL="0">
+                        <a:buNone/>
+                      </a:pPr>
+                      <a:r>
+                        <a:rPr lang="en-US" sz="850" b="1" dirty="0">
+                          <a:solidFill>
+                            <a:srgbClr val="1A1A1A"/>
+                          </a:solidFill>
+                          <a:latin typeface="Meiryo" pitchFamily="34" charset="0"/>
+                          <a:ea typeface="Meiryo" pitchFamily="34" charset="-122"/>
+                          <a:cs typeface="Meiryo" pitchFamily="34" charset="-120"/>
+                        </a:rPr>
+                        <a:t>新規拠点（1〜5年目）</a:t>
+                      </a:r>
+                      <a:endParaRPr lang="en-US" sz="850" dirty="0">
+                        <a:latin typeface="Meiryo" charset="0"/>
+                        <a:ea typeface="Meiryo" charset="0"/>
+                        <a:cs typeface="Meiryo" charset="0"/>
+                      </a:endParaRPr>
+                    </a:p>
+                  </a:txBody>
+                  <a:tcPr marL="54864" marR="54864" marT="18288" marB="18288" anchor="ctr">
+                    <a:lnL w="0" cap="flat" cmpd="sng" algn="ctr">
+                      <a:noFill/>
+                    </a:lnL>
+                    <a:lnR w="0" cap="flat" cmpd="sng" algn="ctr">
+                      <a:noFill/>
+                    </a:lnR>
+                    <a:lnT w="0" cap="flat" cmpd="sng" algn="ctr">
+                      <a:noFill/>
+                    </a:lnT>
+                    <a:lnB w="19050" cap="flat" cmpd="sng" algn="ctr">
+                      <a:solidFill>
+                        <a:srgbClr val="1A1A1A"/>
+                      </a:solidFill>
+                      <a:prstDash val="solid"/>
+                      <a:round/>
+                      <a:headEnd type="none" w="med" len="med"/>
+                      <a:tailEnd type="none" w="med" len="med"/>
+                    </a:lnB>
+                    <a:solidFill>
+                      <a:srgbClr val="F2F2F2"/>
+                    </a:solidFill>
+                  </a:tcPr>
+                </a:tc>
+                <a:tc>
+                  <a:txBody>
+                    <a:bodyPr/>
+                    <a:lstStyle/>
+                    <a:p>
+                      <a:pPr algn="ctr" indent="0" marL="0">
+                        <a:buNone/>
+                      </a:pPr>
+                      <a:r>
+                        <a:rPr lang="en-US" sz="850" b="1" dirty="0">
+                          <a:solidFill>
+                            <a:srgbClr val="1A1A1A"/>
+                          </a:solidFill>
+                          <a:latin typeface="Meiryo" pitchFamily="34" charset="0"/>
+                          <a:ea typeface="Meiryo" pitchFamily="34" charset="-122"/>
+                          <a:cs typeface="Meiryo" pitchFamily="34" charset="-120"/>
+                        </a:rPr>
+                        <a:t>黒字化</a:t>
+                      </a:r>
+                      <a:endParaRPr lang="en-US" sz="850" dirty="0">
+                        <a:latin typeface="Meiryo" charset="0"/>
+                        <a:ea typeface="Meiryo" charset="0"/>
+                        <a:cs typeface="Meiryo" charset="0"/>
+                      </a:endParaRPr>
+                    </a:p>
+                  </a:txBody>
+                  <a:tcPr marL="54864" marR="54864" marT="18288" marB="18288" anchor="ctr">
+                    <a:lnL w="0" cap="flat" cmpd="sng" algn="ctr">
+                      <a:noFill/>
+                    </a:lnL>
+                    <a:lnR w="0" cap="flat" cmpd="sng" algn="ctr">
+                      <a:noFill/>
+                    </a:lnR>
+                    <a:lnT w="0" cap="flat" cmpd="sng" algn="ctr">
+                      <a:noFill/>
+                    </a:lnT>
+                    <a:lnB w="19050" cap="flat" cmpd="sng" algn="ctr">
+                      <a:solidFill>
+                        <a:srgbClr val="1A1A1A"/>
+                      </a:solidFill>
+                      <a:prstDash val="solid"/>
+                      <a:round/>
+                      <a:headEnd type="none" w="med" len="med"/>
+                      <a:tailEnd type="none" w="med" len="med"/>
+                    </a:lnB>
+                    <a:solidFill>
+                      <a:srgbClr val="F2F2F2"/>
+                    </a:solidFill>
+                  </a:tcPr>
+                </a:tc>
+                <a:tc>
+                  <a:txBody>
+                    <a:bodyPr/>
+                    <a:lstStyle/>
+                    <a:p>
+                      <a:pPr algn="ctr" indent="0" marL="0">
+                        <a:buNone/>
+                      </a:pPr>
+                      <a:r>
+                        <a:rPr lang="en-US" sz="850" b="1" dirty="0">
+                          <a:solidFill>
+                            <a:srgbClr val="1A1A1A"/>
+                          </a:solidFill>
+                          <a:latin typeface="Meiryo" pitchFamily="34" charset="0"/>
+                          <a:ea typeface="Meiryo" pitchFamily="34" charset="-122"/>
+                          <a:cs typeface="Meiryo" pitchFamily="34" charset="-120"/>
+                        </a:rPr>
+                        <a:t>最低現金</a:t>
+                      </a:r>
+                      <a:endParaRPr lang="en-US" sz="850" dirty="0">
+                        <a:latin typeface="Meiryo" charset="0"/>
+                        <a:ea typeface="Meiryo" charset="0"/>
+                        <a:cs typeface="Meiryo" charset="0"/>
+                      </a:endParaRPr>
+                    </a:p>
+                  </a:txBody>
+                  <a:tcPr marL="54864" marR="54864" marT="18288" marB="18288" anchor="ctr">
+                    <a:lnL w="0" cap="flat" cmpd="sng" algn="ctr">
+                      <a:noFill/>
+                    </a:lnL>
+                    <a:lnR w="0" cap="flat" cmpd="sng" algn="ctr">
+                      <a:noFill/>
+                    </a:lnR>
+                    <a:lnT w="0" cap="flat" cmpd="sng" algn="ctr">
+                      <a:noFill/>
+                    </a:lnT>
+                    <a:lnB w="19050" cap="flat" cmpd="sng" algn="ctr">
+                      <a:solidFill>
+                        <a:srgbClr val="1A1A1A"/>
+                      </a:solidFill>
+                      <a:prstDash val="solid"/>
+                      <a:round/>
+                      <a:headEnd type="none" w="med" len="med"/>
+                      <a:tailEnd type="none" w="med" len="med"/>
+                    </a:lnB>
+                    <a:solidFill>
+                      <a:srgbClr val="F2F2F2"/>
+                    </a:solidFill>
+                  </a:tcPr>
+                </a:tc>
+                <a:tc>
+                  <a:txBody>
+                    <a:bodyPr/>
+                    <a:lstStyle/>
+                    <a:p>
+                      <a:pPr algn="ctr" indent="0" marL="0">
+                        <a:buNone/>
+                      </a:pPr>
+                      <a:r>
+                        <a:rPr lang="en-US" sz="850" b="1" dirty="0">
+                          <a:solidFill>
+                            <a:srgbClr val="1A1A1A"/>
+                          </a:solidFill>
+                          <a:latin typeface="Meiryo" pitchFamily="34" charset="0"/>
+                          <a:ea typeface="Meiryo" pitchFamily="34" charset="-122"/>
+                          <a:cs typeface="Meiryo" pitchFamily="34" charset="-120"/>
+                        </a:rPr>
+                        <a:t>黒字化</a:t>
+                      </a:r>
+                      <a:endParaRPr lang="en-US" sz="850" dirty="0">
+                        <a:latin typeface="Meiryo" charset="0"/>
+                        <a:ea typeface="Meiryo" charset="0"/>
+                        <a:cs typeface="Meiryo" charset="0"/>
+                      </a:endParaRPr>
+                    </a:p>
+                  </a:txBody>
+                  <a:tcPr marL="54864" marR="54864" marT="18288" marB="18288" anchor="ctr">
+                    <a:lnL w="0" cap="flat" cmpd="sng" algn="ctr">
+                      <a:noFill/>
+                    </a:lnL>
+                    <a:lnR w="0" cap="flat" cmpd="sng" algn="ctr">
+                      <a:noFill/>
+                    </a:lnR>
+                    <a:lnT w="0" cap="flat" cmpd="sng" algn="ctr">
+                      <a:noFill/>
+                    </a:lnT>
+                    <a:lnB w="19050" cap="flat" cmpd="sng" algn="ctr">
+                      <a:solidFill>
+                        <a:srgbClr val="1A1A1A"/>
+                      </a:solidFill>
+                      <a:prstDash val="solid"/>
+                      <a:round/>
+                      <a:headEnd type="none" w="med" len="med"/>
+                      <a:tailEnd type="none" w="med" len="med"/>
+                    </a:lnB>
+                    <a:solidFill>
+                      <a:srgbClr val="F2F2F2"/>
+                    </a:solidFill>
+                  </a:tcPr>
+                </a:tc>
+                <a:tc>
+                  <a:txBody>
+                    <a:bodyPr/>
+                    <a:lstStyle/>
+                    <a:p>
+                      <a:pPr algn="ctr" indent="0" marL="0">
+                        <a:buNone/>
+                      </a:pPr>
+                      <a:r>
+                        <a:rPr lang="en-US" sz="850" b="1" dirty="0">
+                          <a:solidFill>
+                            <a:srgbClr val="1A1A1A"/>
+                          </a:solidFill>
+                          <a:latin typeface="Meiryo" pitchFamily="34" charset="0"/>
+                          <a:ea typeface="Meiryo" pitchFamily="34" charset="-122"/>
+                          <a:cs typeface="Meiryo" pitchFamily="34" charset="-120"/>
+                        </a:rPr>
+                        <a:t>最低現金</a:t>
+                      </a:r>
+                      <a:endParaRPr lang="en-US" sz="850" dirty="0">
+                        <a:latin typeface="Meiryo" charset="0"/>
+                        <a:ea typeface="Meiryo" charset="0"/>
+                        <a:cs typeface="Meiryo" charset="0"/>
+                      </a:endParaRPr>
+                    </a:p>
+                  </a:txBody>
+                  <a:tcPr marL="54864" marR="54864" marT="18288" marB="18288" anchor="ctr">
+                    <a:lnL w="0" cap="flat" cmpd="sng" algn="ctr">
+                      <a:noFill/>
+                    </a:lnL>
+                    <a:lnR w="0" cap="flat" cmpd="sng" algn="ctr">
+                      <a:noFill/>
+                    </a:lnR>
+                    <a:lnT w="0" cap="flat" cmpd="sng" algn="ctr">
+                      <a:noFill/>
+                    </a:lnT>
+                    <a:lnB w="19050" cap="flat" cmpd="sng" algn="ctr">
+                      <a:solidFill>
+                        <a:srgbClr val="1A1A1A"/>
+                      </a:solidFill>
+                      <a:prstDash val="solid"/>
+                      <a:round/>
+                      <a:headEnd type="none" w="med" len="med"/>
+                      <a:tailEnd type="none" w="med" len="med"/>
+                    </a:lnB>
+                    <a:solidFill>
+                      <a:srgbClr val="F2F2F2"/>
+                    </a:solidFill>
+                  </a:tcPr>
+                </a:tc>
+              </a:tr>
+              <a:tr h="292608">
+                <a:tc>
+                  <a:txBody>
+                    <a:bodyPr/>
+                    <a:lstStyle/>
+                    <a:p>
+                      <a:pPr algn="l" indent="0" marL="0">
+                        <a:buNone/>
+                      </a:pPr>
+                      <a:r>
+                        <a:rPr lang="en-US" sz="850" dirty="0">
+                          <a:solidFill>
+                            <a:srgbClr val="1A1A1A"/>
+                          </a:solidFill>
+                          <a:latin typeface="Meiryo" pitchFamily="34" charset="0"/>
+                          <a:ea typeface="Meiryo" pitchFamily="34" charset="-122"/>
+                          <a:cs typeface="Meiryo" pitchFamily="34" charset="-120"/>
+                        </a:rPr>
+                        <a:t>計画どおり</a:t>
+                      </a:r>
+                      <a:endParaRPr lang="en-US" sz="850" dirty="0">
+                        <a:latin typeface="Meiryo" charset="0"/>
+                        <a:ea typeface="Meiryo" charset="0"/>
+                        <a:cs typeface="Meiryo" charset="0"/>
+                      </a:endParaRPr>
+                    </a:p>
+                  </a:txBody>
+                  <a:tcPr marL="54864" marR="54864" marT="18288" marB="18288" anchor="ctr">
+                    <a:lnL w="0" cap="flat" cmpd="sng" algn="ctr">
+                      <a:noFill/>
+                    </a:lnL>
+                    <a:lnR w="0" cap="flat" cmpd="sng" algn="ctr">
+                      <a:noFill/>
+                    </a:lnR>
+                    <a:lnT w="0" cap="flat" cmpd="sng" algn="ctr">
+                      <a:noFill/>
+                    </a:lnT>
+                    <a:lnB w="9525" cap="flat" cmpd="sng" algn="ctr">
+                      <a:solidFill>
+                        <a:srgbClr val="BFBFBF"/>
+                      </a:solidFill>
+                      <a:prstDash val="solid"/>
+                      <a:round/>
+                      <a:headEnd type="none" w="med" len="med"/>
+                      <a:tailEnd type="none" w="med" len="med"/>
+                    </a:lnB>
+                    <a:solidFill>
+                      <a:srgbClr val="FFFFFF"/>
+                    </a:solidFill>
+                  </a:tcPr>
+                </a:tc>
+                <a:tc>
+                  <a:txBody>
+                    <a:bodyPr/>
+                    <a:lstStyle/>
+                    <a:p>
+                      <a:pPr algn="ctr" indent="0" marL="0">
+                        <a:buNone/>
+                      </a:pPr>
+                      <a:r>
+                        <a:rPr lang="en-US" sz="850" dirty="0">
+                          <a:solidFill>
+                            <a:srgbClr val="4D4D4D"/>
+                          </a:solidFill>
+                          <a:latin typeface="Meiryo" pitchFamily="34" charset="0"/>
+                          <a:ea typeface="Meiryo" pitchFamily="34" charset="-122"/>
+                          <a:cs typeface="Meiryo" pitchFamily="34" charset="-120"/>
+                        </a:rPr>
+                        <a:t>3・9・18・27・33</a:t>
+                      </a:r>
+                      <a:endParaRPr lang="en-US" sz="850" dirty="0">
+                        <a:latin typeface="Meiryo" charset="0"/>
+                        <a:ea typeface="Meiryo" charset="0"/>
+                        <a:cs typeface="Meiryo" charset="0"/>
+                      </a:endParaRPr>
+                    </a:p>
+                  </a:txBody>
+                  <a:tcPr marL="54864" marR="54864" marT="18288" marB="18288" anchor="ctr">
+                    <a:lnL w="0" cap="flat" cmpd="sng" algn="ctr">
+                      <a:noFill/>
+                    </a:lnL>
+                    <a:lnR w="0" cap="flat" cmpd="sng" algn="ctr">
+                      <a:noFill/>
+                    </a:lnR>
+                    <a:lnT w="0" cap="flat" cmpd="sng" algn="ctr">
+                      <a:noFill/>
+                    </a:lnT>
+                    <a:lnB w="9525" cap="flat" cmpd="sng" algn="ctr">
+                      <a:solidFill>
+                        <a:srgbClr val="BFBFBF"/>
+                      </a:solidFill>
+                      <a:prstDash val="solid"/>
+                      <a:round/>
+                      <a:headEnd type="none" w="med" len="med"/>
+                      <a:tailEnd type="none" w="med" len="med"/>
+                    </a:lnB>
+                    <a:solidFill>
+                      <a:srgbClr val="FFFFFF"/>
+                    </a:solidFill>
+                  </a:tcPr>
+                </a:tc>
+                <a:tc>
+                  <a:txBody>
+                    <a:bodyPr/>
+                    <a:lstStyle/>
+                    <a:p>
+                      <a:pPr algn="ctr" indent="0" marL="0">
+                        <a:buNone/>
+                      </a:pPr>
+                      <a:r>
+                        <a:rPr lang="en-US" sz="850" dirty="0">
+                          <a:solidFill>
+                            <a:srgbClr val="1A1A1A"/>
+                          </a:solidFill>
+                          <a:latin typeface="Meiryo" pitchFamily="34" charset="0"/>
+                          <a:ea typeface="Meiryo" pitchFamily="34" charset="-122"/>
+                          <a:cs typeface="Meiryo" pitchFamily="34" charset="-120"/>
+                        </a:rPr>
+                        <a:t>4年目</a:t>
+                      </a:r>
+                      <a:endParaRPr lang="en-US" sz="850" dirty="0">
+                        <a:latin typeface="Meiryo" charset="0"/>
+                        <a:ea typeface="Meiryo" charset="0"/>
+                        <a:cs typeface="Meiryo" charset="0"/>
+                      </a:endParaRPr>
+                    </a:p>
+                  </a:txBody>
+                  <a:tcPr marL="54864" marR="54864" marT="18288" marB="18288" anchor="ctr">
+                    <a:lnL w="0" cap="flat" cmpd="sng" algn="ctr">
+                      <a:noFill/>
+                    </a:lnL>
+                    <a:lnR w="0" cap="flat" cmpd="sng" algn="ctr">
+                      <a:noFill/>
+                    </a:lnR>
+                    <a:lnT w="0" cap="flat" cmpd="sng" algn="ctr">
+                      <a:noFill/>
+                    </a:lnT>
+                    <a:lnB w="9525" cap="flat" cmpd="sng" algn="ctr">
+                      <a:solidFill>
+                        <a:srgbClr val="BFBFBF"/>
+                      </a:solidFill>
+                      <a:prstDash val="solid"/>
+                      <a:round/>
+                      <a:headEnd type="none" w="med" len="med"/>
+                      <a:tailEnd type="none" w="med" len="med"/>
+                    </a:lnB>
+                    <a:solidFill>
+                      <a:srgbClr val="FFFFFF"/>
+                    </a:solidFill>
+                  </a:tcPr>
+                </a:tc>
+                <a:tc>
+                  <a:txBody>
+                    <a:bodyPr/>
+                    <a:lstStyle/>
+                    <a:p>
+                      <a:pPr algn="ctr" indent="0" marL="0">
+                        <a:buNone/>
+                      </a:pPr>
+                      <a:r>
+                        <a:rPr lang="en-US" sz="850" dirty="0">
+                          <a:solidFill>
+                            <a:srgbClr val="1A1A1A"/>
+                          </a:solidFill>
+                          <a:latin typeface="Meiryo" pitchFamily="34" charset="0"/>
+                          <a:ea typeface="Meiryo" pitchFamily="34" charset="-122"/>
+                          <a:cs typeface="Meiryo" pitchFamily="34" charset="-120"/>
+                        </a:rPr>
+                        <a:t>60</a:t>
+                      </a:r>
+                      <a:endParaRPr lang="en-US" sz="850" dirty="0">
+                        <a:latin typeface="Meiryo" charset="0"/>
+                        <a:ea typeface="Meiryo" charset="0"/>
+                        <a:cs typeface="Meiryo" charset="0"/>
+                      </a:endParaRPr>
+                    </a:p>
+                  </a:txBody>
+                  <a:tcPr marL="54864" marR="54864" marT="18288" marB="18288" anchor="ctr">
+                    <a:lnL w="0" cap="flat" cmpd="sng" algn="ctr">
+                      <a:noFill/>
+                    </a:lnL>
+                    <a:lnR w="0" cap="flat" cmpd="sng" algn="ctr">
+                      <a:noFill/>
+                    </a:lnR>
+                    <a:lnT w="0" cap="flat" cmpd="sng" algn="ctr">
+                      <a:noFill/>
+                    </a:lnT>
+                    <a:lnB w="9525" cap="flat" cmpd="sng" algn="ctr">
+                      <a:solidFill>
+                        <a:srgbClr val="BFBFBF"/>
+                      </a:solidFill>
+                      <a:prstDash val="solid"/>
+                      <a:round/>
+                      <a:headEnd type="none" w="med" len="med"/>
+                      <a:tailEnd type="none" w="med" len="med"/>
+                    </a:lnB>
+                    <a:solidFill>
+                      <a:srgbClr val="FFFFFF"/>
+                    </a:solidFill>
+                  </a:tcPr>
+                </a:tc>
+                <a:tc>
+                  <a:txBody>
+                    <a:bodyPr/>
+                    <a:lstStyle/>
+                    <a:p>
+                      <a:pPr algn="ctr" indent="0" marL="0">
+                        <a:buNone/>
+                      </a:pPr>
+                      <a:r>
+                        <a:rPr lang="en-US" sz="850" dirty="0">
+                          <a:solidFill>
+                            <a:srgbClr val="1A1A1A"/>
+                          </a:solidFill>
+                          <a:latin typeface="Meiryo" pitchFamily="34" charset="0"/>
+                          <a:ea typeface="Meiryo" pitchFamily="34" charset="-122"/>
+                          <a:cs typeface="Meiryo" pitchFamily="34" charset="-120"/>
+                        </a:rPr>
+                        <a:t>4年目</a:t>
+                      </a:r>
+                      <a:endParaRPr lang="en-US" sz="850" dirty="0">
+                        <a:latin typeface="Meiryo" charset="0"/>
+                        <a:ea typeface="Meiryo" charset="0"/>
+                        <a:cs typeface="Meiryo" charset="0"/>
+                      </a:endParaRPr>
+                    </a:p>
+                  </a:txBody>
+                  <a:tcPr marL="54864" marR="54864" marT="18288" marB="18288" anchor="ctr">
+                    <a:lnL w="0" cap="flat" cmpd="sng" algn="ctr">
+                      <a:noFill/>
+                    </a:lnL>
+                    <a:lnR w="0" cap="flat" cmpd="sng" algn="ctr">
+                      <a:noFill/>
+                    </a:lnR>
+                    <a:lnT w="0" cap="flat" cmpd="sng" algn="ctr">
+                      <a:noFill/>
+                    </a:lnT>
+                    <a:lnB w="9525" cap="flat" cmpd="sng" algn="ctr">
+                      <a:solidFill>
+                        <a:srgbClr val="BFBFBF"/>
+                      </a:solidFill>
+                      <a:prstDash val="solid"/>
+                      <a:round/>
+                      <a:headEnd type="none" w="med" len="med"/>
+                      <a:tailEnd type="none" w="med" len="med"/>
+                    </a:lnB>
+                    <a:solidFill>
+                      <a:srgbClr val="FFFFFF"/>
+                    </a:solidFill>
+                  </a:tcPr>
+                </a:tc>
+                <a:tc>
+                  <a:txBody>
+                    <a:bodyPr/>
+                    <a:lstStyle/>
+                    <a:p>
+                      <a:pPr algn="ctr" indent="0" marL="0">
+                        <a:buNone/>
+                      </a:pPr>
+                      <a:r>
+                        <a:rPr lang="en-US" sz="850" dirty="0">
+                          <a:solidFill>
+                            <a:srgbClr val="1A1A1A"/>
+                          </a:solidFill>
+                          <a:latin typeface="Meiryo" pitchFamily="34" charset="0"/>
+                          <a:ea typeface="Meiryo" pitchFamily="34" charset="-122"/>
+                          <a:cs typeface="Meiryo" pitchFamily="34" charset="-120"/>
+                        </a:rPr>
+                        <a:t>60</a:t>
+                      </a:r>
+                      <a:endParaRPr lang="en-US" sz="850" dirty="0">
+                        <a:latin typeface="Meiryo" charset="0"/>
+                        <a:ea typeface="Meiryo" charset="0"/>
+                        <a:cs typeface="Meiryo" charset="0"/>
+                      </a:endParaRPr>
+                    </a:p>
+                  </a:txBody>
+                  <a:tcPr marL="54864" marR="54864" marT="18288" marB="18288" anchor="ctr">
+                    <a:lnL w="0" cap="flat" cmpd="sng" algn="ctr">
+                      <a:noFill/>
+                    </a:lnL>
+                    <a:lnR w="0" cap="flat" cmpd="sng" algn="ctr">
+                      <a:noFill/>
+                    </a:lnR>
+                    <a:lnT w="0" cap="flat" cmpd="sng" algn="ctr">
+                      <a:noFill/>
+                    </a:lnT>
+                    <a:lnB w="9525" cap="flat" cmpd="sng" algn="ctr">
+                      <a:solidFill>
+                        <a:srgbClr val="BFBFBF"/>
+                      </a:solidFill>
+                      <a:prstDash val="solid"/>
+                      <a:round/>
+                      <a:headEnd type="none" w="med" len="med"/>
+                      <a:tailEnd type="none" w="med" len="med"/>
+                    </a:lnB>
+                    <a:solidFill>
+                      <a:srgbClr val="FFFFFF"/>
+                    </a:solidFill>
+                  </a:tcPr>
+                </a:tc>
+              </a:tr>
+              <a:tr h="292608">
+                <a:tc>
+                  <a:txBody>
+                    <a:bodyPr/>
+                    <a:lstStyle/>
+                    <a:p>
+                      <a:pPr algn="l" indent="0" marL="0">
+                        <a:buNone/>
+                      </a:pPr>
+                      <a:r>
+                        <a:rPr lang="en-US" sz="850" dirty="0">
+                          <a:solidFill>
+                            <a:srgbClr val="1A1A1A"/>
+                          </a:solidFill>
+                          <a:latin typeface="Meiryo" pitchFamily="34" charset="0"/>
+                          <a:ea typeface="Meiryo" pitchFamily="34" charset="-122"/>
+                          <a:cs typeface="Meiryo" pitchFamily="34" charset="-120"/>
+                        </a:rPr>
+                        <a:t>計画の8割</a:t>
+                      </a:r>
+                      <a:endParaRPr lang="en-US" sz="850" dirty="0">
+                        <a:latin typeface="Meiryo" charset="0"/>
+                        <a:ea typeface="Meiryo" charset="0"/>
+                        <a:cs typeface="Meiryo" charset="0"/>
+                      </a:endParaRPr>
+                    </a:p>
+                  </a:txBody>
+                  <a:tcPr marL="54864" marR="54864" marT="18288" marB="18288" anchor="ctr">
+                    <a:lnL w="0" cap="flat" cmpd="sng" algn="ctr">
+                      <a:noFill/>
+                    </a:lnL>
+                    <a:lnR w="0" cap="flat" cmpd="sng" algn="ctr">
+                      <a:noFill/>
+                    </a:lnR>
+                    <a:lnT w="0" cap="flat" cmpd="sng" algn="ctr">
+                      <a:noFill/>
+                    </a:lnT>
+                    <a:lnB w="9525" cap="flat" cmpd="sng" algn="ctr">
+                      <a:solidFill>
+                        <a:srgbClr val="BFBFBF"/>
+                      </a:solidFill>
+                      <a:prstDash val="solid"/>
+                      <a:round/>
+                      <a:headEnd type="none" w="med" len="med"/>
+                      <a:tailEnd type="none" w="med" len="med"/>
+                    </a:lnB>
+                    <a:solidFill>
+                      <a:srgbClr val="FFFFFF"/>
+                    </a:solidFill>
+                  </a:tcPr>
+                </a:tc>
+                <a:tc>
+                  <a:txBody>
+                    <a:bodyPr/>
+                    <a:lstStyle/>
+                    <a:p>
+                      <a:pPr algn="ctr" indent="0" marL="0">
+                        <a:buNone/>
+                      </a:pPr>
+                      <a:r>
+                        <a:rPr lang="en-US" sz="850" dirty="0">
+                          <a:solidFill>
+                            <a:srgbClr val="4D4D4D"/>
+                          </a:solidFill>
+                          <a:latin typeface="Meiryo" pitchFamily="34" charset="0"/>
+                          <a:ea typeface="Meiryo" pitchFamily="34" charset="-122"/>
+                          <a:cs typeface="Meiryo" pitchFamily="34" charset="-120"/>
+                        </a:rPr>
+                        <a:t>2・7・14・22・26</a:t>
+                      </a:r>
+                      <a:endParaRPr lang="en-US" sz="850" dirty="0">
+                        <a:latin typeface="Meiryo" charset="0"/>
+                        <a:ea typeface="Meiryo" charset="0"/>
+                        <a:cs typeface="Meiryo" charset="0"/>
+                      </a:endParaRPr>
+                    </a:p>
+                  </a:txBody>
+                  <a:tcPr marL="54864" marR="54864" marT="18288" marB="18288" anchor="ctr">
+                    <a:lnL w="0" cap="flat" cmpd="sng" algn="ctr">
+                      <a:noFill/>
+                    </a:lnL>
+                    <a:lnR w="0" cap="flat" cmpd="sng" algn="ctr">
+                      <a:noFill/>
+                    </a:lnR>
+                    <a:lnT w="0" cap="flat" cmpd="sng" algn="ctr">
+                      <a:noFill/>
+                    </a:lnT>
+                    <a:lnB w="9525" cap="flat" cmpd="sng" algn="ctr">
+                      <a:solidFill>
+                        <a:srgbClr val="BFBFBF"/>
+                      </a:solidFill>
+                      <a:prstDash val="solid"/>
+                      <a:round/>
+                      <a:headEnd type="none" w="med" len="med"/>
+                      <a:tailEnd type="none" w="med" len="med"/>
+                    </a:lnB>
+                    <a:solidFill>
+                      <a:srgbClr val="FFFFFF"/>
+                    </a:solidFill>
+                  </a:tcPr>
+                </a:tc>
+                <a:tc>
+                  <a:txBody>
+                    <a:bodyPr/>
+                    <a:lstStyle/>
+                    <a:p>
+                      <a:pPr algn="ctr" indent="0" marL="0">
+                        <a:buNone/>
+                      </a:pPr>
+                      <a:r>
+                        <a:rPr lang="en-US" sz="850" dirty="0">
+                          <a:solidFill>
+                            <a:srgbClr val="1A1A1A"/>
+                          </a:solidFill>
+                          <a:latin typeface="Meiryo" pitchFamily="34" charset="0"/>
+                          <a:ea typeface="Meiryo" pitchFamily="34" charset="-122"/>
+                          <a:cs typeface="Meiryo" pitchFamily="34" charset="-120"/>
+                        </a:rPr>
+                        <a:t>4年目</a:t>
+                      </a:r>
+                      <a:endParaRPr lang="en-US" sz="850" dirty="0">
+                        <a:latin typeface="Meiryo" charset="0"/>
+                        <a:ea typeface="Meiryo" charset="0"/>
+                        <a:cs typeface="Meiryo" charset="0"/>
+                      </a:endParaRPr>
+                    </a:p>
+                  </a:txBody>
+                  <a:tcPr marL="54864" marR="54864" marT="18288" marB="18288" anchor="ctr">
+                    <a:lnL w="0" cap="flat" cmpd="sng" algn="ctr">
+                      <a:noFill/>
+                    </a:lnL>
+                    <a:lnR w="0" cap="flat" cmpd="sng" algn="ctr">
+                      <a:noFill/>
+                    </a:lnR>
+                    <a:lnT w="0" cap="flat" cmpd="sng" algn="ctr">
+                      <a:noFill/>
+                    </a:lnT>
+                    <a:lnB w="9525" cap="flat" cmpd="sng" algn="ctr">
+                      <a:solidFill>
+                        <a:srgbClr val="BFBFBF"/>
+                      </a:solidFill>
+                      <a:prstDash val="solid"/>
+                      <a:round/>
+                      <a:headEnd type="none" w="med" len="med"/>
+                      <a:tailEnd type="none" w="med" len="med"/>
+                    </a:lnB>
+                    <a:solidFill>
+                      <a:srgbClr val="FFFFFF"/>
+                    </a:solidFill>
+                  </a:tcPr>
+                </a:tc>
+                <a:tc>
+                  <a:txBody>
+                    <a:bodyPr/>
+                    <a:lstStyle/>
+                    <a:p>
+                      <a:pPr algn="ctr" indent="0" marL="0">
+                        <a:buNone/>
+                      </a:pPr>
+                      <a:r>
+                        <a:rPr lang="en-US" sz="850" dirty="0">
+                          <a:solidFill>
+                            <a:srgbClr val="1A1A1A"/>
+                          </a:solidFill>
+                          <a:latin typeface="Meiryo" pitchFamily="34" charset="0"/>
+                          <a:ea typeface="Meiryo" pitchFamily="34" charset="-122"/>
+                          <a:cs typeface="Meiryo" pitchFamily="34" charset="-120"/>
+                        </a:rPr>
+                        <a:t>39</a:t>
+                      </a:r>
+                      <a:endParaRPr lang="en-US" sz="850" dirty="0">
+                        <a:latin typeface="Meiryo" charset="0"/>
+                        <a:ea typeface="Meiryo" charset="0"/>
+                        <a:cs typeface="Meiryo" charset="0"/>
+                      </a:endParaRPr>
+                    </a:p>
+                  </a:txBody>
+                  <a:tcPr marL="54864" marR="54864" marT="18288" marB="18288" anchor="ctr">
+                    <a:lnL w="0" cap="flat" cmpd="sng" algn="ctr">
+                      <a:noFill/>
+                    </a:lnL>
+                    <a:lnR w="0" cap="flat" cmpd="sng" algn="ctr">
+                      <a:noFill/>
+                    </a:lnR>
+                    <a:lnT w="0" cap="flat" cmpd="sng" algn="ctr">
+                      <a:noFill/>
+                    </a:lnT>
+                    <a:lnB w="9525" cap="flat" cmpd="sng" algn="ctr">
+                      <a:solidFill>
+                        <a:srgbClr val="BFBFBF"/>
+                      </a:solidFill>
+                      <a:prstDash val="solid"/>
+                      <a:round/>
+                      <a:headEnd type="none" w="med" len="med"/>
+                      <a:tailEnd type="none" w="med" len="med"/>
+                    </a:lnB>
+                    <a:solidFill>
+                      <a:srgbClr val="FFFFFF"/>
+                    </a:solidFill>
+                  </a:tcPr>
+                </a:tc>
+                <a:tc>
+                  <a:txBody>
+                    <a:bodyPr/>
+                    <a:lstStyle/>
+                    <a:p>
+                      <a:pPr algn="ctr" indent="0" marL="0">
+                        <a:buNone/>
+                      </a:pPr>
+                      <a:r>
+                        <a:rPr lang="en-US" sz="850" dirty="0">
+                          <a:solidFill>
+                            <a:srgbClr val="1A1A1A"/>
+                          </a:solidFill>
+                          <a:latin typeface="Meiryo" pitchFamily="34" charset="0"/>
+                          <a:ea typeface="Meiryo" pitchFamily="34" charset="-122"/>
+                          <a:cs typeface="Meiryo" pitchFamily="34" charset="-120"/>
+                        </a:rPr>
+                        <a:t>5年目</a:t>
+                      </a:r>
+                      <a:endParaRPr lang="en-US" sz="850" dirty="0">
+                        <a:latin typeface="Meiryo" charset="0"/>
+                        <a:ea typeface="Meiryo" charset="0"/>
+                        <a:cs typeface="Meiryo" charset="0"/>
+                      </a:endParaRPr>
+                    </a:p>
+                  </a:txBody>
+                  <a:tcPr marL="54864" marR="54864" marT="18288" marB="18288" anchor="ctr">
+                    <a:lnL w="0" cap="flat" cmpd="sng" algn="ctr">
+                      <a:noFill/>
+                    </a:lnL>
+                    <a:lnR w="0" cap="flat" cmpd="sng" algn="ctr">
+                      <a:noFill/>
+                    </a:lnR>
+                    <a:lnT w="0" cap="flat" cmpd="sng" algn="ctr">
+                      <a:noFill/>
+                    </a:lnT>
+                    <a:lnB w="9525" cap="flat" cmpd="sng" algn="ctr">
+                      <a:solidFill>
+                        <a:srgbClr val="BFBFBF"/>
+                      </a:solidFill>
+                      <a:prstDash val="solid"/>
+                      <a:round/>
+                      <a:headEnd type="none" w="med" len="med"/>
+                      <a:tailEnd type="none" w="med" len="med"/>
+                    </a:lnB>
+                    <a:solidFill>
+                      <a:srgbClr val="FFFFFF"/>
+                    </a:solidFill>
+                  </a:tcPr>
+                </a:tc>
+                <a:tc>
+                  <a:txBody>
+                    <a:bodyPr/>
+                    <a:lstStyle/>
+                    <a:p>
+                      <a:pPr algn="ctr" indent="0" marL="0">
+                        <a:buNone/>
+                      </a:pPr>
+                      <a:r>
+                        <a:rPr lang="en-US" sz="850" dirty="0">
+                          <a:solidFill>
+                            <a:srgbClr val="1A1A1A"/>
+                          </a:solidFill>
+                          <a:latin typeface="Meiryo" pitchFamily="34" charset="0"/>
+                          <a:ea typeface="Meiryo" pitchFamily="34" charset="-122"/>
+                          <a:cs typeface="Meiryo" pitchFamily="34" charset="-120"/>
+                        </a:rPr>
+                        <a:t>8</a:t>
+                      </a:r>
+                      <a:endParaRPr lang="en-US" sz="850" dirty="0">
+                        <a:latin typeface="Meiryo" charset="0"/>
+                        <a:ea typeface="Meiryo" charset="0"/>
+                        <a:cs typeface="Meiryo" charset="0"/>
+                      </a:endParaRPr>
+                    </a:p>
+                  </a:txBody>
+                  <a:tcPr marL="54864" marR="54864" marT="18288" marB="18288" anchor="ctr">
+                    <a:lnL w="0" cap="flat" cmpd="sng" algn="ctr">
+                      <a:noFill/>
+                    </a:lnL>
+                    <a:lnR w="0" cap="flat" cmpd="sng" algn="ctr">
+                      <a:noFill/>
+                    </a:lnR>
+                    <a:lnT w="0" cap="flat" cmpd="sng" algn="ctr">
+                      <a:noFill/>
+                    </a:lnT>
+                    <a:lnB w="9525" cap="flat" cmpd="sng" algn="ctr">
+                      <a:solidFill>
+                        <a:srgbClr val="BFBFBF"/>
+                      </a:solidFill>
+                      <a:prstDash val="solid"/>
+                      <a:round/>
+                      <a:headEnd type="none" w="med" len="med"/>
+                      <a:tailEnd type="none" w="med" len="med"/>
+                    </a:lnB>
+                    <a:solidFill>
+                      <a:srgbClr val="FFFFFF"/>
+                    </a:solidFill>
+                  </a:tcPr>
+                </a:tc>
+              </a:tr>
+              <a:tr h="292608">
+                <a:tc>
+                  <a:txBody>
+                    <a:bodyPr/>
+                    <a:lstStyle/>
+                    <a:p>
+                      <a:pPr algn="l" indent="0" marL="0">
+                        <a:buNone/>
+                      </a:pPr>
+                      <a:r>
+                        <a:rPr lang="en-US" sz="850" dirty="0">
+                          <a:solidFill>
+                            <a:srgbClr val="1A1A1A"/>
+                          </a:solidFill>
+                          <a:latin typeface="Meiryo" pitchFamily="34" charset="0"/>
+                          <a:ea typeface="Meiryo" pitchFamily="34" charset="-122"/>
+                          <a:cs typeface="Meiryo" pitchFamily="34" charset="-120"/>
+                        </a:rPr>
+                        <a:t>計画の7割</a:t>
+                      </a:r>
+                      <a:endParaRPr lang="en-US" sz="850" dirty="0">
+                        <a:latin typeface="Meiryo" charset="0"/>
+                        <a:ea typeface="Meiryo" charset="0"/>
+                        <a:cs typeface="Meiryo" charset="0"/>
+                      </a:endParaRPr>
+                    </a:p>
+                  </a:txBody>
+                  <a:tcPr marL="54864" marR="54864" marT="18288" marB="18288" anchor="ctr">
+                    <a:lnL w="0" cap="flat" cmpd="sng" algn="ctr">
+                      <a:noFill/>
+                    </a:lnL>
+                    <a:lnR w="0" cap="flat" cmpd="sng" algn="ctr">
+                      <a:noFill/>
+                    </a:lnR>
+                    <a:lnT w="0" cap="flat" cmpd="sng" algn="ctr">
+                      <a:noFill/>
+                    </a:lnT>
+                    <a:lnB w="9525" cap="flat" cmpd="sng" algn="ctr">
+                      <a:solidFill>
+                        <a:srgbClr val="BFBFBF"/>
+                      </a:solidFill>
+                      <a:prstDash val="solid"/>
+                      <a:round/>
+                      <a:headEnd type="none" w="med" len="med"/>
+                      <a:tailEnd type="none" w="med" len="med"/>
+                    </a:lnB>
+                    <a:solidFill>
+                      <a:srgbClr val="FFFFFF"/>
+                    </a:solidFill>
+                  </a:tcPr>
+                </a:tc>
+                <a:tc>
+                  <a:txBody>
+                    <a:bodyPr/>
+                    <a:lstStyle/>
+                    <a:p>
+                      <a:pPr algn="ctr" indent="0" marL="0">
+                        <a:buNone/>
+                      </a:pPr>
+                      <a:r>
+                        <a:rPr lang="en-US" sz="850" dirty="0">
+                          <a:solidFill>
+                            <a:srgbClr val="4D4D4D"/>
+                          </a:solidFill>
+                          <a:latin typeface="Meiryo" pitchFamily="34" charset="0"/>
+                          <a:ea typeface="Meiryo" pitchFamily="34" charset="-122"/>
+                          <a:cs typeface="Meiryo" pitchFamily="34" charset="-120"/>
+                        </a:rPr>
+                        <a:t>2・6・13・19・23</a:t>
+                      </a:r>
+                      <a:endParaRPr lang="en-US" sz="850" dirty="0">
+                        <a:latin typeface="Meiryo" charset="0"/>
+                        <a:ea typeface="Meiryo" charset="0"/>
+                        <a:cs typeface="Meiryo" charset="0"/>
+                      </a:endParaRPr>
+                    </a:p>
+                  </a:txBody>
+                  <a:tcPr marL="54864" marR="54864" marT="18288" marB="18288" anchor="ctr">
+                    <a:lnL w="0" cap="flat" cmpd="sng" algn="ctr">
+                      <a:noFill/>
+                    </a:lnL>
+                    <a:lnR w="0" cap="flat" cmpd="sng" algn="ctr">
+                      <a:noFill/>
+                    </a:lnR>
+                    <a:lnT w="0" cap="flat" cmpd="sng" algn="ctr">
+                      <a:noFill/>
+                    </a:lnT>
+                    <a:lnB w="9525" cap="flat" cmpd="sng" algn="ctr">
+                      <a:solidFill>
+                        <a:srgbClr val="BFBFBF"/>
+                      </a:solidFill>
+                      <a:prstDash val="solid"/>
+                      <a:round/>
+                      <a:headEnd type="none" w="med" len="med"/>
+                      <a:tailEnd type="none" w="med" len="med"/>
+                    </a:lnB>
+                    <a:solidFill>
+                      <a:srgbClr val="FFFFFF"/>
+                    </a:solidFill>
+                  </a:tcPr>
+                </a:tc>
+                <a:tc>
+                  <a:txBody>
+                    <a:bodyPr/>
+                    <a:lstStyle/>
+                    <a:p>
+                      <a:pPr algn="ctr" indent="0" marL="0">
+                        <a:buNone/>
+                      </a:pPr>
+                      <a:r>
+                        <a:rPr lang="en-US" sz="850" dirty="0">
+                          <a:solidFill>
+                            <a:srgbClr val="1A1A1A"/>
+                          </a:solidFill>
+                          <a:latin typeface="Meiryo" pitchFamily="34" charset="0"/>
+                          <a:ea typeface="Meiryo" pitchFamily="34" charset="-122"/>
+                          <a:cs typeface="Meiryo" pitchFamily="34" charset="-120"/>
+                        </a:rPr>
+                        <a:t>4年目</a:t>
+                      </a:r>
+                      <a:endParaRPr lang="en-US" sz="850" dirty="0">
+                        <a:latin typeface="Meiryo" charset="0"/>
+                        <a:ea typeface="Meiryo" charset="0"/>
+                        <a:cs typeface="Meiryo" charset="0"/>
+                      </a:endParaRPr>
+                    </a:p>
+                  </a:txBody>
+                  <a:tcPr marL="54864" marR="54864" marT="18288" marB="18288" anchor="ctr">
+                    <a:lnL w="0" cap="flat" cmpd="sng" algn="ctr">
+                      <a:noFill/>
+                    </a:lnL>
+                    <a:lnR w="0" cap="flat" cmpd="sng" algn="ctr">
+                      <a:noFill/>
+                    </a:lnR>
+                    <a:lnT w="0" cap="flat" cmpd="sng" algn="ctr">
+                      <a:noFill/>
+                    </a:lnT>
+                    <a:lnB w="9525" cap="flat" cmpd="sng" algn="ctr">
+                      <a:solidFill>
+                        <a:srgbClr val="BFBFBF"/>
+                      </a:solidFill>
+                      <a:prstDash val="solid"/>
+                      <a:round/>
+                      <a:headEnd type="none" w="med" len="med"/>
+                      <a:tailEnd type="none" w="med" len="med"/>
+                    </a:lnB>
+                    <a:solidFill>
+                      <a:srgbClr val="FFFFFF"/>
+                    </a:solidFill>
+                  </a:tcPr>
+                </a:tc>
+                <a:tc>
+                  <a:txBody>
+                    <a:bodyPr/>
+                    <a:lstStyle/>
+                    <a:p>
+                      <a:pPr algn="ctr" indent="0" marL="0">
+                        <a:buNone/>
+                      </a:pPr>
+                      <a:r>
+                        <a:rPr lang="en-US" sz="850" dirty="0">
+                          <a:solidFill>
+                            <a:srgbClr val="1A1A1A"/>
+                          </a:solidFill>
+                          <a:latin typeface="Meiryo" pitchFamily="34" charset="0"/>
+                          <a:ea typeface="Meiryo" pitchFamily="34" charset="-122"/>
+                          <a:cs typeface="Meiryo" pitchFamily="34" charset="-120"/>
+                        </a:rPr>
+                        <a:t>36</a:t>
+                      </a:r>
+                      <a:endParaRPr lang="en-US" sz="850" dirty="0">
+                        <a:latin typeface="Meiryo" charset="0"/>
+                        <a:ea typeface="Meiryo" charset="0"/>
+                        <a:cs typeface="Meiryo" charset="0"/>
+                      </a:endParaRPr>
+                    </a:p>
+                  </a:txBody>
+                  <a:tcPr marL="54864" marR="54864" marT="18288" marB="18288" anchor="ctr">
+                    <a:lnL w="0" cap="flat" cmpd="sng" algn="ctr">
+                      <a:noFill/>
+                    </a:lnL>
+                    <a:lnR w="0" cap="flat" cmpd="sng" algn="ctr">
+                      <a:noFill/>
+                    </a:lnR>
+                    <a:lnT w="0" cap="flat" cmpd="sng" algn="ctr">
+                      <a:noFill/>
+                    </a:lnT>
+                    <a:lnB w="9525" cap="flat" cmpd="sng" algn="ctr">
+                      <a:solidFill>
+                        <a:srgbClr val="BFBFBF"/>
+                      </a:solidFill>
+                      <a:prstDash val="solid"/>
+                      <a:round/>
+                      <a:headEnd type="none" w="med" len="med"/>
+                      <a:tailEnd type="none" w="med" len="med"/>
+                    </a:lnB>
+                    <a:solidFill>
+                      <a:srgbClr val="FFFFFF"/>
+                    </a:solidFill>
+                  </a:tcPr>
+                </a:tc>
+                <a:tc>
+                  <a:txBody>
+                    <a:bodyPr/>
+                    <a:lstStyle/>
+                    <a:p>
+                      <a:pPr algn="ctr" indent="0" marL="0">
+                        <a:buNone/>
+                      </a:pPr>
+                      <a:r>
+                        <a:rPr lang="en-US" sz="850" b="1" dirty="0">
+                          <a:solidFill>
+                            <a:srgbClr val="B8692E"/>
+                          </a:solidFill>
+                          <a:latin typeface="Meiryo" pitchFamily="34" charset="0"/>
+                          <a:ea typeface="Meiryo" pitchFamily="34" charset="-122"/>
+                          <a:cs typeface="Meiryo" pitchFamily="34" charset="-120"/>
+                        </a:rPr>
+                        <a:t>しない</a:t>
+                      </a:r>
+                      <a:endParaRPr lang="en-US" sz="850" dirty="0">
+                        <a:latin typeface="Meiryo" charset="0"/>
+                        <a:ea typeface="Meiryo" charset="0"/>
+                        <a:cs typeface="Meiryo" charset="0"/>
+                      </a:endParaRPr>
+                    </a:p>
+                  </a:txBody>
+                  <a:tcPr marL="54864" marR="54864" marT="18288" marB="18288" anchor="ctr">
+                    <a:lnL w="0" cap="flat" cmpd="sng" algn="ctr">
+                      <a:noFill/>
+                    </a:lnL>
+                    <a:lnR w="0" cap="flat" cmpd="sng" algn="ctr">
+                      <a:noFill/>
+                    </a:lnR>
+                    <a:lnT w="0" cap="flat" cmpd="sng" algn="ctr">
+                      <a:noFill/>
+                    </a:lnT>
+                    <a:lnB w="9525" cap="flat" cmpd="sng" algn="ctr">
+                      <a:solidFill>
+                        <a:srgbClr val="BFBFBF"/>
+                      </a:solidFill>
+                      <a:prstDash val="solid"/>
+                      <a:round/>
+                      <a:headEnd type="none" w="med" len="med"/>
+                      <a:tailEnd type="none" w="med" len="med"/>
+                    </a:lnB>
+                    <a:solidFill>
+                      <a:srgbClr val="FFFFFF"/>
+                    </a:solidFill>
+                  </a:tcPr>
+                </a:tc>
+                <a:tc>
+                  <a:txBody>
+                    <a:bodyPr/>
+                    <a:lstStyle/>
+                    <a:p>
+                      <a:pPr algn="ctr" indent="0" marL="0">
+                        <a:buNone/>
+                      </a:pPr>
+                      <a:r>
+                        <a:rPr lang="en-US" sz="850" b="1" dirty="0">
+                          <a:solidFill>
+                            <a:srgbClr val="B8692E"/>
+                          </a:solidFill>
+                          <a:latin typeface="Meiryo" pitchFamily="34" charset="0"/>
+                          <a:ea typeface="Meiryo" pitchFamily="34" charset="-122"/>
+                          <a:cs typeface="Meiryo" pitchFamily="34" charset="-120"/>
+                        </a:rPr>
+                        <a:t>-38</a:t>
+                      </a:r>
+                      <a:endParaRPr lang="en-US" sz="850" dirty="0">
+                        <a:latin typeface="Meiryo" charset="0"/>
+                        <a:ea typeface="Meiryo" charset="0"/>
+                        <a:cs typeface="Meiryo" charset="0"/>
+                      </a:endParaRPr>
+                    </a:p>
+                  </a:txBody>
+                  <a:tcPr marL="54864" marR="54864" marT="18288" marB="18288" anchor="ctr">
+                    <a:lnL w="0" cap="flat" cmpd="sng" algn="ctr">
+                      <a:noFill/>
+                    </a:lnL>
+                    <a:lnR w="0" cap="flat" cmpd="sng" algn="ctr">
+                      <a:noFill/>
+                    </a:lnR>
+                    <a:lnT w="0" cap="flat" cmpd="sng" algn="ctr">
+                      <a:noFill/>
+                    </a:lnT>
+                    <a:lnB w="9525" cap="flat" cmpd="sng" algn="ctr">
+                      <a:solidFill>
+                        <a:srgbClr val="BFBFBF"/>
+                      </a:solidFill>
+                      <a:prstDash val="solid"/>
+                      <a:round/>
+                      <a:headEnd type="none" w="med" len="med"/>
+                      <a:tailEnd type="none" w="med" len="med"/>
+                    </a:lnB>
+                    <a:solidFill>
+                      <a:srgbClr val="FFFFFF"/>
+                    </a:solidFill>
+                  </a:tcPr>
+                </a:tc>
+              </a:tr>
+              <a:tr h="292608">
+                <a:tc>
+                  <a:txBody>
+                    <a:bodyPr/>
+                    <a:lstStyle/>
+                    <a:p>
+                      <a:pPr algn="l" indent="0" marL="0">
+                        <a:buNone/>
+                      </a:pPr>
+                      <a:r>
+                        <a:rPr lang="en-US" sz="850" b="1" dirty="0">
+                          <a:solidFill>
+                            <a:srgbClr val="B8692E"/>
+                          </a:solidFill>
+                          <a:latin typeface="Meiryo" pitchFamily="34" charset="0"/>
+                          <a:ea typeface="Meiryo" pitchFamily="34" charset="-122"/>
+                          <a:cs typeface="Meiryo" pitchFamily="34" charset="-120"/>
+                        </a:rPr>
+                        <a:t>計画の6割</a:t>
+                      </a:r>
+                      <a:endParaRPr lang="en-US" sz="850" dirty="0">
+                        <a:latin typeface="Meiryo" charset="0"/>
+                        <a:ea typeface="Meiryo" charset="0"/>
+                        <a:cs typeface="Meiryo" charset="0"/>
+                      </a:endParaRPr>
+                    </a:p>
+                  </a:txBody>
+                  <a:tcPr marL="54864" marR="54864" marT="18288" marB="18288" anchor="ctr">
+                    <a:lnL w="0" cap="flat" cmpd="sng" algn="ctr">
+                      <a:noFill/>
+                    </a:lnL>
+                    <a:lnR w="0" cap="flat" cmpd="sng" algn="ctr">
+                      <a:noFill/>
+                    </a:lnR>
+                    <a:lnT w="19050" cap="flat" cmpd="sng" algn="ctr">
+                      <a:solidFill>
+                        <a:srgbClr val="1A1A1A"/>
+                      </a:solidFill>
+                      <a:prstDash val="solid"/>
+                      <a:round/>
+                      <a:headEnd type="none" w="med" len="med"/>
+                      <a:tailEnd type="none" w="med" len="med"/>
+                    </a:lnT>
+                    <a:lnB w="9525" cap="flat" cmpd="sng" algn="ctr">
+                      <a:solidFill>
+                        <a:srgbClr val="BFBFBF"/>
+                      </a:solidFill>
+                      <a:prstDash val="solid"/>
+                      <a:round/>
+                      <a:headEnd type="none" w="med" len="med"/>
+                      <a:tailEnd type="none" w="med" len="med"/>
+                    </a:lnB>
+                    <a:solidFill>
+                      <a:srgbClr val="FFFFFF"/>
+                    </a:solidFill>
+                  </a:tcPr>
+                </a:tc>
+                <a:tc>
+                  <a:txBody>
+                    <a:bodyPr/>
+                    <a:lstStyle/>
+                    <a:p>
+                      <a:pPr algn="ctr" indent="0" marL="0">
+                        <a:buNone/>
+                      </a:pPr>
+                      <a:r>
+                        <a:rPr lang="en-US" sz="850" b="1" dirty="0">
+                          <a:solidFill>
+                            <a:srgbClr val="4D4D4D"/>
+                          </a:solidFill>
+                          <a:latin typeface="Meiryo" pitchFamily="34" charset="0"/>
+                          <a:ea typeface="Meiryo" pitchFamily="34" charset="-122"/>
+                          <a:cs typeface="Meiryo" pitchFamily="34" charset="-120"/>
+                        </a:rPr>
+                        <a:t>2・5・11・16・20</a:t>
+                      </a:r>
+                      <a:endParaRPr lang="en-US" sz="850" dirty="0">
+                        <a:latin typeface="Meiryo" charset="0"/>
+                        <a:ea typeface="Meiryo" charset="0"/>
+                        <a:cs typeface="Meiryo" charset="0"/>
+                      </a:endParaRPr>
+                    </a:p>
+                  </a:txBody>
+                  <a:tcPr marL="54864" marR="54864" marT="18288" marB="18288" anchor="ctr">
+                    <a:lnL w="0" cap="flat" cmpd="sng" algn="ctr">
+                      <a:noFill/>
+                    </a:lnL>
+                    <a:lnR w="0" cap="flat" cmpd="sng" algn="ctr">
+                      <a:noFill/>
+                    </a:lnR>
+                    <a:lnT w="19050" cap="flat" cmpd="sng" algn="ctr">
+                      <a:solidFill>
+                        <a:srgbClr val="1A1A1A"/>
+                      </a:solidFill>
+                      <a:prstDash val="solid"/>
+                      <a:round/>
+                      <a:headEnd type="none" w="med" len="med"/>
+                      <a:tailEnd type="none" w="med" len="med"/>
+                    </a:lnT>
+                    <a:lnB w="9525" cap="flat" cmpd="sng" algn="ctr">
+                      <a:solidFill>
+                        <a:srgbClr val="BFBFBF"/>
+                      </a:solidFill>
+                      <a:prstDash val="solid"/>
+                      <a:round/>
+                      <a:headEnd type="none" w="med" len="med"/>
+                      <a:tailEnd type="none" w="med" len="med"/>
+                    </a:lnB>
+                    <a:solidFill>
+                      <a:srgbClr val="FFFFFF"/>
+                    </a:solidFill>
+                  </a:tcPr>
+                </a:tc>
+                <a:tc>
+                  <a:txBody>
+                    <a:bodyPr/>
+                    <a:lstStyle/>
+                    <a:p>
+                      <a:pPr algn="ctr" indent="0" marL="0">
+                        <a:buNone/>
+                      </a:pPr>
+                      <a:r>
+                        <a:rPr lang="en-US" sz="850" b="1" dirty="0">
+                          <a:solidFill>
+                            <a:srgbClr val="1A1A1A"/>
+                          </a:solidFill>
+                          <a:latin typeface="Meiryo" pitchFamily="34" charset="0"/>
+                          <a:ea typeface="Meiryo" pitchFamily="34" charset="-122"/>
+                          <a:cs typeface="Meiryo" pitchFamily="34" charset="-120"/>
+                        </a:rPr>
+                        <a:t>5年目</a:t>
+                      </a:r>
+                      <a:endParaRPr lang="en-US" sz="850" dirty="0">
+                        <a:latin typeface="Meiryo" charset="0"/>
+                        <a:ea typeface="Meiryo" charset="0"/>
+                        <a:cs typeface="Meiryo" charset="0"/>
+                      </a:endParaRPr>
+                    </a:p>
+                  </a:txBody>
+                  <a:tcPr marL="54864" marR="54864" marT="18288" marB="18288" anchor="ctr">
+                    <a:lnL w="0" cap="flat" cmpd="sng" algn="ctr">
+                      <a:noFill/>
+                    </a:lnL>
+                    <a:lnR w="0" cap="flat" cmpd="sng" algn="ctr">
+                      <a:noFill/>
+                    </a:lnR>
+                    <a:lnT w="19050" cap="flat" cmpd="sng" algn="ctr">
+                      <a:solidFill>
+                        <a:srgbClr val="1A1A1A"/>
+                      </a:solidFill>
+                      <a:prstDash val="solid"/>
+                      <a:round/>
+                      <a:headEnd type="none" w="med" len="med"/>
+                      <a:tailEnd type="none" w="med" len="med"/>
+                    </a:lnT>
+                    <a:lnB w="9525" cap="flat" cmpd="sng" algn="ctr">
+                      <a:solidFill>
+                        <a:srgbClr val="BFBFBF"/>
+                      </a:solidFill>
+                      <a:prstDash val="solid"/>
+                      <a:round/>
+                      <a:headEnd type="none" w="med" len="med"/>
+                      <a:tailEnd type="none" w="med" len="med"/>
+                    </a:lnB>
+                    <a:solidFill>
+                      <a:srgbClr val="FFFFFF"/>
+                    </a:solidFill>
+                  </a:tcPr>
+                </a:tc>
+                <a:tc>
+                  <a:txBody>
+                    <a:bodyPr/>
+                    <a:lstStyle/>
+                    <a:p>
+                      <a:pPr algn="ctr" indent="0" marL="0">
+                        <a:buNone/>
+                      </a:pPr>
+                      <a:r>
+                        <a:rPr lang="en-US" sz="850" b="1" dirty="0">
+                          <a:solidFill>
+                            <a:srgbClr val="1A1A1A"/>
+                          </a:solidFill>
+                          <a:latin typeface="Meiryo" pitchFamily="34" charset="0"/>
+                          <a:ea typeface="Meiryo" pitchFamily="34" charset="-122"/>
+                          <a:cs typeface="Meiryo" pitchFamily="34" charset="-120"/>
+                        </a:rPr>
+                        <a:t>20</a:t>
+                      </a:r>
+                      <a:endParaRPr lang="en-US" sz="850" dirty="0">
+                        <a:latin typeface="Meiryo" charset="0"/>
+                        <a:ea typeface="Meiryo" charset="0"/>
+                        <a:cs typeface="Meiryo" charset="0"/>
+                      </a:endParaRPr>
+                    </a:p>
+                  </a:txBody>
+                  <a:tcPr marL="54864" marR="54864" marT="18288" marB="18288" anchor="ctr">
+                    <a:lnL w="0" cap="flat" cmpd="sng" algn="ctr">
+                      <a:noFill/>
+                    </a:lnL>
+                    <a:lnR w="0" cap="flat" cmpd="sng" algn="ctr">
+                      <a:noFill/>
+                    </a:lnR>
+                    <a:lnT w="19050" cap="flat" cmpd="sng" algn="ctr">
+                      <a:solidFill>
+                        <a:srgbClr val="1A1A1A"/>
+                      </a:solidFill>
+                      <a:prstDash val="solid"/>
+                      <a:round/>
+                      <a:headEnd type="none" w="med" len="med"/>
+                      <a:tailEnd type="none" w="med" len="med"/>
+                    </a:lnT>
+                    <a:lnB w="9525" cap="flat" cmpd="sng" algn="ctr">
+                      <a:solidFill>
+                        <a:srgbClr val="BFBFBF"/>
+                      </a:solidFill>
+                      <a:prstDash val="solid"/>
+                      <a:round/>
+                      <a:headEnd type="none" w="med" len="med"/>
+                      <a:tailEnd type="none" w="med" len="med"/>
+                    </a:lnB>
+                    <a:solidFill>
+                      <a:srgbClr val="FFFFFF"/>
+                    </a:solidFill>
+                  </a:tcPr>
+                </a:tc>
+                <a:tc>
+                  <a:txBody>
+                    <a:bodyPr/>
+                    <a:lstStyle/>
+                    <a:p>
+                      <a:pPr algn="ctr" indent="0" marL="0">
+                        <a:buNone/>
+                      </a:pPr>
+                      <a:r>
+                        <a:rPr lang="en-US" sz="850" b="1" dirty="0">
+                          <a:solidFill>
+                            <a:srgbClr val="B8692E"/>
+                          </a:solidFill>
+                          <a:latin typeface="Meiryo" pitchFamily="34" charset="0"/>
+                          <a:ea typeface="Meiryo" pitchFamily="34" charset="-122"/>
+                          <a:cs typeface="Meiryo" pitchFamily="34" charset="-120"/>
+                        </a:rPr>
+                        <a:t>しない</a:t>
+                      </a:r>
+                      <a:endParaRPr lang="en-US" sz="850" dirty="0">
+                        <a:latin typeface="Meiryo" charset="0"/>
+                        <a:ea typeface="Meiryo" charset="0"/>
+                        <a:cs typeface="Meiryo" charset="0"/>
+                      </a:endParaRPr>
+                    </a:p>
+                  </a:txBody>
+                  <a:tcPr marL="54864" marR="54864" marT="18288" marB="18288" anchor="ctr">
+                    <a:lnL w="0" cap="flat" cmpd="sng" algn="ctr">
+                      <a:noFill/>
+                    </a:lnL>
+                    <a:lnR w="0" cap="flat" cmpd="sng" algn="ctr">
+                      <a:noFill/>
+                    </a:lnR>
+                    <a:lnT w="19050" cap="flat" cmpd="sng" algn="ctr">
+                      <a:solidFill>
+                        <a:srgbClr val="1A1A1A"/>
+                      </a:solidFill>
+                      <a:prstDash val="solid"/>
+                      <a:round/>
+                      <a:headEnd type="none" w="med" len="med"/>
+                      <a:tailEnd type="none" w="med" len="med"/>
+                    </a:lnT>
+                    <a:lnB w="9525" cap="flat" cmpd="sng" algn="ctr">
+                      <a:solidFill>
+                        <a:srgbClr val="BFBFBF"/>
+                      </a:solidFill>
+                      <a:prstDash val="solid"/>
+                      <a:round/>
+                      <a:headEnd type="none" w="med" len="med"/>
+                      <a:tailEnd type="none" w="med" len="med"/>
+                    </a:lnB>
+                    <a:solidFill>
+                      <a:srgbClr val="FFFFFF"/>
+                    </a:solidFill>
+                  </a:tcPr>
+                </a:tc>
+                <a:tc>
+                  <a:txBody>
+                    <a:bodyPr/>
+                    <a:lstStyle/>
+                    <a:p>
+                      <a:pPr algn="ctr" indent="0" marL="0">
+                        <a:buNone/>
+                      </a:pPr>
+                      <a:r>
+                        <a:rPr lang="en-US" sz="850" b="1" dirty="0">
+                          <a:solidFill>
+                            <a:srgbClr val="B8692E"/>
+                          </a:solidFill>
+                          <a:latin typeface="Meiryo" pitchFamily="34" charset="0"/>
+                          <a:ea typeface="Meiryo" pitchFamily="34" charset="-122"/>
+                          <a:cs typeface="Meiryo" pitchFamily="34" charset="-120"/>
+                        </a:rPr>
+                        <a:t>-97</a:t>
+                      </a:r>
+                      <a:endParaRPr lang="en-US" sz="850" dirty="0">
+                        <a:latin typeface="Meiryo" charset="0"/>
+                        <a:ea typeface="Meiryo" charset="0"/>
+                        <a:cs typeface="Meiryo" charset="0"/>
+                      </a:endParaRPr>
+                    </a:p>
+                  </a:txBody>
+                  <a:tcPr marL="54864" marR="54864" marT="18288" marB="18288" anchor="ctr">
+                    <a:lnL w="0" cap="flat" cmpd="sng" algn="ctr">
+                      <a:noFill/>
+                    </a:lnL>
+                    <a:lnR w="0" cap="flat" cmpd="sng" algn="ctr">
+                      <a:noFill/>
+                    </a:lnR>
+                    <a:lnT w="19050" cap="flat" cmpd="sng" algn="ctr">
+                      <a:solidFill>
+                        <a:srgbClr val="1A1A1A"/>
+                      </a:solidFill>
+                      <a:prstDash val="solid"/>
+                      <a:round/>
+                      <a:headEnd type="none" w="med" len="med"/>
+                      <a:tailEnd type="none" w="med" len="med"/>
+                    </a:lnT>
+                    <a:lnB w="9525" cap="flat" cmpd="sng" algn="ctr">
+                      <a:solidFill>
+                        <a:srgbClr val="BFBFBF"/>
+                      </a:solidFill>
+                      <a:prstDash val="solid"/>
+                      <a:round/>
+                      <a:headEnd type="none" w="med" len="med"/>
+                      <a:tailEnd type="none" w="med" len="med"/>
+                    </a:lnB>
+                    <a:solidFill>
+                      <a:srgbClr val="FFFFFF"/>
+                    </a:solidFill>
+                  </a:tcPr>
+                </a:tc>
+              </a:tr>
+              <a:tr h="292608">
+                <a:tc>
+                  <a:txBody>
+                    <a:bodyPr/>
+                    <a:lstStyle/>
+                    <a:p>
+                      <a:pPr algn="l" indent="0" marL="0">
+                        <a:buNone/>
+                      </a:pPr>
+                      <a:r>
+                        <a:rPr lang="en-US" sz="850" dirty="0">
+                          <a:solidFill>
+                            <a:srgbClr val="1A1A1A"/>
+                          </a:solidFill>
+                          <a:latin typeface="Meiryo" pitchFamily="34" charset="0"/>
+                          <a:ea typeface="Meiryo" pitchFamily="34" charset="-122"/>
+                          <a:cs typeface="Meiryo" pitchFamily="34" charset="-120"/>
+                        </a:rPr>
+                        <a:t>計画の5割</a:t>
+                      </a:r>
+                      <a:endParaRPr lang="en-US" sz="850" dirty="0">
+                        <a:latin typeface="Meiryo" charset="0"/>
+                        <a:ea typeface="Meiryo" charset="0"/>
+                        <a:cs typeface="Meiryo" charset="0"/>
+                      </a:endParaRPr>
+                    </a:p>
+                  </a:txBody>
+                  <a:tcPr marL="54864" marR="54864" marT="18288" marB="18288" anchor="ctr">
+                    <a:lnL w="0" cap="flat" cmpd="sng" algn="ctr">
+                      <a:noFill/>
+                    </a:lnL>
+                    <a:lnR w="0" cap="flat" cmpd="sng" algn="ctr">
+                      <a:noFill/>
+                    </a:lnR>
+                    <a:lnT w="0" cap="flat" cmpd="sng" algn="ctr">
+                      <a:noFill/>
+                    </a:lnT>
+                    <a:lnB w="9525" cap="flat" cmpd="sng" algn="ctr">
+                      <a:solidFill>
+                        <a:srgbClr val="BFBFBF"/>
+                      </a:solidFill>
+                      <a:prstDash val="solid"/>
+                      <a:round/>
+                      <a:headEnd type="none" w="med" len="med"/>
+                      <a:tailEnd type="none" w="med" len="med"/>
+                    </a:lnB>
+                    <a:solidFill>
+                      <a:srgbClr val="FFFFFF"/>
+                    </a:solidFill>
+                  </a:tcPr>
+                </a:tc>
+                <a:tc>
+                  <a:txBody>
+                    <a:bodyPr/>
+                    <a:lstStyle/>
+                    <a:p>
+                      <a:pPr algn="ctr" indent="0" marL="0">
+                        <a:buNone/>
+                      </a:pPr>
+                      <a:r>
+                        <a:rPr lang="en-US" sz="850" dirty="0">
+                          <a:solidFill>
+                            <a:srgbClr val="4D4D4D"/>
+                          </a:solidFill>
+                          <a:latin typeface="Meiryo" pitchFamily="34" charset="0"/>
+                          <a:ea typeface="Meiryo" pitchFamily="34" charset="-122"/>
+                          <a:cs typeface="Meiryo" pitchFamily="34" charset="-120"/>
+                        </a:rPr>
+                        <a:t>2・5・9・14・17</a:t>
+                      </a:r>
+                      <a:endParaRPr lang="en-US" sz="850" dirty="0">
+                        <a:latin typeface="Meiryo" charset="0"/>
+                        <a:ea typeface="Meiryo" charset="0"/>
+                        <a:cs typeface="Meiryo" charset="0"/>
+                      </a:endParaRPr>
+                    </a:p>
+                  </a:txBody>
+                  <a:tcPr marL="54864" marR="54864" marT="18288" marB="18288" anchor="ctr">
+                    <a:lnL w="0" cap="flat" cmpd="sng" algn="ctr">
+                      <a:noFill/>
+                    </a:lnL>
+                    <a:lnR w="0" cap="flat" cmpd="sng" algn="ctr">
+                      <a:noFill/>
+                    </a:lnR>
+                    <a:lnT w="0" cap="flat" cmpd="sng" algn="ctr">
+                      <a:noFill/>
+                    </a:lnT>
+                    <a:lnB w="9525" cap="flat" cmpd="sng" algn="ctr">
+                      <a:solidFill>
+                        <a:srgbClr val="BFBFBF"/>
+                      </a:solidFill>
+                      <a:prstDash val="solid"/>
+                      <a:round/>
+                      <a:headEnd type="none" w="med" len="med"/>
+                      <a:tailEnd type="none" w="med" len="med"/>
+                    </a:lnB>
+                    <a:solidFill>
+                      <a:srgbClr val="FFFFFF"/>
+                    </a:solidFill>
+                  </a:tcPr>
+                </a:tc>
+                <a:tc>
+                  <a:txBody>
+                    <a:bodyPr/>
+                    <a:lstStyle/>
+                    <a:p>
+                      <a:pPr algn="ctr" indent="0" marL="0">
+                        <a:buNone/>
+                      </a:pPr>
+                      <a:r>
+                        <a:rPr lang="en-US" sz="850" b="1" dirty="0">
+                          <a:solidFill>
+                            <a:srgbClr val="B8692E"/>
+                          </a:solidFill>
+                          <a:latin typeface="Meiryo" pitchFamily="34" charset="0"/>
+                          <a:ea typeface="Meiryo" pitchFamily="34" charset="-122"/>
+                          <a:cs typeface="Meiryo" pitchFamily="34" charset="-120"/>
+                        </a:rPr>
+                        <a:t>しない</a:t>
+                      </a:r>
+                      <a:endParaRPr lang="en-US" sz="850" dirty="0">
+                        <a:latin typeface="Meiryo" charset="0"/>
+                        <a:ea typeface="Meiryo" charset="0"/>
+                        <a:cs typeface="Meiryo" charset="0"/>
+                      </a:endParaRPr>
+                    </a:p>
+                  </a:txBody>
+                  <a:tcPr marL="54864" marR="54864" marT="18288" marB="18288" anchor="ctr">
+                    <a:lnL w="0" cap="flat" cmpd="sng" algn="ctr">
+                      <a:noFill/>
+                    </a:lnL>
+                    <a:lnR w="0" cap="flat" cmpd="sng" algn="ctr">
+                      <a:noFill/>
+                    </a:lnR>
+                    <a:lnT w="0" cap="flat" cmpd="sng" algn="ctr">
+                      <a:noFill/>
+                    </a:lnT>
+                    <a:lnB w="9525" cap="flat" cmpd="sng" algn="ctr">
+                      <a:solidFill>
+                        <a:srgbClr val="BFBFBF"/>
+                      </a:solidFill>
+                      <a:prstDash val="solid"/>
+                      <a:round/>
+                      <a:headEnd type="none" w="med" len="med"/>
+                      <a:tailEnd type="none" w="med" len="med"/>
+                    </a:lnB>
+                    <a:solidFill>
+                      <a:srgbClr val="FFFFFF"/>
+                    </a:solidFill>
+                  </a:tcPr>
+                </a:tc>
+                <a:tc>
+                  <a:txBody>
+                    <a:bodyPr/>
+                    <a:lstStyle/>
+                    <a:p>
+                      <a:pPr algn="ctr" indent="0" marL="0">
+                        <a:buNone/>
+                      </a:pPr>
+                      <a:r>
+                        <a:rPr lang="en-US" sz="850" dirty="0">
+                          <a:solidFill>
+                            <a:srgbClr val="1A1A1A"/>
+                          </a:solidFill>
+                          <a:latin typeface="Meiryo" pitchFamily="34" charset="0"/>
+                          <a:ea typeface="Meiryo" pitchFamily="34" charset="-122"/>
+                          <a:cs typeface="Meiryo" pitchFamily="34" charset="-120"/>
+                        </a:rPr>
+                        <a:t>5</a:t>
+                      </a:r>
+                      <a:endParaRPr lang="en-US" sz="850" dirty="0">
+                        <a:latin typeface="Meiryo" charset="0"/>
+                        <a:ea typeface="Meiryo" charset="0"/>
+                        <a:cs typeface="Meiryo" charset="0"/>
+                      </a:endParaRPr>
+                    </a:p>
+                  </a:txBody>
+                  <a:tcPr marL="54864" marR="54864" marT="18288" marB="18288" anchor="ctr">
+                    <a:lnL w="0" cap="flat" cmpd="sng" algn="ctr">
+                      <a:noFill/>
+                    </a:lnL>
+                    <a:lnR w="0" cap="flat" cmpd="sng" algn="ctr">
+                      <a:noFill/>
+                    </a:lnR>
+                    <a:lnT w="0" cap="flat" cmpd="sng" algn="ctr">
+                      <a:noFill/>
+                    </a:lnT>
+                    <a:lnB w="9525" cap="flat" cmpd="sng" algn="ctr">
+                      <a:solidFill>
+                        <a:srgbClr val="BFBFBF"/>
+                      </a:solidFill>
+                      <a:prstDash val="solid"/>
+                      <a:round/>
+                      <a:headEnd type="none" w="med" len="med"/>
+                      <a:tailEnd type="none" w="med" len="med"/>
+                    </a:lnB>
+                    <a:solidFill>
+                      <a:srgbClr val="FFFFFF"/>
+                    </a:solidFill>
+                  </a:tcPr>
+                </a:tc>
+                <a:tc>
+                  <a:txBody>
+                    <a:bodyPr/>
+                    <a:lstStyle/>
+                    <a:p>
+                      <a:pPr algn="ctr" indent="0" marL="0">
+                        <a:buNone/>
+                      </a:pPr>
+                      <a:r>
+                        <a:rPr lang="en-US" sz="850" b="1" dirty="0">
+                          <a:solidFill>
+                            <a:srgbClr val="B8692E"/>
+                          </a:solidFill>
+                          <a:latin typeface="Meiryo" pitchFamily="34" charset="0"/>
+                          <a:ea typeface="Meiryo" pitchFamily="34" charset="-122"/>
+                          <a:cs typeface="Meiryo" pitchFamily="34" charset="-120"/>
+                        </a:rPr>
+                        <a:t>しない</a:t>
+                      </a:r>
+                      <a:endParaRPr lang="en-US" sz="850" dirty="0">
+                        <a:latin typeface="Meiryo" charset="0"/>
+                        <a:ea typeface="Meiryo" charset="0"/>
+                        <a:cs typeface="Meiryo" charset="0"/>
+                      </a:endParaRPr>
+                    </a:p>
+                  </a:txBody>
+                  <a:tcPr marL="54864" marR="54864" marT="18288" marB="18288" anchor="ctr">
+                    <a:lnL w="0" cap="flat" cmpd="sng" algn="ctr">
+                      <a:noFill/>
+                    </a:lnL>
+                    <a:lnR w="0" cap="flat" cmpd="sng" algn="ctr">
+                      <a:noFill/>
+                    </a:lnR>
+                    <a:lnT w="0" cap="flat" cmpd="sng" algn="ctr">
+                      <a:noFill/>
+                    </a:lnT>
+                    <a:lnB w="9525" cap="flat" cmpd="sng" algn="ctr">
+                      <a:solidFill>
+                        <a:srgbClr val="BFBFBF"/>
+                      </a:solidFill>
+                      <a:prstDash val="solid"/>
+                      <a:round/>
+                      <a:headEnd type="none" w="med" len="med"/>
+                      <a:tailEnd type="none" w="med" len="med"/>
+                    </a:lnB>
+                    <a:solidFill>
+                      <a:srgbClr val="FFFFFF"/>
+                    </a:solidFill>
+                  </a:tcPr>
+                </a:tc>
+                <a:tc>
+                  <a:txBody>
+                    <a:bodyPr/>
+                    <a:lstStyle/>
+                    <a:p>
+                      <a:pPr algn="ctr" indent="0" marL="0">
+                        <a:buNone/>
+                      </a:pPr>
+                      <a:r>
+                        <a:rPr lang="en-US" sz="850" b="1" dirty="0">
+                          <a:solidFill>
+                            <a:srgbClr val="B8692E"/>
+                          </a:solidFill>
+                          <a:latin typeface="Meiryo" pitchFamily="34" charset="0"/>
+                          <a:ea typeface="Meiryo" pitchFamily="34" charset="-122"/>
+                          <a:cs typeface="Meiryo" pitchFamily="34" charset="-120"/>
+                        </a:rPr>
+                        <a:t>-139</a:t>
+                      </a:r>
+                      <a:endParaRPr lang="en-US" sz="850" dirty="0">
+                        <a:latin typeface="Meiryo" charset="0"/>
+                        <a:ea typeface="Meiryo" charset="0"/>
+                        <a:cs typeface="Meiryo" charset="0"/>
+                      </a:endParaRPr>
+                    </a:p>
+                  </a:txBody>
+                  <a:tcPr marL="54864" marR="54864" marT="18288" marB="18288" anchor="ctr">
+                    <a:lnL w="0" cap="flat" cmpd="sng" algn="ctr">
+                      <a:noFill/>
+                    </a:lnL>
+                    <a:lnR w="0" cap="flat" cmpd="sng" algn="ctr">
+                      <a:noFill/>
+                    </a:lnR>
+                    <a:lnT w="0" cap="flat" cmpd="sng" algn="ctr">
+                      <a:noFill/>
+                    </a:lnT>
+                    <a:lnB w="9525" cap="flat" cmpd="sng" algn="ctr">
+                      <a:solidFill>
+                        <a:srgbClr val="BFBFBF"/>
+                      </a:solidFill>
+                      <a:prstDash val="solid"/>
+                      <a:round/>
+                      <a:headEnd type="none" w="med" len="med"/>
+                      <a:tailEnd type="none" w="med" len="med"/>
+                    </a:lnB>
+                    <a:solidFill>
+                      <a:srgbClr val="FFFFFF"/>
+                    </a:solidFill>
+                  </a:tcPr>
+                </a:tc>
+              </a:tr>
+            </a:tbl>
+          </a:graphicData>
+        </a:graphic>
+      </p:graphicFrame>
+      <p:sp>
+        <p:nvSpPr>
+          <p:cNvPr id="7" name="Text 3"/>
+          <p:cNvSpPr txBox="1"/>
+          <p:nvPr/>
+        </p:nvSpPr>
+        <p:spPr>
+          <a:xfrm>
+            <a:off x="2651760" y="1325880"/>
+            <a:ext cx="1280160" cy="219456"/>
+          </a:xfrm>
+          <a:prstGeom prst="rect">
+            <a:avLst/>
+          </a:prstGeom>
+          <a:solidFill>
+            <a:srgbClr val="F2F2F2"/>
+          </a:solidFill>
+          <a:ln/>
+        </p:spPr>
+        <p:txBody>
+          <a:bodyPr wrap="square" lIns="0" tIns="0" rIns="0" bIns="0" rtlCol="0" anchor="ctr"/>
+          <a:lstStyle/>
+          <a:p>
+            <a:pPr algn="ctr" indent="0" marL="0">
+              <a:lnSpc>
+                <a:spcPct val="115000"/>
+              </a:lnSpc>
+              <a:buNone/>
+            </a:pPr>
+            <a:r>
+              <a:rPr lang="en-US" sz="850" b="1" dirty="0">
+                <a:solidFill>
+                  <a:srgbClr val="1A1A1A"/>
+                </a:solidFill>
+                <a:latin typeface="Meiryo" pitchFamily="34" charset="0"/>
+                <a:ea typeface="Meiryo" pitchFamily="34" charset="-122"/>
+                <a:cs typeface="Meiryo" pitchFamily="34" charset="-120"/>
+              </a:rPr>
+              <a:t>採用を実績に合わせる</a:t>
+            </a:r>
+            <a:endParaRPr lang="en-US" sz="850" dirty="0"/>
+          </a:p>
+        </p:txBody>
+      </p:sp>
+      <p:sp>
+        <p:nvSpPr>
+          <p:cNvPr id="8" name="Text 4"/>
+          <p:cNvSpPr txBox="1"/>
+          <p:nvPr/>
+        </p:nvSpPr>
+        <p:spPr>
+          <a:xfrm>
+            <a:off x="3931920" y="1325880"/>
+            <a:ext cx="1280160" cy="219456"/>
+          </a:xfrm>
+          <a:prstGeom prst="rect">
+            <a:avLst/>
+          </a:prstGeom>
+          <a:solidFill>
+            <a:srgbClr val="F2F2F2"/>
+          </a:solidFill>
+          <a:ln/>
+        </p:spPr>
+        <p:txBody>
+          <a:bodyPr wrap="square" lIns="0" tIns="0" rIns="0" bIns="0" rtlCol="0" anchor="ctr"/>
+          <a:lstStyle/>
+          <a:p>
+            <a:pPr algn="ctr" indent="0" marL="0">
+              <a:lnSpc>
+                <a:spcPct val="115000"/>
+              </a:lnSpc>
+              <a:buNone/>
+            </a:pPr>
+            <a:r>
+              <a:rPr lang="en-US" sz="850" b="1" dirty="0">
+                <a:solidFill>
+                  <a:srgbClr val="B8692E"/>
+                </a:solidFill>
+                <a:latin typeface="Meiryo" pitchFamily="34" charset="0"/>
+                <a:ea typeface="Meiryo" pitchFamily="34" charset="-122"/>
+                <a:cs typeface="Meiryo" pitchFamily="34" charset="-120"/>
+              </a:rPr>
+              <a:t>採用は計画どおり</a:t>
+            </a:r>
+            <a:endParaRPr lang="en-US" sz="850" dirty="0"/>
+          </a:p>
+        </p:txBody>
+      </p:sp>
+      <p:sp>
+        <p:nvSpPr>
+          <p:cNvPr id="9" name="Shape 5"/>
           <p:cNvSpPr/>
           <p:nvPr/>
         </p:nvSpPr>
         <p:spPr>
           <a:xfrm>
-            <a:off x="365760" y="1051560"/>
-            <a:ext cx="3108960" cy="3383280"/>
+            <a:off x="365760" y="3447288"/>
+            <a:ext cx="4846320" cy="822960"/>
           </a:xfrm>
           <a:prstGeom prst="rect">
             <a:avLst/>
@@ -26971,6 +29074,1086 @@
       </p:sp>
       <p:sp>
         <p:nvSpPr>
+          <p:cNvPr id="10" name="Text 6"/>
+          <p:cNvSpPr txBox="1"/>
+          <p:nvPr/>
+        </p:nvSpPr>
+        <p:spPr>
+          <a:xfrm>
+            <a:off x="502920" y="3465576"/>
+            <a:ext cx="4572000" cy="786384"/>
+          </a:xfrm>
+          <a:prstGeom prst="rect">
+            <a:avLst/>
+          </a:prstGeom>
+          <a:noFill/>
+          <a:ln/>
+        </p:spPr>
+        <p:txBody>
+          <a:bodyPr wrap="square" lIns="0" tIns="0" rIns="0" bIns="0" rtlCol="0" anchor="ctr"/>
+          <a:lstStyle/>
+          <a:p>
+            <a:pPr algn="l" indent="0" marL="0">
+              <a:lnSpc>
+                <a:spcPct val="115000"/>
+              </a:lnSpc>
+              <a:spcAft>
+                <a:spcPts val="100"/>
+              </a:spcAft>
+              <a:buNone/>
+            </a:pPr>
+            <a:r>
+              <a:rPr lang="en-US" sz="900" b="1" dirty="0">
+                <a:solidFill>
+                  <a:srgbClr val="E3A774"/>
+                </a:solidFill>
+                <a:latin typeface="Meiryo" pitchFamily="34" charset="0"/>
+                <a:ea typeface="Meiryo" pitchFamily="34" charset="-122"/>
+                <a:cs typeface="Meiryo" pitchFamily="34" charset="-120"/>
+              </a:rPr>
+              <a:t>読み方</a:t>
+            </a:r>
+            <a:endParaRPr lang="en-US" sz="900" dirty="0"/>
+          </a:p>
+          <a:p>
+            <a:pPr algn="l" indent="0" marL="0">
+              <a:lnSpc>
+                <a:spcPct val="115000"/>
+              </a:lnSpc>
+              <a:spcAft>
+                <a:spcPts val="100"/>
+              </a:spcAft>
+              <a:buNone/>
+            </a:pPr>
+            <a:r>
+              <a:rPr lang="en-US" sz="900" dirty="0">
+                <a:solidFill>
+                  <a:srgbClr val="FFFFFF"/>
+                </a:solidFill>
+                <a:latin typeface="Meiryo" pitchFamily="34" charset="0"/>
+                <a:ea typeface="Meiryo" pitchFamily="34" charset="-122"/>
+                <a:cs typeface="Meiryo" pitchFamily="34" charset="-120"/>
+              </a:rPr>
+              <a:t>採用を遅らせれば、計画の6割で黒字、5割を割ると黒字にならない。</a:t>
+            </a:r>
+            <a:endParaRPr lang="en-US" sz="900" dirty="0"/>
+          </a:p>
+          <a:p>
+            <a:pPr algn="l" indent="0" marL="0">
+              <a:lnSpc>
+                <a:spcPct val="115000"/>
+              </a:lnSpc>
+              <a:spcAft>
+                <a:spcPts val="100"/>
+              </a:spcAft>
+              <a:buNone/>
+            </a:pPr>
+            <a:r>
+              <a:rPr lang="en-US" sz="900" dirty="0">
+                <a:solidFill>
+                  <a:srgbClr val="FFFFFF"/>
+                </a:solidFill>
+                <a:latin typeface="Meiryo" pitchFamily="34" charset="0"/>
+                <a:ea typeface="Meiryo" pitchFamily="34" charset="-122"/>
+                <a:cs typeface="Meiryo" pitchFamily="34" charset="-120"/>
+              </a:rPr>
+              <a:t>遅れているのに計画どおり採用すると、7割でも現金が尽きる。</a:t>
+            </a:r>
+            <a:endParaRPr lang="en-US" sz="900" dirty="0"/>
+          </a:p>
+          <a:p>
+            <a:pPr algn="l" indent="0" marL="0">
+              <a:lnSpc>
+                <a:spcPct val="115000"/>
+              </a:lnSpc>
+              <a:spcAft>
+                <a:spcPts val="100"/>
+              </a:spcAft>
+              <a:buNone/>
+            </a:pPr>
+            <a:r>
+              <a:rPr lang="en-US" sz="900" dirty="0">
+                <a:solidFill>
+                  <a:srgbClr val="FFFFFF"/>
+                </a:solidFill>
+                <a:latin typeface="Meiryo" pitchFamily="34" charset="0"/>
+                <a:ea typeface="Meiryo" pitchFamily="34" charset="-122"/>
+                <a:cs typeface="Meiryo" pitchFamily="34" charset="-120"/>
+              </a:rPr>
+              <a:t>採用は「期末で社員1人3拠点」の見込みが立ってから</a:t>
+            </a:r>
+            <a:endParaRPr lang="en-US" sz="900" dirty="0"/>
+          </a:p>
+        </p:txBody>
+      </p:sp>
+      <p:sp>
+        <p:nvSpPr>
+          <p:cNvPr id="11" name="Text 7"/>
+          <p:cNvSpPr txBox="1"/>
+          <p:nvPr/>
+        </p:nvSpPr>
+        <p:spPr>
+          <a:xfrm>
+            <a:off x="5486400" y="1051560"/>
+            <a:ext cx="3291840" cy="237744"/>
+          </a:xfrm>
+          <a:prstGeom prst="rect">
+            <a:avLst/>
+          </a:prstGeom>
+          <a:noFill/>
+          <a:ln/>
+        </p:spPr>
+        <p:txBody>
+          <a:bodyPr wrap="square" lIns="0" tIns="0" rIns="0" bIns="0" rtlCol="0" anchor="t"/>
+          <a:lstStyle/>
+          <a:p>
+            <a:pPr algn="l" indent="0" marL="0">
+              <a:lnSpc>
+                <a:spcPct val="115000"/>
+              </a:lnSpc>
+              <a:buNone/>
+            </a:pPr>
+            <a:r>
+              <a:rPr lang="en-US" sz="1050" b="1" dirty="0">
+                <a:solidFill>
+                  <a:srgbClr val="1A1A1A"/>
+                </a:solidFill>
+                <a:latin typeface="Meiryo" pitchFamily="34" charset="0"/>
+                <a:ea typeface="Meiryo" pitchFamily="34" charset="-122"/>
+                <a:cs typeface="Meiryo" pitchFamily="34" charset="-120"/>
+              </a:rPr>
+              <a:t>進む・直す・止まるの線</a:t>
+            </a:r>
+            <a:endParaRPr lang="en-US" sz="1050" dirty="0"/>
+          </a:p>
+        </p:txBody>
+      </p:sp>
+      <p:sp>
+        <p:nvSpPr>
+          <p:cNvPr id="12" name="Shape 8"/>
+          <p:cNvSpPr/>
+          <p:nvPr/>
+        </p:nvSpPr>
+        <p:spPr>
+          <a:xfrm>
+            <a:off x="5486400" y="1344168"/>
+            <a:ext cx="3291840" cy="1371600"/>
+          </a:xfrm>
+          <a:prstGeom prst="rect">
+            <a:avLst/>
+          </a:prstGeom>
+          <a:solidFill>
+            <a:srgbClr val="FFFFFF"/>
+          </a:solidFill>
+          <a:ln w="12700">
+            <a:solidFill>
+              <a:srgbClr val="1A1A1A"/>
+            </a:solidFill>
+            <a:prstDash val="solid"/>
+          </a:ln>
+        </p:spPr>
+      </p:sp>
+      <p:sp>
+        <p:nvSpPr>
+          <p:cNvPr id="13" name="Text 9"/>
+          <p:cNvSpPr txBox="1"/>
+          <p:nvPr/>
+        </p:nvSpPr>
+        <p:spPr>
+          <a:xfrm>
+            <a:off x="5596128" y="1380744"/>
+            <a:ext cx="3072384" cy="256032"/>
+          </a:xfrm>
+          <a:prstGeom prst="rect">
+            <a:avLst/>
+          </a:prstGeom>
+          <a:noFill/>
+          <a:ln/>
+        </p:spPr>
+        <p:txBody>
+          <a:bodyPr wrap="square" lIns="0" tIns="0" rIns="0" bIns="0" rtlCol="0" anchor="ctr"/>
+          <a:lstStyle/>
+          <a:p>
+            <a:pPr algn="l" indent="0" marL="0">
+              <a:lnSpc>
+                <a:spcPct val="115000"/>
+              </a:lnSpc>
+              <a:buNone/>
+            </a:pPr>
+            <a:r>
+              <a:rPr lang="en-US" sz="950" b="1" dirty="0">
+                <a:solidFill>
+                  <a:srgbClr val="B8692E"/>
+                </a:solidFill>
+                <a:latin typeface="Meiryo" pitchFamily="34" charset="0"/>
+                <a:ea typeface="Meiryo" pitchFamily="34" charset="-122"/>
+                <a:cs typeface="Meiryo" pitchFamily="34" charset="-120"/>
+              </a:rPr>
+              <a:t>1年目末　</a:t>
+            </a:r>
+            <a:pPr algn="l" indent="0" marL="0">
+              <a:lnSpc>
+                <a:spcPct val="115000"/>
+              </a:lnSpc>
+              <a:buNone/>
+            </a:pPr>
+            <a:r>
+              <a:rPr lang="en-US" sz="950" b="1" dirty="0">
+                <a:solidFill>
+                  <a:srgbClr val="1A1A1A"/>
+                </a:solidFill>
+                <a:latin typeface="Meiryo" pitchFamily="34" charset="0"/>
+                <a:ea typeface="Meiryo" pitchFamily="34" charset="-122"/>
+                <a:cs typeface="Meiryo" pitchFamily="34" charset="-120"/>
+              </a:rPr>
+              <a:t>実証3社のうち本契約</a:t>
+            </a:r>
+            <a:endParaRPr lang="en-US" sz="950" dirty="0"/>
+          </a:p>
+        </p:txBody>
+      </p:sp>
+      <p:sp>
+        <p:nvSpPr>
+          <p:cNvPr id="14" name="Shape 10"/>
+          <p:cNvSpPr/>
+          <p:nvPr/>
+        </p:nvSpPr>
+        <p:spPr>
+          <a:xfrm>
+            <a:off x="5596128" y="1673352"/>
+            <a:ext cx="777240" cy="292608"/>
+          </a:xfrm>
+          <a:prstGeom prst="rect">
+            <a:avLst/>
+          </a:prstGeom>
+          <a:solidFill>
+            <a:srgbClr val="1A1A1A"/>
+          </a:solidFill>
+          <a:ln/>
+        </p:spPr>
+      </p:sp>
+      <p:sp>
+        <p:nvSpPr>
+          <p:cNvPr id="15" name="Text 11"/>
+          <p:cNvSpPr txBox="1"/>
+          <p:nvPr/>
+        </p:nvSpPr>
+        <p:spPr>
+          <a:xfrm>
+            <a:off x="5596128" y="1673352"/>
+            <a:ext cx="777240" cy="292608"/>
+          </a:xfrm>
+          <a:prstGeom prst="rect">
+            <a:avLst/>
+          </a:prstGeom>
+          <a:noFill/>
+          <a:ln/>
+        </p:spPr>
+        <p:txBody>
+          <a:bodyPr wrap="square" lIns="0" tIns="0" rIns="0" bIns="0" rtlCol="0" anchor="ctr"/>
+          <a:lstStyle/>
+          <a:p>
+            <a:pPr algn="ctr" indent="0" marL="0">
+              <a:lnSpc>
+                <a:spcPct val="115000"/>
+              </a:lnSpc>
+              <a:buNone/>
+            </a:pPr>
+            <a:r>
+              <a:rPr lang="en-US" sz="900" b="1" dirty="0">
+                <a:solidFill>
+                  <a:srgbClr val="FFFFFF"/>
+                </a:solidFill>
+                <a:latin typeface="Meiryo" pitchFamily="34" charset="0"/>
+                <a:ea typeface="Meiryo" pitchFamily="34" charset="-122"/>
+                <a:cs typeface="Meiryo" pitchFamily="34" charset="-120"/>
+              </a:rPr>
+              <a:t>2社以上</a:t>
+            </a:r>
+            <a:endParaRPr lang="en-US" sz="900" dirty="0"/>
+          </a:p>
+        </p:txBody>
+      </p:sp>
+      <p:sp>
+        <p:nvSpPr>
+          <p:cNvPr id="16" name="Text 12"/>
+          <p:cNvSpPr txBox="1"/>
+          <p:nvPr/>
+        </p:nvSpPr>
+        <p:spPr>
+          <a:xfrm>
+            <a:off x="6446520" y="1673352"/>
+            <a:ext cx="2240280" cy="292608"/>
+          </a:xfrm>
+          <a:prstGeom prst="rect">
+            <a:avLst/>
+          </a:prstGeom>
+          <a:noFill/>
+          <a:ln/>
+        </p:spPr>
+        <p:txBody>
+          <a:bodyPr wrap="square" lIns="0" tIns="0" rIns="0" bIns="0" rtlCol="0" anchor="ctr"/>
+          <a:lstStyle/>
+          <a:p>
+            <a:pPr algn="l" indent="0" marL="0">
+              <a:lnSpc>
+                <a:spcPct val="115000"/>
+              </a:lnSpc>
+              <a:buNone/>
+            </a:pPr>
+            <a:r>
+              <a:rPr lang="en-US" sz="950" dirty="0">
+                <a:solidFill>
+                  <a:srgbClr val="1A1A1A"/>
+                </a:solidFill>
+                <a:latin typeface="Meiryo" pitchFamily="34" charset="0"/>
+                <a:ea typeface="Meiryo" pitchFamily="34" charset="-122"/>
+                <a:cs typeface="Meiryo" pitchFamily="34" charset="-120"/>
+              </a:rPr>
+              <a:t>→ 進む</a:t>
+            </a:r>
+            <a:endParaRPr lang="en-US" sz="950" dirty="0"/>
+          </a:p>
+        </p:txBody>
+      </p:sp>
+      <p:sp>
+        <p:nvSpPr>
+          <p:cNvPr id="17" name="Shape 13"/>
+          <p:cNvSpPr/>
+          <p:nvPr/>
+        </p:nvSpPr>
+        <p:spPr>
+          <a:xfrm>
+            <a:off x="5596128" y="2020824"/>
+            <a:ext cx="777240" cy="292608"/>
+          </a:xfrm>
+          <a:prstGeom prst="rect">
+            <a:avLst/>
+          </a:prstGeom>
+          <a:solidFill>
+            <a:srgbClr val="4D4D4D"/>
+          </a:solidFill>
+          <a:ln/>
+        </p:spPr>
+      </p:sp>
+      <p:sp>
+        <p:nvSpPr>
+          <p:cNvPr id="18" name="Text 14"/>
+          <p:cNvSpPr txBox="1"/>
+          <p:nvPr/>
+        </p:nvSpPr>
+        <p:spPr>
+          <a:xfrm>
+            <a:off x="5596128" y="2020824"/>
+            <a:ext cx="777240" cy="292608"/>
+          </a:xfrm>
+          <a:prstGeom prst="rect">
+            <a:avLst/>
+          </a:prstGeom>
+          <a:noFill/>
+          <a:ln/>
+        </p:spPr>
+        <p:txBody>
+          <a:bodyPr wrap="square" lIns="0" tIns="0" rIns="0" bIns="0" rtlCol="0" anchor="ctr"/>
+          <a:lstStyle/>
+          <a:p>
+            <a:pPr algn="ctr" indent="0" marL="0">
+              <a:lnSpc>
+                <a:spcPct val="115000"/>
+              </a:lnSpc>
+              <a:buNone/>
+            </a:pPr>
+            <a:r>
+              <a:rPr lang="en-US" sz="900" b="1" dirty="0">
+                <a:solidFill>
+                  <a:srgbClr val="FFFFFF"/>
+                </a:solidFill>
+                <a:latin typeface="Meiryo" pitchFamily="34" charset="0"/>
+                <a:ea typeface="Meiryo" pitchFamily="34" charset="-122"/>
+                <a:cs typeface="Meiryo" pitchFamily="34" charset="-120"/>
+              </a:rPr>
+              <a:t>1社</a:t>
+            </a:r>
+            <a:endParaRPr lang="en-US" sz="900" dirty="0"/>
+          </a:p>
+        </p:txBody>
+      </p:sp>
+      <p:sp>
+        <p:nvSpPr>
+          <p:cNvPr id="19" name="Text 15"/>
+          <p:cNvSpPr txBox="1"/>
+          <p:nvPr/>
+        </p:nvSpPr>
+        <p:spPr>
+          <a:xfrm>
+            <a:off x="6446520" y="2020824"/>
+            <a:ext cx="2240280" cy="292608"/>
+          </a:xfrm>
+          <a:prstGeom prst="rect">
+            <a:avLst/>
+          </a:prstGeom>
+          <a:noFill/>
+          <a:ln/>
+        </p:spPr>
+        <p:txBody>
+          <a:bodyPr wrap="square" lIns="0" tIns="0" rIns="0" bIns="0" rtlCol="0" anchor="ctr"/>
+          <a:lstStyle/>
+          <a:p>
+            <a:pPr algn="l" indent="0" marL="0">
+              <a:lnSpc>
+                <a:spcPct val="115000"/>
+              </a:lnSpc>
+              <a:buNone/>
+            </a:pPr>
+            <a:r>
+              <a:rPr lang="en-US" sz="950" dirty="0">
+                <a:solidFill>
+                  <a:srgbClr val="1A1A1A"/>
+                </a:solidFill>
+                <a:latin typeface="Meiryo" pitchFamily="34" charset="0"/>
+                <a:ea typeface="Meiryo" pitchFamily="34" charset="-122"/>
+                <a:cs typeface="Meiryo" pitchFamily="34" charset="-120"/>
+              </a:rPr>
+              <a:t>→ 値段と顧客を見直す</a:t>
+            </a:r>
+            <a:endParaRPr lang="en-US" sz="950" dirty="0"/>
+          </a:p>
+        </p:txBody>
+      </p:sp>
+      <p:sp>
+        <p:nvSpPr>
+          <p:cNvPr id="20" name="Shape 16"/>
+          <p:cNvSpPr/>
+          <p:nvPr/>
+        </p:nvSpPr>
+        <p:spPr>
+          <a:xfrm>
+            <a:off x="5596128" y="2368296"/>
+            <a:ext cx="777240" cy="292608"/>
+          </a:xfrm>
+          <a:prstGeom prst="rect">
+            <a:avLst/>
+          </a:prstGeom>
+          <a:solidFill>
+            <a:srgbClr val="B8692E"/>
+          </a:solidFill>
+          <a:ln/>
+        </p:spPr>
+      </p:sp>
+      <p:sp>
+        <p:nvSpPr>
+          <p:cNvPr id="21" name="Text 17"/>
+          <p:cNvSpPr txBox="1"/>
+          <p:nvPr/>
+        </p:nvSpPr>
+        <p:spPr>
+          <a:xfrm>
+            <a:off x="5596128" y="2368296"/>
+            <a:ext cx="777240" cy="292608"/>
+          </a:xfrm>
+          <a:prstGeom prst="rect">
+            <a:avLst/>
+          </a:prstGeom>
+          <a:noFill/>
+          <a:ln/>
+        </p:spPr>
+        <p:txBody>
+          <a:bodyPr wrap="square" lIns="0" tIns="0" rIns="0" bIns="0" rtlCol="0" anchor="ctr"/>
+          <a:lstStyle/>
+          <a:p>
+            <a:pPr algn="ctr" indent="0" marL="0">
+              <a:lnSpc>
+                <a:spcPct val="115000"/>
+              </a:lnSpc>
+              <a:buNone/>
+            </a:pPr>
+            <a:r>
+              <a:rPr lang="en-US" sz="900" b="1" dirty="0">
+                <a:solidFill>
+                  <a:srgbClr val="FFFFFF"/>
+                </a:solidFill>
+                <a:latin typeface="Meiryo" pitchFamily="34" charset="0"/>
+                <a:ea typeface="Meiryo" pitchFamily="34" charset="-122"/>
+                <a:cs typeface="Meiryo" pitchFamily="34" charset="-120"/>
+              </a:rPr>
+              <a:t>0社</a:t>
+            </a:r>
+            <a:endParaRPr lang="en-US" sz="900" dirty="0"/>
+          </a:p>
+        </p:txBody>
+      </p:sp>
+      <p:sp>
+        <p:nvSpPr>
+          <p:cNvPr id="22" name="Text 18"/>
+          <p:cNvSpPr txBox="1"/>
+          <p:nvPr/>
+        </p:nvSpPr>
+        <p:spPr>
+          <a:xfrm>
+            <a:off x="6446520" y="2368296"/>
+            <a:ext cx="2240280" cy="292608"/>
+          </a:xfrm>
+          <a:prstGeom prst="rect">
+            <a:avLst/>
+          </a:prstGeom>
+          <a:noFill/>
+          <a:ln/>
+        </p:spPr>
+        <p:txBody>
+          <a:bodyPr wrap="square" lIns="0" tIns="0" rIns="0" bIns="0" rtlCol="0" anchor="ctr"/>
+          <a:lstStyle/>
+          <a:p>
+            <a:pPr algn="l" indent="0" marL="0">
+              <a:lnSpc>
+                <a:spcPct val="115000"/>
+              </a:lnSpc>
+              <a:buNone/>
+            </a:pPr>
+            <a:r>
+              <a:rPr lang="en-US" sz="950" dirty="0">
+                <a:solidFill>
+                  <a:srgbClr val="1A1A1A"/>
+                </a:solidFill>
+                <a:latin typeface="Meiryo" pitchFamily="34" charset="0"/>
+                <a:ea typeface="Meiryo" pitchFamily="34" charset="-122"/>
+                <a:cs typeface="Meiryo" pitchFamily="34" charset="-120"/>
+              </a:rPr>
+              <a:t>→ 撤退か方向転換</a:t>
+            </a:r>
+            <a:endParaRPr lang="en-US" sz="950" dirty="0"/>
+          </a:p>
+        </p:txBody>
+      </p:sp>
+      <p:sp>
+        <p:nvSpPr>
+          <p:cNvPr id="23" name="Shape 19"/>
+          <p:cNvSpPr/>
+          <p:nvPr/>
+        </p:nvSpPr>
+        <p:spPr>
+          <a:xfrm>
+            <a:off x="5486400" y="2825496"/>
+            <a:ext cx="3291840" cy="1024128"/>
+          </a:xfrm>
+          <a:prstGeom prst="rect">
+            <a:avLst/>
+          </a:prstGeom>
+          <a:solidFill>
+            <a:srgbClr val="FFFFFF"/>
+          </a:solidFill>
+          <a:ln w="12700">
+            <a:solidFill>
+              <a:srgbClr val="1A1A1A"/>
+            </a:solidFill>
+            <a:prstDash val="solid"/>
+          </a:ln>
+        </p:spPr>
+      </p:sp>
+      <p:sp>
+        <p:nvSpPr>
+          <p:cNvPr id="24" name="Text 20"/>
+          <p:cNvSpPr txBox="1"/>
+          <p:nvPr/>
+        </p:nvSpPr>
+        <p:spPr>
+          <a:xfrm>
+            <a:off x="5596128" y="2862072"/>
+            <a:ext cx="3072384" cy="256032"/>
+          </a:xfrm>
+          <a:prstGeom prst="rect">
+            <a:avLst/>
+          </a:prstGeom>
+          <a:noFill/>
+          <a:ln/>
+        </p:spPr>
+        <p:txBody>
+          <a:bodyPr wrap="square" lIns="0" tIns="0" rIns="0" bIns="0" rtlCol="0" anchor="ctr"/>
+          <a:lstStyle/>
+          <a:p>
+            <a:pPr algn="l" indent="0" marL="0">
+              <a:lnSpc>
+                <a:spcPct val="115000"/>
+              </a:lnSpc>
+              <a:buNone/>
+            </a:pPr>
+            <a:r>
+              <a:rPr lang="en-US" sz="950" b="1" dirty="0">
+                <a:solidFill>
+                  <a:srgbClr val="B8692E"/>
+                </a:solidFill>
+                <a:latin typeface="Meiryo" pitchFamily="34" charset="0"/>
+                <a:ea typeface="Meiryo" pitchFamily="34" charset="-122"/>
+                <a:cs typeface="Meiryo" pitchFamily="34" charset="-120"/>
+              </a:rPr>
+              <a:t>2年目末　</a:t>
+            </a:r>
+            <a:pPr algn="l" indent="0" marL="0">
+              <a:lnSpc>
+                <a:spcPct val="115000"/>
+              </a:lnSpc>
+              <a:buNone/>
+            </a:pPr>
+            <a:r>
+              <a:rPr lang="en-US" sz="950" b="1" dirty="0">
+                <a:solidFill>
+                  <a:srgbClr val="1A1A1A"/>
+                </a:solidFill>
+                <a:latin typeface="Meiryo" pitchFamily="34" charset="0"/>
+                <a:ea typeface="Meiryo" pitchFamily="34" charset="-122"/>
+                <a:cs typeface="Meiryo" pitchFamily="34" charset="-120"/>
+              </a:rPr>
+              <a:t>新規拠点</a:t>
+            </a:r>
+            <a:endParaRPr lang="en-US" sz="950" dirty="0"/>
+          </a:p>
+        </p:txBody>
+      </p:sp>
+      <p:sp>
+        <p:nvSpPr>
+          <p:cNvPr id="25" name="Shape 21"/>
+          <p:cNvSpPr/>
+          <p:nvPr/>
+        </p:nvSpPr>
+        <p:spPr>
+          <a:xfrm>
+            <a:off x="5596128" y="3154680"/>
+            <a:ext cx="777240" cy="292608"/>
+          </a:xfrm>
+          <a:prstGeom prst="rect">
+            <a:avLst/>
+          </a:prstGeom>
+          <a:solidFill>
+            <a:srgbClr val="1A1A1A"/>
+          </a:solidFill>
+          <a:ln/>
+        </p:spPr>
+      </p:sp>
+      <p:sp>
+        <p:nvSpPr>
+          <p:cNvPr id="26" name="Text 22"/>
+          <p:cNvSpPr txBox="1"/>
+          <p:nvPr/>
+        </p:nvSpPr>
+        <p:spPr>
+          <a:xfrm>
+            <a:off x="5596128" y="3154680"/>
+            <a:ext cx="777240" cy="292608"/>
+          </a:xfrm>
+          <a:prstGeom prst="rect">
+            <a:avLst/>
+          </a:prstGeom>
+          <a:noFill/>
+          <a:ln/>
+        </p:spPr>
+        <p:txBody>
+          <a:bodyPr wrap="square" lIns="0" tIns="0" rIns="0" bIns="0" rtlCol="0" anchor="ctr"/>
+          <a:lstStyle/>
+          <a:p>
+            <a:pPr algn="ctr" indent="0" marL="0">
+              <a:lnSpc>
+                <a:spcPct val="115000"/>
+              </a:lnSpc>
+              <a:buNone/>
+            </a:pPr>
+            <a:r>
+              <a:rPr lang="en-US" sz="900" b="1" dirty="0">
+                <a:solidFill>
+                  <a:srgbClr val="FFFFFF"/>
+                </a:solidFill>
+                <a:latin typeface="Meiryo" pitchFamily="34" charset="0"/>
+                <a:ea typeface="Meiryo" pitchFamily="34" charset="-122"/>
+                <a:cs typeface="Meiryo" pitchFamily="34" charset="-120"/>
+              </a:rPr>
+              <a:t>5以上</a:t>
+            </a:r>
+            <a:endParaRPr lang="en-US" sz="900" dirty="0"/>
+          </a:p>
+        </p:txBody>
+      </p:sp>
+      <p:sp>
+        <p:nvSpPr>
+          <p:cNvPr id="27" name="Text 23"/>
+          <p:cNvSpPr txBox="1"/>
+          <p:nvPr/>
+        </p:nvSpPr>
+        <p:spPr>
+          <a:xfrm>
+            <a:off x="6446520" y="3154680"/>
+            <a:ext cx="2240280" cy="292608"/>
+          </a:xfrm>
+          <a:prstGeom prst="rect">
+            <a:avLst/>
+          </a:prstGeom>
+          <a:noFill/>
+          <a:ln/>
+        </p:spPr>
+        <p:txBody>
+          <a:bodyPr wrap="square" lIns="0" tIns="0" rIns="0" bIns="0" rtlCol="0" anchor="ctr"/>
+          <a:lstStyle/>
+          <a:p>
+            <a:pPr algn="l" indent="0" marL="0">
+              <a:lnSpc>
+                <a:spcPct val="115000"/>
+              </a:lnSpc>
+              <a:buNone/>
+            </a:pPr>
+            <a:r>
+              <a:rPr lang="en-US" sz="950" dirty="0">
+                <a:solidFill>
+                  <a:srgbClr val="1A1A1A"/>
+                </a:solidFill>
+                <a:latin typeface="Meiryo" pitchFamily="34" charset="0"/>
+                <a:ea typeface="Meiryo" pitchFamily="34" charset="-122"/>
+                <a:cs typeface="Meiryo" pitchFamily="34" charset="-120"/>
+              </a:rPr>
+              <a:t>→ 計画どおり採用</a:t>
+            </a:r>
+            <a:endParaRPr lang="en-US" sz="950" dirty="0"/>
+          </a:p>
+        </p:txBody>
+      </p:sp>
+      <p:sp>
+        <p:nvSpPr>
+          <p:cNvPr id="28" name="Shape 24"/>
+          <p:cNvSpPr/>
+          <p:nvPr/>
+        </p:nvSpPr>
+        <p:spPr>
+          <a:xfrm>
+            <a:off x="5596128" y="3502152"/>
+            <a:ext cx="777240" cy="292608"/>
+          </a:xfrm>
+          <a:prstGeom prst="rect">
+            <a:avLst/>
+          </a:prstGeom>
+          <a:solidFill>
+            <a:srgbClr val="B8692E"/>
+          </a:solidFill>
+          <a:ln/>
+        </p:spPr>
+      </p:sp>
+      <p:sp>
+        <p:nvSpPr>
+          <p:cNvPr id="29" name="Text 25"/>
+          <p:cNvSpPr txBox="1"/>
+          <p:nvPr/>
+        </p:nvSpPr>
+        <p:spPr>
+          <a:xfrm>
+            <a:off x="5596128" y="3502152"/>
+            <a:ext cx="777240" cy="292608"/>
+          </a:xfrm>
+          <a:prstGeom prst="rect">
+            <a:avLst/>
+          </a:prstGeom>
+          <a:noFill/>
+          <a:ln/>
+        </p:spPr>
+        <p:txBody>
+          <a:bodyPr wrap="square" lIns="0" tIns="0" rIns="0" bIns="0" rtlCol="0" anchor="ctr"/>
+          <a:lstStyle/>
+          <a:p>
+            <a:pPr algn="ctr" indent="0" marL="0">
+              <a:lnSpc>
+                <a:spcPct val="115000"/>
+              </a:lnSpc>
+              <a:buNone/>
+            </a:pPr>
+            <a:r>
+              <a:rPr lang="en-US" sz="900" b="1" dirty="0">
+                <a:solidFill>
+                  <a:srgbClr val="FFFFFF"/>
+                </a:solidFill>
+                <a:latin typeface="Meiryo" pitchFamily="34" charset="0"/>
+                <a:ea typeface="Meiryo" pitchFamily="34" charset="-122"/>
+                <a:cs typeface="Meiryo" pitchFamily="34" charset="-120"/>
+              </a:rPr>
+              <a:t>5未満</a:t>
+            </a:r>
+            <a:endParaRPr lang="en-US" sz="900" dirty="0"/>
+          </a:p>
+        </p:txBody>
+      </p:sp>
+      <p:sp>
+        <p:nvSpPr>
+          <p:cNvPr id="30" name="Text 26"/>
+          <p:cNvSpPr txBox="1"/>
+          <p:nvPr/>
+        </p:nvSpPr>
+        <p:spPr>
+          <a:xfrm>
+            <a:off x="6446520" y="3502152"/>
+            <a:ext cx="2240280" cy="292608"/>
+          </a:xfrm>
+          <a:prstGeom prst="rect">
+            <a:avLst/>
+          </a:prstGeom>
+          <a:noFill/>
+          <a:ln/>
+        </p:spPr>
+        <p:txBody>
+          <a:bodyPr wrap="square" lIns="0" tIns="0" rIns="0" bIns="0" rtlCol="0" anchor="ctr"/>
+          <a:lstStyle/>
+          <a:p>
+            <a:pPr algn="l" indent="0" marL="0">
+              <a:lnSpc>
+                <a:spcPct val="115000"/>
+              </a:lnSpc>
+              <a:buNone/>
+            </a:pPr>
+            <a:r>
+              <a:rPr lang="en-US" sz="950" dirty="0">
+                <a:solidFill>
+                  <a:srgbClr val="1A1A1A"/>
+                </a:solidFill>
+                <a:latin typeface="Meiryo" pitchFamily="34" charset="0"/>
+                <a:ea typeface="Meiryo" pitchFamily="34" charset="-122"/>
+                <a:cs typeface="Meiryo" pitchFamily="34" charset="-120"/>
+              </a:rPr>
+              <a:t>→ 採用を止める</a:t>
+            </a:r>
+            <a:endParaRPr lang="en-US" sz="950" dirty="0"/>
+          </a:p>
+        </p:txBody>
+      </p:sp>
+      <p:sp>
+        <p:nvSpPr>
+          <p:cNvPr id="31" name="Text 27"/>
+          <p:cNvSpPr txBox="1"/>
+          <p:nvPr/>
+        </p:nvSpPr>
+        <p:spPr>
+          <a:xfrm>
+            <a:off x="365760" y="4553712"/>
+            <a:ext cx="8412480" cy="237744"/>
+          </a:xfrm>
+          <a:prstGeom prst="rect">
+            <a:avLst/>
+          </a:prstGeom>
+          <a:noFill/>
+          <a:ln/>
+        </p:spPr>
+        <p:txBody>
+          <a:bodyPr wrap="square" lIns="0" tIns="0" rIns="0" bIns="0" rtlCol="0" anchor="t"/>
+          <a:lstStyle/>
+          <a:p>
+            <a:pPr algn="l" indent="0" marL="0">
+              <a:lnSpc>
+                <a:spcPct val="115000"/>
+              </a:lnSpc>
+              <a:buNone/>
+            </a:pPr>
+            <a:r>
+              <a:rPr lang="en-US" sz="800" dirty="0">
+                <a:solidFill>
+                  <a:srgbClr val="8C8C8C"/>
+                </a:solidFill>
+                <a:latin typeface="Meiryo" pitchFamily="34" charset="0"/>
+                <a:ea typeface="Meiryo" pitchFamily="34" charset="-122"/>
+                <a:cs typeface="Meiryo" pitchFamily="34" charset="-120"/>
+              </a:rPr>
+              <a:t>黒字化の年と最低現金は、新規拠点・受託を同じ割合で減らした簡易計算。採用連動は社員数＝4＋（計画−4）×達成度。調達は全シナリオで1億2,500万円</a:t>
+            </a:r>
+            <a:endParaRPr lang="en-US" sz="800" dirty="0"/>
+          </a:p>
+        </p:txBody>
+      </p:sp>
+      <p:sp>
+        <p:nvSpPr>
+          <p:cNvPr id="25" name="Slide Number Placeholder 0"/>
+          <p:cNvSpPr>
+            <a:spLocks noGrp="1"/>
+          </p:cNvSpPr>
+          <p:nvPr>
+            <p:ph type="sldNum" sz="quarter" idx="4294967295"/>
+          </p:nvPr>
+        </p:nvSpPr>
+        <p:spPr>
+          <a:xfrm>
+            <a:off x="365760" y="4837176"/>
+            <a:ext cx="320040" cy="201168"/>
+          </a:xfrm>
+          <a:prstGeom prst="rect">
+            <a:avLst/>
+          </a:prstGeom>
+          <a:extLst>
+            <a:ext uri="{C572A759-6A51-4108-AA02-DFA0A04FC94B}">
+              <ma14:wrappingTextBoxFlag xmlns:ma14="http://schemas.microsoft.com/office/mac/drawingml/2011/main" val="0"/>
+            </a:ext>
+          </a:extLst>
+        </p:spPr>
+        <p:txBody>
+          <a:bodyPr lIns="0" tIns="0" rIns="0" bIns="0"/>
+          <a:lstStyle>
+            <a:lvl1pPr>
+              <a:defRPr sz="850">
+                <a:solidFill>
+                  <a:srgbClr val="8C8C8C"/>
+                </a:solidFill>
+                <a:latin typeface="Meiryo"/>
+                <a:ea typeface="Meiryo"/>
+                <a:cs typeface="Meiryo"/>
+              </a:defRPr>
+            </a:lvl1pPr>
+          </a:lstStyle>
+          <a:p>
+            <a:pPr algn="l"/>
+            <a:fld id="{F7021451-1387-4CA6-816F-3879F97B5CBC}" type="slidenum">
+              <a:rPr b="0" lang="en-US"/>
+              <a:t>21</a:t>
+            </a:fld>
+            <a:endParaRPr lang="en-US"/>
+          </a:p>
+        </p:txBody>
+      </p:sp>
+    </p:spTree>
+  </p:cSld>
+  <p:clrMapOvr>
+    <a:masterClrMapping/>
+  </p:clrMapOvr>
+</p:sld>
+</file>
+
+<file path=ppt/slides/slide22.xml><?xml version="1.0" encoding="utf-8"?>
+<p:sld xmlns:a="http://schemas.openxmlformats.org/drawingml/2006/main" xmlns:r="http://schemas.openxmlformats.org/officeDocument/2006/relationships" xmlns:p="http://schemas.openxmlformats.org/presentationml/2006/main">
+  <p:cSld name="Slide 22">
+    <p:spTree>
+      <p:nvGrpSpPr>
+        <p:cNvPr id="1" name=""/>
+        <p:cNvGrpSpPr/>
+        <p:nvPr/>
+      </p:nvGrpSpPr>
+      <p:grpSpPr>
+        <a:xfrm>
+          <a:off x="0" y="0"/>
+          <a:ext cx="0" cy="0"/>
+          <a:chOff x="0" y="0"/>
+          <a:chExt cx="0" cy="0"/>
+        </a:xfrm>
+      </p:grpSpPr>
+      <p:sp>
+        <p:nvSpPr>
+          <p:cNvPr id="3" name="title"/>
+          <p:cNvSpPr txBox="1"/>
+          <p:nvPr/>
+        </p:nvSpPr>
+        <p:spPr>
+          <a:xfrm>
+            <a:off x="365760" y="256032"/>
+            <a:ext cx="7955280" cy="384048"/>
+          </a:xfrm>
+          <a:prstGeom prst="rect">
+            <a:avLst/>
+          </a:prstGeom>
+          <a:noFill/>
+          <a:ln/>
+        </p:spPr>
+        <p:txBody>
+          <a:bodyPr wrap="square" lIns="0" tIns="0" rIns="0" bIns="0" rtlCol="0" anchor="ctr"/>
+          <a:lstStyle/>
+          <a:p>
+            <a:pPr algn="l" indent="0" marL="0">
+              <a:lnSpc>
+                <a:spcPct val="115000"/>
+              </a:lnSpc>
+              <a:buNone/>
+            </a:pPr>
+            <a:r>
+              <a:rPr lang="en-US" sz="2000" b="1" dirty="0">
+                <a:solidFill>
+                  <a:srgbClr val="B8692E"/>
+                </a:solidFill>
+                <a:latin typeface="Meiryo" pitchFamily="34" charset="0"/>
+                <a:ea typeface="Meiryo" pitchFamily="34" charset="-122"/>
+                <a:cs typeface="Meiryo" pitchFamily="34" charset="-120"/>
+              </a:rPr>
+              <a:t>⑦ </a:t>
+            </a:r>
+            <a:pPr algn="l" indent="0" marL="0">
+              <a:lnSpc>
+                <a:spcPct val="115000"/>
+              </a:lnSpc>
+              <a:buNone/>
+            </a:pPr>
+            <a:r>
+              <a:rPr lang="en-US" sz="2000" b="1" dirty="0">
+                <a:solidFill>
+                  <a:srgbClr val="1A1A1A"/>
+                </a:solidFill>
+                <a:latin typeface="Meiryo" pitchFamily="34" charset="0"/>
+                <a:ea typeface="Meiryo" pitchFamily="34" charset="-122"/>
+                <a:cs typeface="Meiryo" pitchFamily="34" charset="-120"/>
+              </a:rPr>
+              <a:t>チーム ─ 現場と技術を揃え、顧問とパートナーで補う</a:t>
+            </a:r>
+            <a:endParaRPr lang="en-US" sz="2000" dirty="0"/>
+          </a:p>
+        </p:txBody>
+      </p:sp>
+      <p:sp>
+        <p:nvSpPr>
+          <p:cNvPr id="4" name="lead"/>
+          <p:cNvSpPr txBox="1"/>
+          <p:nvPr/>
+        </p:nvSpPr>
+        <p:spPr>
+          <a:xfrm>
+            <a:off x="365760" y="658368"/>
+            <a:ext cx="7955280" cy="256032"/>
+          </a:xfrm>
+          <a:prstGeom prst="rect">
+            <a:avLst/>
+          </a:prstGeom>
+          <a:noFill/>
+          <a:ln/>
+        </p:spPr>
+        <p:txBody>
+          <a:bodyPr wrap="square" lIns="0" tIns="0" rIns="0" bIns="0" rtlCol="0" anchor="ctr"/>
+          <a:lstStyle/>
+          <a:p>
+            <a:pPr algn="l" indent="0" marL="0">
+              <a:lnSpc>
+                <a:spcPct val="115000"/>
+              </a:lnSpc>
+              <a:buNone/>
+            </a:pPr>
+            <a:r>
+              <a:rPr lang="en-US" sz="1200" dirty="0">
+                <a:solidFill>
+                  <a:srgbClr val="4D4D4D"/>
+                </a:solidFill>
+                <a:latin typeface="Meiryo" pitchFamily="34" charset="0"/>
+                <a:ea typeface="Meiryo" pitchFamily="34" charset="-122"/>
+                <a:cs typeface="Meiryo" pitchFamily="34" charset="-120"/>
+              </a:rPr>
+              <a:t>創業者の経歴・チームメンバーのスキル・外部パートナーと顧問</a:t>
+            </a:r>
+            <a:endParaRPr lang="en-US" sz="1200" dirty="0"/>
+          </a:p>
+        </p:txBody>
+      </p:sp>
+      <p:sp>
+        <p:nvSpPr>
+          <p:cNvPr id="5" name="founder"/>
+          <p:cNvSpPr/>
+          <p:nvPr/>
+        </p:nvSpPr>
+        <p:spPr>
+          <a:xfrm>
+            <a:off x="365760" y="1051560"/>
+            <a:ext cx="3108960" cy="3383280"/>
+          </a:xfrm>
+          <a:prstGeom prst="rect">
+            <a:avLst/>
+          </a:prstGeom>
+          <a:solidFill>
+            <a:srgbClr val="1A1A1A"/>
+          </a:solidFill>
+          <a:ln/>
+        </p:spPr>
+      </p:sp>
+      <p:sp>
+        <p:nvSpPr>
           <p:cNvPr id="6" name="Text 3"/>
           <p:cNvSpPr txBox="1"/>
           <p:nvPr/>
@@ -27212,7 +30395,7 @@
       </p:sp>
       <p:graphicFrame>
         <p:nvGraphicFramePr>
-          <p:cNvPr id="22" name="team"/>
+          <p:cNvPr id="23" name="team"/>
           <p:cNvGraphicFramePr>
             <a:graphicFrameLocks noGrp="1"/>
           </p:cNvGraphicFramePr>
@@ -28819,929 +32002,6 @@
             <a:pPr algn="l"/>
             <a:fld id="{F7021451-1387-4CA6-816F-3879F97B5CBC}" type="slidenum">
               <a:rPr b="0" lang="en-US"/>
-              <a:t>21</a:t>
-            </a:fld>
-            <a:endParaRPr lang="en-US"/>
-          </a:p>
-        </p:txBody>
-      </p:sp>
-    </p:spTree>
-  </p:cSld>
-  <p:clrMapOvr>
-    <a:masterClrMapping/>
-  </p:clrMapOvr>
-</p:sld>
-</file>
-
-<file path=ppt/slides/slide22.xml><?xml version="1.0" encoding="utf-8"?>
-<p:sld xmlns:a="http://schemas.openxmlformats.org/drawingml/2006/main" xmlns:r="http://schemas.openxmlformats.org/officeDocument/2006/relationships" xmlns:p="http://schemas.openxmlformats.org/presentationml/2006/main">
-  <p:cSld name="Slide 22">
-    <p:spTree>
-      <p:nvGrpSpPr>
-        <p:cNvPr id="1" name=""/>
-        <p:cNvGrpSpPr/>
-        <p:nvPr/>
-      </p:nvGrpSpPr>
-      <p:grpSpPr>
-        <a:xfrm>
-          <a:off x="0" y="0"/>
-          <a:ext cx="0" cy="0"/>
-          <a:chOff x="0" y="0"/>
-          <a:chExt cx="0" cy="0"/>
-        </a:xfrm>
-      </p:grpSpPr>
-      <p:sp>
-        <p:nvSpPr>
-          <p:cNvPr id="3" name="title"/>
-          <p:cNvSpPr txBox="1"/>
-          <p:nvPr/>
-        </p:nvSpPr>
-        <p:spPr>
-          <a:xfrm>
-            <a:off x="365760" y="256032"/>
-            <a:ext cx="7955280" cy="384048"/>
-          </a:xfrm>
-          <a:prstGeom prst="rect">
-            <a:avLst/>
-          </a:prstGeom>
-          <a:noFill/>
-          <a:ln/>
-        </p:spPr>
-        <p:txBody>
-          <a:bodyPr wrap="square" lIns="0" tIns="0" rIns="0" bIns="0" rtlCol="0" anchor="ctr"/>
-          <a:lstStyle/>
-          <a:p>
-            <a:pPr algn="l" indent="0" marL="0">
-              <a:lnSpc>
-                <a:spcPct val="115000"/>
-              </a:lnSpc>
-              <a:buNone/>
-            </a:pPr>
-            <a:r>
-              <a:rPr lang="en-US" sz="2000" b="1" dirty="0">
-                <a:solidFill>
-                  <a:srgbClr val="1A1A1A"/>
-                </a:solidFill>
-                <a:latin typeface="Meiryo" pitchFamily="34" charset="0"/>
-                <a:ea typeface="Meiryo" pitchFamily="34" charset="-122"/>
-                <a:cs typeface="Meiryo" pitchFamily="34" charset="-120"/>
-              </a:rPr>
-              <a:t>事業のライフサイクル ─ 成熟期には上場を目指す</a:t>
-            </a:r>
-            <a:endParaRPr lang="en-US" sz="2000" dirty="0"/>
-          </a:p>
-        </p:txBody>
-      </p:sp>
-      <p:sp>
-        <p:nvSpPr>
-          <p:cNvPr id="4" name="lead"/>
-          <p:cNvSpPr txBox="1"/>
-          <p:nvPr/>
-        </p:nvSpPr>
-        <p:spPr>
-          <a:xfrm>
-            <a:off x="365760" y="658368"/>
-            <a:ext cx="7955280" cy="256032"/>
-          </a:xfrm>
-          <a:prstGeom prst="rect">
-            <a:avLst/>
-          </a:prstGeom>
-          <a:noFill/>
-          <a:ln/>
-        </p:spPr>
-        <p:txBody>
-          <a:bodyPr wrap="square" lIns="0" tIns="0" rIns="0" bIns="0" rtlCol="0" anchor="ctr"/>
-          <a:lstStyle/>
-          <a:p>
-            <a:pPr algn="l" indent="0" marL="0">
-              <a:lnSpc>
-                <a:spcPct val="115000"/>
-              </a:lnSpc>
-              <a:buNone/>
-            </a:pPr>
-            <a:r>
-              <a:rPr lang="en-US" sz="1200" dirty="0">
-                <a:solidFill>
-                  <a:srgbClr val="4D4D4D"/>
-                </a:solidFill>
-                <a:latin typeface="Meiryo" pitchFamily="34" charset="0"/>
-                <a:ea typeface="Meiryo" pitchFamily="34" charset="-122"/>
-                <a:cs typeface="Meiryo" pitchFamily="34" charset="-120"/>
-              </a:rPr>
-              <a:t>解決策の3段階を、導入期・成長期・成熟期に重ねる</a:t>
-            </a:r>
-            <a:endParaRPr lang="en-US" sz="1200" dirty="0"/>
-          </a:p>
-        </p:txBody>
-      </p:sp>
-      <p:sp>
-        <p:nvSpPr>
-          <p:cNvPr id="5" name="life-0"/>
-          <p:cNvSpPr/>
-          <p:nvPr/>
-        </p:nvSpPr>
-        <p:spPr>
-          <a:xfrm>
-            <a:off x="365760" y="1737360"/>
-            <a:ext cx="2715768" cy="2148840"/>
-          </a:xfrm>
-          <a:prstGeom prst="rect">
-            <a:avLst/>
-          </a:prstGeom>
-          <a:solidFill>
-            <a:srgbClr val="F2F2F2"/>
-          </a:solidFill>
-          <a:ln/>
-        </p:spPr>
-      </p:sp>
-      <p:sp>
-        <p:nvSpPr>
-          <p:cNvPr id="6" name="Text 3"/>
-          <p:cNvSpPr txBox="1"/>
-          <p:nvPr/>
-        </p:nvSpPr>
-        <p:spPr>
-          <a:xfrm>
-            <a:off x="502920" y="1828800"/>
-            <a:ext cx="2441448" cy="566928"/>
-          </a:xfrm>
-          <a:prstGeom prst="rect">
-            <a:avLst/>
-          </a:prstGeom>
-          <a:noFill/>
-          <a:ln/>
-        </p:spPr>
-        <p:txBody>
-          <a:bodyPr wrap="square" lIns="0" tIns="0" rIns="0" bIns="0" rtlCol="0" anchor="t"/>
-          <a:lstStyle/>
-          <a:p>
-            <a:pPr algn="l" indent="0" marL="0">
-              <a:lnSpc>
-                <a:spcPct val="115000"/>
-              </a:lnSpc>
-              <a:buNone/>
-            </a:pPr>
-            <a:r>
-              <a:rPr lang="en-US" sz="1800" b="1" dirty="0">
-                <a:solidFill>
-                  <a:srgbClr val="1A1A1A"/>
-                </a:solidFill>
-                <a:latin typeface="Meiryo" pitchFamily="34" charset="0"/>
-                <a:ea typeface="Meiryo" pitchFamily="34" charset="-122"/>
-                <a:cs typeface="Meiryo" pitchFamily="34" charset="-120"/>
-              </a:rPr>
-              <a:t>導入期</a:t>
-            </a:r>
-            <a:endParaRPr lang="en-US" sz="1400" dirty="0"/>
-          </a:p>
-          <a:p>
-            <a:pPr algn="l" indent="0" marL="0">
-              <a:lnSpc>
-                <a:spcPct val="115000"/>
-              </a:lnSpc>
-              <a:buNone/>
-            </a:pPr>
-            <a:r>
-              <a:rPr lang="en-US" sz="950" dirty="0">
-                <a:solidFill>
-                  <a:srgbClr val="1A1A1A"/>
-                </a:solidFill>
-                <a:latin typeface="Meiryo" pitchFamily="34" charset="0"/>
-                <a:ea typeface="Meiryo" pitchFamily="34" charset="-122"/>
-                <a:cs typeface="Meiryo" pitchFamily="34" charset="-120"/>
-              </a:rPr>
-              <a:t>準備期〜2年目</a:t>
-            </a:r>
-            <a:endParaRPr lang="en-US" sz="1400" dirty="0"/>
-          </a:p>
-        </p:txBody>
-      </p:sp>
-      <p:sp>
-        <p:nvSpPr>
-          <p:cNvPr id="7" name="Text 4"/>
-          <p:cNvSpPr txBox="1"/>
-          <p:nvPr/>
-        </p:nvSpPr>
-        <p:spPr>
-          <a:xfrm>
-            <a:off x="502920" y="2423160"/>
-            <a:ext cx="2441448" cy="274320"/>
-          </a:xfrm>
-          <a:prstGeom prst="rect">
-            <a:avLst/>
-          </a:prstGeom>
-          <a:noFill/>
-          <a:ln/>
-        </p:spPr>
-        <p:txBody>
-          <a:bodyPr wrap="square" lIns="0" tIns="0" rIns="0" bIns="0" rtlCol="0" anchor="t"/>
-          <a:lstStyle/>
-          <a:p>
-            <a:pPr algn="l" indent="0" marL="0">
-              <a:lnSpc>
-                <a:spcPct val="115000"/>
-              </a:lnSpc>
-              <a:buNone/>
-            </a:pPr>
-            <a:r>
-              <a:rPr lang="en-US" sz="1100" b="1" dirty="0">
-                <a:solidFill>
-                  <a:srgbClr val="1A1A1A"/>
-                </a:solidFill>
-                <a:latin typeface="Meiryo" pitchFamily="34" charset="0"/>
-                <a:ea typeface="Meiryo" pitchFamily="34" charset="-122"/>
-                <a:cs typeface="Meiryo" pitchFamily="34" charset="-120"/>
-              </a:rPr>
-              <a:t>記録と報告を自動に</a:t>
-            </a:r>
-            <a:endParaRPr lang="en-US" sz="1100" dirty="0"/>
-          </a:p>
-        </p:txBody>
-      </p:sp>
-      <p:sp>
-        <p:nvSpPr>
-          <p:cNvPr id="8" name="Text 5"/>
-          <p:cNvSpPr txBox="1"/>
-          <p:nvPr/>
-        </p:nvSpPr>
-        <p:spPr>
-          <a:xfrm>
-            <a:off x="502920" y="2743200"/>
-            <a:ext cx="2441448" cy="1188720"/>
-          </a:xfrm>
-          <a:prstGeom prst="rect">
-            <a:avLst/>
-          </a:prstGeom>
-          <a:noFill/>
-          <a:ln/>
-        </p:spPr>
-        <p:txBody>
-          <a:bodyPr wrap="square" lIns="0" tIns="0" rIns="0" bIns="0" rtlCol="0" anchor="t"/>
-          <a:lstStyle/>
-          <a:p>
-            <a:pPr algn="l" indent="0" marL="0">
-              <a:lnSpc>
-                <a:spcPct val="115000"/>
-              </a:lnSpc>
-              <a:spcAft>
-                <a:spcPts val="400"/>
-              </a:spcAft>
-              <a:buNone/>
-            </a:pPr>
-            <a:r>
-              <a:rPr lang="en-US" sz="950" dirty="0">
-                <a:solidFill>
-                  <a:srgbClr val="1A1A1A"/>
-                </a:solidFill>
-                <a:latin typeface="Meiryo" pitchFamily="34" charset="0"/>
-                <a:ea typeface="Meiryo" pitchFamily="34" charset="-122"/>
-                <a:cs typeface="Meiryo" pitchFamily="34" charset="-120"/>
-              </a:rPr>
-              <a:t>・関東の電気工事会社3社で有償試験導入</a:t>
-            </a:r>
-            <a:endParaRPr lang="en-US" sz="950" dirty="0"/>
-          </a:p>
-          <a:p>
-            <a:pPr algn="l" indent="0" marL="0">
-              <a:lnSpc>
-                <a:spcPct val="115000"/>
-              </a:lnSpc>
-              <a:spcAft>
-                <a:spcPts val="400"/>
-              </a:spcAft>
-              <a:buNone/>
-            </a:pPr>
-            <a:r>
-              <a:rPr lang="en-US" sz="950" dirty="0">
-                <a:solidFill>
-                  <a:srgbClr val="1A1A1A"/>
-                </a:solidFill>
-                <a:latin typeface="Meiryo" pitchFamily="34" charset="0"/>
-                <a:ea typeface="Meiryo" pitchFamily="34" charset="-122"/>
-                <a:cs typeface="Meiryo" pitchFamily="34" charset="-120"/>
-              </a:rPr>
-              <a:t>・赤字。準備期は500万円で試作品と実証</a:t>
-            </a:r>
-            <a:endParaRPr lang="en-US" sz="950" dirty="0"/>
-          </a:p>
-          <a:p>
-            <a:pPr algn="l" indent="0" marL="0">
-              <a:lnSpc>
-                <a:spcPct val="115000"/>
-              </a:lnSpc>
-              <a:spcAft>
-                <a:spcPts val="400"/>
-              </a:spcAft>
-              <a:buNone/>
-            </a:pPr>
-            <a:r>
-              <a:rPr lang="en-US" sz="950" dirty="0">
-                <a:solidFill>
-                  <a:srgbClr val="1A1A1A"/>
-                </a:solidFill>
-                <a:latin typeface="Meiryo" pitchFamily="34" charset="0"/>
-                <a:ea typeface="Meiryo" pitchFamily="34" charset="-122"/>
-                <a:cs typeface="Meiryo" pitchFamily="34" charset="-120"/>
-              </a:rPr>
-              <a:t>・資金：出資・公庫融資・CVC</a:t>
-            </a:r>
-            <a:endParaRPr lang="en-US" sz="950" dirty="0"/>
-          </a:p>
-        </p:txBody>
-      </p:sp>
-      <p:sp>
-        <p:nvSpPr>
-          <p:cNvPr id="9" name="life-1"/>
-          <p:cNvSpPr/>
-          <p:nvPr/>
-        </p:nvSpPr>
-        <p:spPr>
-          <a:xfrm>
-            <a:off x="3214116" y="1417320"/>
-            <a:ext cx="2715768" cy="2468880"/>
-          </a:xfrm>
-          <a:prstGeom prst="rect">
-            <a:avLst/>
-          </a:prstGeom>
-          <a:solidFill>
-            <a:srgbClr val="4D4D4D"/>
-          </a:solidFill>
-          <a:ln/>
-        </p:spPr>
-      </p:sp>
-      <p:sp>
-        <p:nvSpPr>
-          <p:cNvPr id="10" name="Text 7"/>
-          <p:cNvSpPr txBox="1"/>
-          <p:nvPr/>
-        </p:nvSpPr>
-        <p:spPr>
-          <a:xfrm>
-            <a:off x="3351276" y="1508760"/>
-            <a:ext cx="2441448" cy="566928"/>
-          </a:xfrm>
-          <a:prstGeom prst="rect">
-            <a:avLst/>
-          </a:prstGeom>
-          <a:noFill/>
-          <a:ln/>
-        </p:spPr>
-        <p:txBody>
-          <a:bodyPr wrap="square" lIns="0" tIns="0" rIns="0" bIns="0" rtlCol="0" anchor="t"/>
-          <a:lstStyle/>
-          <a:p>
-            <a:pPr algn="l" indent="0" marL="0">
-              <a:lnSpc>
-                <a:spcPct val="115000"/>
-              </a:lnSpc>
-              <a:buNone/>
-            </a:pPr>
-            <a:r>
-              <a:rPr lang="en-US" sz="1800" b="1" dirty="0">
-                <a:solidFill>
-                  <a:srgbClr val="FFFFFF"/>
-                </a:solidFill>
-                <a:latin typeface="Meiryo" pitchFamily="34" charset="0"/>
-                <a:ea typeface="Meiryo" pitchFamily="34" charset="-122"/>
-                <a:cs typeface="Meiryo" pitchFamily="34" charset="-120"/>
-              </a:rPr>
-              <a:t>成長期</a:t>
-            </a:r>
-            <a:endParaRPr lang="en-US" sz="1400" dirty="0"/>
-          </a:p>
-          <a:p>
-            <a:pPr algn="l" indent="0" marL="0">
-              <a:lnSpc>
-                <a:spcPct val="115000"/>
-              </a:lnSpc>
-              <a:buNone/>
-            </a:pPr>
-            <a:r>
-              <a:rPr lang="en-US" sz="950" dirty="0">
-                <a:solidFill>
-                  <a:srgbClr val="FFFFFF"/>
-                </a:solidFill>
-                <a:latin typeface="Meiryo" pitchFamily="34" charset="0"/>
-                <a:ea typeface="Meiryo" pitchFamily="34" charset="-122"/>
-                <a:cs typeface="Meiryo" pitchFamily="34" charset="-120"/>
-              </a:rPr>
-              <a:t>3〜5年目</a:t>
-            </a:r>
-            <a:endParaRPr lang="en-US" sz="1400" dirty="0"/>
-          </a:p>
-        </p:txBody>
-      </p:sp>
-      <p:sp>
-        <p:nvSpPr>
-          <p:cNvPr id="11" name="Text 8"/>
-          <p:cNvSpPr txBox="1"/>
-          <p:nvPr/>
-        </p:nvSpPr>
-        <p:spPr>
-          <a:xfrm>
-            <a:off x="3351276" y="2103120"/>
-            <a:ext cx="2441448" cy="274320"/>
-          </a:xfrm>
-          <a:prstGeom prst="rect">
-            <a:avLst/>
-          </a:prstGeom>
-          <a:noFill/>
-          <a:ln/>
-        </p:spPr>
-        <p:txBody>
-          <a:bodyPr wrap="square" lIns="0" tIns="0" rIns="0" bIns="0" rtlCol="0" anchor="t"/>
-          <a:lstStyle/>
-          <a:p>
-            <a:pPr algn="l" indent="0" marL="0">
-              <a:lnSpc>
-                <a:spcPct val="115000"/>
-              </a:lnSpc>
-              <a:buNone/>
-            </a:pPr>
-            <a:r>
-              <a:rPr lang="en-US" sz="1100" b="1" dirty="0">
-                <a:solidFill>
-                  <a:srgbClr val="FFFFFF"/>
-                </a:solidFill>
-                <a:latin typeface="Meiryo" pitchFamily="34" charset="0"/>
-                <a:ea typeface="Meiryo" pitchFamily="34" charset="-122"/>
-                <a:cs typeface="Meiryo" pitchFamily="34" charset="-120"/>
-              </a:rPr>
-              <a:t>照合して品質を守る</a:t>
-            </a:r>
-            <a:endParaRPr lang="en-US" sz="1100" dirty="0"/>
-          </a:p>
-        </p:txBody>
-      </p:sp>
-      <p:sp>
-        <p:nvSpPr>
-          <p:cNvPr id="12" name="Text 9"/>
-          <p:cNvSpPr txBox="1"/>
-          <p:nvPr/>
-        </p:nvSpPr>
-        <p:spPr>
-          <a:xfrm>
-            <a:off x="3351276" y="2423160"/>
-            <a:ext cx="2441448" cy="1188720"/>
-          </a:xfrm>
-          <a:prstGeom prst="rect">
-            <a:avLst/>
-          </a:prstGeom>
-          <a:noFill/>
-          <a:ln/>
-        </p:spPr>
-        <p:txBody>
-          <a:bodyPr wrap="square" lIns="0" tIns="0" rIns="0" bIns="0" rtlCol="0" anchor="t"/>
-          <a:lstStyle/>
-          <a:p>
-            <a:pPr algn="l" indent="0" marL="0">
-              <a:lnSpc>
-                <a:spcPct val="115000"/>
-              </a:lnSpc>
-              <a:spcAft>
-                <a:spcPts val="400"/>
-              </a:spcAft>
-              <a:buNone/>
-            </a:pPr>
-            <a:r>
-              <a:rPr lang="en-US" sz="950" dirty="0">
-                <a:solidFill>
-                  <a:srgbClr val="FFFFFF"/>
-                </a:solidFill>
-                <a:latin typeface="Meiryo" pitchFamily="34" charset="0"/>
-                <a:ea typeface="Meiryo" pitchFamily="34" charset="-122"/>
-                <a:cs typeface="Meiryo" pitchFamily="34" charset="-120"/>
-              </a:rPr>
-              <a:t>・30→85拠点。大手1社から協力会社へ</a:t>
-            </a:r>
-            <a:endParaRPr lang="en-US" sz="950" dirty="0"/>
-          </a:p>
-          <a:p>
-            <a:pPr algn="l" indent="0" marL="0">
-              <a:lnSpc>
-                <a:spcPct val="115000"/>
-              </a:lnSpc>
-              <a:spcAft>
-                <a:spcPts val="400"/>
-              </a:spcAft>
-              <a:buNone/>
-            </a:pPr>
-            <a:r>
-              <a:rPr lang="en-US" sz="950" dirty="0">
-                <a:solidFill>
-                  <a:srgbClr val="FFFFFF"/>
-                </a:solidFill>
-                <a:latin typeface="Meiryo" pitchFamily="34" charset="0"/>
-                <a:ea typeface="Meiryo" pitchFamily="34" charset="-122"/>
-                <a:cs typeface="Meiryo" pitchFamily="34" charset="-120"/>
-              </a:rPr>
-              <a:t>・4年目に黒字化、5年目 営業利益率24%</a:t>
-            </a:r>
-            <a:endParaRPr lang="en-US" sz="950" dirty="0"/>
-          </a:p>
-          <a:p>
-            <a:pPr algn="l" indent="0" marL="0">
-              <a:lnSpc>
-                <a:spcPct val="115000"/>
-              </a:lnSpc>
-              <a:spcAft>
-                <a:spcPts val="400"/>
-              </a:spcAft>
-              <a:buNone/>
-            </a:pPr>
-            <a:r>
-              <a:rPr lang="en-US" sz="950" dirty="0">
-                <a:solidFill>
-                  <a:srgbClr val="FFFFFF"/>
-                </a:solidFill>
-                <a:latin typeface="Meiryo" pitchFamily="34" charset="0"/>
-                <a:ea typeface="Meiryo" pitchFamily="34" charset="-122"/>
-                <a:cs typeface="Meiryo" pitchFamily="34" charset="-120"/>
-              </a:rPr>
-              <a:t>・資金：自己資金＋予備の資本性ローン</a:t>
-            </a:r>
-            <a:endParaRPr lang="en-US" sz="950" dirty="0"/>
-          </a:p>
-        </p:txBody>
-      </p:sp>
-      <p:sp>
-        <p:nvSpPr>
-          <p:cNvPr id="13" name="life-2"/>
-          <p:cNvSpPr/>
-          <p:nvPr/>
-        </p:nvSpPr>
-        <p:spPr>
-          <a:xfrm>
-            <a:off x="6062472" y="1097280"/>
-            <a:ext cx="2715768" cy="2788920"/>
-          </a:xfrm>
-          <a:prstGeom prst="rect">
-            <a:avLst/>
-          </a:prstGeom>
-          <a:solidFill>
-            <a:srgbClr val="1A1A1A"/>
-          </a:solidFill>
-          <a:ln/>
-        </p:spPr>
-      </p:sp>
-      <p:sp>
-        <p:nvSpPr>
-          <p:cNvPr id="14" name="Text 11"/>
-          <p:cNvSpPr txBox="1"/>
-          <p:nvPr/>
-        </p:nvSpPr>
-        <p:spPr>
-          <a:xfrm>
-            <a:off x="6199632" y="1188720"/>
-            <a:ext cx="2441448" cy="566928"/>
-          </a:xfrm>
-          <a:prstGeom prst="rect">
-            <a:avLst/>
-          </a:prstGeom>
-          <a:noFill/>
-          <a:ln/>
-        </p:spPr>
-        <p:txBody>
-          <a:bodyPr wrap="square" lIns="0" tIns="0" rIns="0" bIns="0" rtlCol="0" anchor="t"/>
-          <a:lstStyle/>
-          <a:p>
-            <a:pPr algn="l" indent="0" marL="0">
-              <a:lnSpc>
-                <a:spcPct val="115000"/>
-              </a:lnSpc>
-              <a:buNone/>
-            </a:pPr>
-            <a:r>
-              <a:rPr lang="en-US" sz="1800" b="1" dirty="0">
-                <a:solidFill>
-                  <a:srgbClr val="FFFFFF"/>
-                </a:solidFill>
-                <a:latin typeface="Meiryo" pitchFamily="34" charset="0"/>
-                <a:ea typeface="Meiryo" pitchFamily="34" charset="-122"/>
-                <a:cs typeface="Meiryo" pitchFamily="34" charset="-120"/>
-              </a:rPr>
-              <a:t>成熟期</a:t>
-            </a:r>
-            <a:endParaRPr lang="en-US" sz="1400" dirty="0"/>
-          </a:p>
-          <a:p>
-            <a:pPr algn="l" indent="0" marL="0">
-              <a:lnSpc>
-                <a:spcPct val="115000"/>
-              </a:lnSpc>
-              <a:buNone/>
-            </a:pPr>
-            <a:r>
-              <a:rPr lang="en-US" sz="950" dirty="0">
-                <a:solidFill>
-                  <a:srgbClr val="FFFFFF"/>
-                </a:solidFill>
-                <a:latin typeface="Meiryo" pitchFamily="34" charset="0"/>
-                <a:ea typeface="Meiryo" pitchFamily="34" charset="-122"/>
-                <a:cs typeface="Meiryo" pitchFamily="34" charset="-120"/>
-              </a:rPr>
-              <a:t>6年目〜</a:t>
-            </a:r>
-            <a:endParaRPr lang="en-US" sz="1400" dirty="0"/>
-          </a:p>
-        </p:txBody>
-      </p:sp>
-      <p:sp>
-        <p:nvSpPr>
-          <p:cNvPr id="15" name="Text 12"/>
-          <p:cNvSpPr txBox="1"/>
-          <p:nvPr/>
-        </p:nvSpPr>
-        <p:spPr>
-          <a:xfrm>
-            <a:off x="6199632" y="1783080"/>
-            <a:ext cx="2441448" cy="274320"/>
-          </a:xfrm>
-          <a:prstGeom prst="rect">
-            <a:avLst/>
-          </a:prstGeom>
-          <a:noFill/>
-          <a:ln/>
-        </p:spPr>
-        <p:txBody>
-          <a:bodyPr wrap="square" lIns="0" tIns="0" rIns="0" bIns="0" rtlCol="0" anchor="t"/>
-          <a:lstStyle/>
-          <a:p>
-            <a:pPr algn="l" indent="0" marL="0">
-              <a:lnSpc>
-                <a:spcPct val="115000"/>
-              </a:lnSpc>
-              <a:buNone/>
-            </a:pPr>
-            <a:r>
-              <a:rPr lang="en-US" sz="1100" b="1" dirty="0">
-                <a:solidFill>
-                  <a:srgbClr val="FFFFFF"/>
-                </a:solidFill>
-                <a:latin typeface="Meiryo" pitchFamily="34" charset="0"/>
-                <a:ea typeface="Meiryo" pitchFamily="34" charset="-122"/>
-                <a:cs typeface="Meiryo" pitchFamily="34" charset="-120"/>
-              </a:rPr>
-              <a:t>作業をAIが学ぶ（フィジカルAI）</a:t>
-            </a:r>
-            <a:endParaRPr lang="en-US" sz="1100" dirty="0"/>
-          </a:p>
-        </p:txBody>
-      </p:sp>
-      <p:sp>
-        <p:nvSpPr>
-          <p:cNvPr id="16" name="Text 13"/>
-          <p:cNvSpPr txBox="1"/>
-          <p:nvPr/>
-        </p:nvSpPr>
-        <p:spPr>
-          <a:xfrm>
-            <a:off x="6199632" y="2103120"/>
-            <a:ext cx="2441448" cy="1188720"/>
-          </a:xfrm>
-          <a:prstGeom prst="rect">
-            <a:avLst/>
-          </a:prstGeom>
-          <a:noFill/>
-          <a:ln/>
-        </p:spPr>
-        <p:txBody>
-          <a:bodyPr wrap="square" lIns="0" tIns="0" rIns="0" bIns="0" rtlCol="0" anchor="t"/>
-          <a:lstStyle/>
-          <a:p>
-            <a:pPr algn="l" indent="0" marL="0">
-              <a:lnSpc>
-                <a:spcPct val="115000"/>
-              </a:lnSpc>
-              <a:spcAft>
-                <a:spcPts val="400"/>
-              </a:spcAft>
-              <a:buNone/>
-            </a:pPr>
-            <a:r>
-              <a:rPr lang="en-US" sz="950" dirty="0">
-                <a:solidFill>
-                  <a:srgbClr val="FFFFFF"/>
-                </a:solidFill>
-                <a:latin typeface="Meiryo" pitchFamily="34" charset="0"/>
-                <a:ea typeface="Meiryo" pitchFamily="34" charset="-122"/>
-                <a:cs typeface="Meiryo" pitchFamily="34" charset="-120"/>
-              </a:rPr>
-              <a:t>・電線・素材の工場へ拡大、海外へ輸出</a:t>
-            </a:r>
-            <a:endParaRPr lang="en-US" sz="950" dirty="0"/>
-          </a:p>
-          <a:p>
-            <a:pPr algn="l" indent="0" marL="0">
-              <a:lnSpc>
-                <a:spcPct val="115000"/>
-              </a:lnSpc>
-              <a:spcAft>
-                <a:spcPts val="400"/>
-              </a:spcAft>
-              <a:buNone/>
-            </a:pPr>
-            <a:r>
-              <a:rPr lang="en-US" sz="950" dirty="0">
-                <a:solidFill>
-                  <a:srgbClr val="FFFFFF"/>
-                </a:solidFill>
-                <a:latin typeface="Meiryo" pitchFamily="34" charset="0"/>
-                <a:ea typeface="Meiryo" pitchFamily="34" charset="-122"/>
-                <a:cs typeface="Meiryo" pitchFamily="34" charset="-120"/>
-              </a:rPr>
-              <a:t>・蓄積した作業データでロボットに教える</a:t>
-            </a:r>
-            <a:endParaRPr lang="en-US" sz="950" dirty="0"/>
-          </a:p>
-          <a:p>
-            <a:pPr algn="l" indent="0" marL="0">
-              <a:lnSpc>
-                <a:spcPct val="115000"/>
-              </a:lnSpc>
-              <a:spcAft>
-                <a:spcPts val="400"/>
-              </a:spcAft>
-              <a:buNone/>
-            </a:pPr>
-            <a:r>
-              <a:rPr lang="en-US" sz="950" dirty="0">
-                <a:solidFill>
-                  <a:srgbClr val="FFFFFF"/>
-                </a:solidFill>
-                <a:latin typeface="Meiryo" pitchFamily="34" charset="0"/>
-                <a:ea typeface="Meiryo" pitchFamily="34" charset="-122"/>
-                <a:cs typeface="Meiryo" pitchFamily="34" charset="-120"/>
-              </a:rPr>
-              <a:t>・上場を目指す（資本市場から調達）</a:t>
-            </a:r>
-            <a:endParaRPr lang="en-US" sz="950" dirty="0"/>
-          </a:p>
-        </p:txBody>
-      </p:sp>
-      <p:sp>
-        <p:nvSpPr>
-          <p:cNvPr id="17" name="Shape 14"/>
-          <p:cNvSpPr/>
-          <p:nvPr/>
-        </p:nvSpPr>
-        <p:spPr>
-          <a:xfrm>
-            <a:off x="365760" y="3977640"/>
-            <a:ext cx="8412480" cy="502920"/>
-          </a:xfrm>
-          <a:prstGeom prst="rect">
-            <a:avLst/>
-          </a:prstGeom>
-          <a:solidFill>
-            <a:srgbClr val="F2F2F2"/>
-          </a:solidFill>
-          <a:ln/>
-        </p:spPr>
-      </p:sp>
-      <p:sp>
-        <p:nvSpPr>
-          <p:cNvPr id="18" name="Text 15"/>
-          <p:cNvSpPr txBox="1"/>
-          <p:nvPr/>
-        </p:nvSpPr>
-        <p:spPr>
-          <a:xfrm>
-            <a:off x="502920" y="3977640"/>
-            <a:ext cx="8138160" cy="502920"/>
-          </a:xfrm>
-          <a:prstGeom prst="rect">
-            <a:avLst/>
-          </a:prstGeom>
-          <a:noFill/>
-          <a:ln/>
-        </p:spPr>
-        <p:txBody>
-          <a:bodyPr wrap="square" lIns="0" tIns="0" rIns="0" bIns="0" rtlCol="0" anchor="ctr"/>
-          <a:lstStyle/>
-          <a:p>
-            <a:pPr algn="l" indent="0" marL="0">
-              <a:lnSpc>
-                <a:spcPct val="115000"/>
-              </a:lnSpc>
-              <a:buNone/>
-            </a:pPr>
-            <a:r>
-              <a:rPr lang="en-US" sz="950" b="1" dirty="0">
-                <a:solidFill>
-                  <a:srgbClr val="1A1A1A"/>
-                </a:solidFill>
-                <a:latin typeface="Meiryo" pitchFamily="34" charset="0"/>
-                <a:ea typeface="Meiryo" pitchFamily="34" charset="-122"/>
-                <a:cs typeface="Meiryo" pitchFamily="34" charset="-120"/>
-              </a:rPr>
-              <a:t>国の方針：</a:t>
-            </a:r>
-            <a:pPr algn="l" indent="0" marL="0">
-              <a:lnSpc>
-                <a:spcPct val="115000"/>
-              </a:lnSpc>
-              <a:buNone/>
-            </a:pPr>
-            <a:r>
-              <a:rPr lang="en-US" sz="950" dirty="0">
-                <a:solidFill>
-                  <a:srgbClr val="1A1A1A"/>
-                </a:solidFill>
-                <a:latin typeface="Meiryo" pitchFamily="34" charset="0"/>
-                <a:ea typeface="Meiryo" pitchFamily="34" charset="-122"/>
-                <a:cs typeface="Meiryo" pitchFamily="34" charset="-120"/>
-              </a:rPr>
-              <a:t>「暗黙知が豊富な現場へのバーティカルAIの開発・実装を推進し、輸出も促進する」─ 内閣府「人工知能基本計画」（令和8年7月14日 閣議決定）</a:t>
-            </a:r>
-            <a:endParaRPr lang="en-US" sz="950" dirty="0"/>
-          </a:p>
-        </p:txBody>
-      </p:sp>
-      <p:sp>
-        <p:nvSpPr>
-          <p:cNvPr id="19" name="Text 16"/>
-          <p:cNvSpPr txBox="1"/>
-          <p:nvPr/>
-        </p:nvSpPr>
-        <p:spPr>
-          <a:xfrm>
-            <a:off x="365760" y="4572000"/>
-            <a:ext cx="8412480" cy="219456"/>
-          </a:xfrm>
-          <a:prstGeom prst="rect">
-            <a:avLst/>
-          </a:prstGeom>
-          <a:noFill/>
-          <a:ln/>
-        </p:spPr>
-        <p:txBody>
-          <a:bodyPr wrap="square" lIns="0" tIns="0" rIns="0" bIns="0" rtlCol="0" anchor="t"/>
-          <a:lstStyle/>
-          <a:p>
-            <a:pPr algn="l" indent="0" marL="0">
-              <a:lnSpc>
-                <a:spcPct val="115000"/>
-              </a:lnSpc>
-              <a:buNone/>
-            </a:pPr>
-            <a:r>
-              <a:rPr lang="en-US" sz="800" dirty="0">
-                <a:solidFill>
-                  <a:srgbClr val="8C8C8C"/>
-                </a:solidFill>
-                <a:latin typeface="Meiryo" pitchFamily="34" charset="0"/>
-                <a:ea typeface="Meiryo" pitchFamily="34" charset="-122"/>
-                <a:cs typeface="Meiryo" pitchFamily="34" charset="-120"/>
-              </a:rPr>
-              <a:t>上場は目標であり、時期・市場は成長期の実績を見て判断する</a:t>
-            </a:r>
-            <a:endParaRPr lang="en-US" sz="800" dirty="0"/>
-          </a:p>
-        </p:txBody>
-      </p:sp>
-      <p:sp>
-        <p:nvSpPr>
-          <p:cNvPr id="25" name="Slide Number Placeholder 0"/>
-          <p:cNvSpPr>
-            <a:spLocks noGrp="1"/>
-          </p:cNvSpPr>
-          <p:nvPr>
-            <p:ph type="sldNum" sz="quarter" idx="4294967295"/>
-          </p:nvPr>
-        </p:nvSpPr>
-        <p:spPr>
-          <a:xfrm>
-            <a:off x="365760" y="4837176"/>
-            <a:ext cx="320040" cy="201168"/>
-          </a:xfrm>
-          <a:prstGeom prst="rect">
-            <a:avLst/>
-          </a:prstGeom>
-          <a:extLst>
-            <a:ext uri="{C572A759-6A51-4108-AA02-DFA0A04FC94B}">
-              <ma14:wrappingTextBoxFlag xmlns:ma14="http://schemas.microsoft.com/office/mac/drawingml/2011/main" val="0"/>
-            </a:ext>
-          </a:extLst>
-        </p:spPr>
-        <p:txBody>
-          <a:bodyPr lIns="0" tIns="0" rIns="0" bIns="0"/>
-          <a:lstStyle>
-            <a:lvl1pPr>
-              <a:defRPr sz="850">
-                <a:solidFill>
-                  <a:srgbClr val="8C8C8C"/>
-                </a:solidFill>
-                <a:latin typeface="Meiryo"/>
-                <a:ea typeface="Meiryo"/>
-                <a:cs typeface="Meiryo"/>
-              </a:defRPr>
-            </a:lvl1pPr>
-          </a:lstStyle>
-          <a:p>
-            <a:pPr algn="l"/>
-            <a:fld id="{F7021451-1387-4CA6-816F-3879F97B5CBC}" type="slidenum">
-              <a:rPr b="0" lang="en-US"/>
               <a:t>22</a:t>
             </a:fld>
             <a:endParaRPr lang="en-US"/>
@@ -29809,7 +32069,7 @@
                 <a:ea typeface="Meiryo" pitchFamily="34" charset="-122"/>
                 <a:cs typeface="Meiryo" pitchFamily="34" charset="-120"/>
               </a:rPr>
-              <a:t>希望金額 500万円 ─ 6か月以内に最初の1拠点を動かす</a:t>
+              <a:t>事業のライフサイクル ─ 成熟期には上場を目指す</a:t>
             </a:r>
             <a:endParaRPr lang="en-US" sz="2000" dirty="0"/>
           </a:p>
@@ -29851,7 +32111,7 @@
                 <a:ea typeface="Meiryo" pitchFamily="34" charset="-122"/>
                 <a:cs typeface="Meiryo" pitchFamily="34" charset="-120"/>
               </a:rPr>
-              <a:t>準備期の資金。創業者の給料はゼロで、すべて試作品と実証に使う</a:t>
+              <a:t>解決策の3段階を、導入期・成長期・成熟期に重ねる</a:t>
             </a:r>
             <a:endParaRPr lang="en-US" sz="1200" dirty="0"/>
           </a:p>
@@ -29859,14 +32119,34 @@
       </p:sp>
       <p:sp>
         <p:nvSpPr>
-          <p:cNvPr id="5" name="Text 2"/>
+          <p:cNvPr id="5" name="life-0"/>
+          <p:cNvSpPr/>
+          <p:nvPr/>
+        </p:nvSpPr>
+        <p:spPr>
+          <a:xfrm>
+            <a:off x="365760" y="1737360"/>
+            <a:ext cx="2715768" cy="2148840"/>
+          </a:xfrm>
+          <a:prstGeom prst="rect">
+            <a:avLst/>
+          </a:prstGeom>
+          <a:solidFill>
+            <a:srgbClr val="F2F2F2"/>
+          </a:solidFill>
+          <a:ln/>
+        </p:spPr>
+      </p:sp>
+      <p:sp>
+        <p:nvSpPr>
+          <p:cNvPr id="6" name="Text 3"/>
           <p:cNvSpPr txBox="1"/>
           <p:nvPr/>
         </p:nvSpPr>
         <p:spPr>
           <a:xfrm>
-            <a:off x="365760" y="1051560"/>
-            <a:ext cx="4023360" cy="237744"/>
+            <a:off x="502920" y="1828800"/>
+            <a:ext cx="2441448" cy="566928"/>
           </a:xfrm>
           <a:prstGeom prst="rect">
             <a:avLst/>
@@ -29885,7 +32165,7 @@
               <a:buNone/>
             </a:pPr>
             <a:r>
-              <a:rPr lang="en-US" sz="1050" b="1" dirty="0">
+              <a:rPr lang="en-US" sz="1800" b="1" dirty="0">
                 <a:solidFill>
                   <a:srgbClr val="1A1A1A"/>
                 </a:solidFill>
@@ -29893,22 +32173,42 @@
                 <a:ea typeface="Meiryo" pitchFamily="34" charset="-122"/>
                 <a:cs typeface="Meiryo" pitchFamily="34" charset="-120"/>
               </a:rPr>
-              <a:t>使い道（万円）</a:t>
-            </a:r>
-            <a:endParaRPr lang="en-US" sz="1050" dirty="0"/>
-          </a:p>
-        </p:txBody>
-      </p:sp>
-      <p:sp>
-        <p:nvSpPr>
-          <p:cNvPr id="6" name="Text 3"/>
+              <a:t>導入期</a:t>
+            </a:r>
+            <a:endParaRPr lang="en-US" sz="1400" dirty="0"/>
+          </a:p>
+          <a:p>
+            <a:pPr algn="l" indent="0" marL="0">
+              <a:lnSpc>
+                <a:spcPct val="115000"/>
+              </a:lnSpc>
+              <a:buNone/>
+            </a:pPr>
+            <a:r>
+              <a:rPr lang="en-US" sz="950" dirty="0">
+                <a:solidFill>
+                  <a:srgbClr val="1A1A1A"/>
+                </a:solidFill>
+                <a:latin typeface="Meiryo" pitchFamily="34" charset="0"/>
+                <a:ea typeface="Meiryo" pitchFamily="34" charset="-122"/>
+                <a:cs typeface="Meiryo" pitchFamily="34" charset="-120"/>
+              </a:rPr>
+              <a:t>準備期〜2年目</a:t>
+            </a:r>
+            <a:endParaRPr lang="en-US" sz="1400" dirty="0"/>
+          </a:p>
+        </p:txBody>
+      </p:sp>
+      <p:sp>
+        <p:nvSpPr>
+          <p:cNvPr id="7" name="Text 4"/>
           <p:cNvSpPr txBox="1"/>
           <p:nvPr/>
         </p:nvSpPr>
         <p:spPr>
           <a:xfrm>
-            <a:off x="365760" y="1344168"/>
-            <a:ext cx="1691640" cy="420624"/>
+            <a:off x="502920" y="2423160"/>
+            <a:ext cx="2441448" cy="274320"/>
           </a:xfrm>
           <a:prstGeom prst="rect">
             <a:avLst/>
@@ -29917,7 +32217,7 @@
           <a:ln/>
         </p:spPr>
         <p:txBody>
-          <a:bodyPr wrap="square" lIns="0" tIns="0" rIns="0" bIns="0" rtlCol="0" anchor="ctr"/>
+          <a:bodyPr wrap="square" lIns="0" tIns="0" rIns="0" bIns="0" rtlCol="0" anchor="t"/>
           <a:lstStyle/>
           <a:p>
             <a:pPr algn="l" indent="0" marL="0">
@@ -29927,7 +32227,7 @@
               <a:buNone/>
             </a:pPr>
             <a:r>
-              <a:rPr lang="en-US" sz="950" b="1" dirty="0">
+              <a:rPr lang="en-US" sz="1100" b="1" dirty="0">
                 <a:solidFill>
                   <a:srgbClr val="1A1A1A"/>
                 </a:solidFill>
@@ -29935,7 +32235,52 @@
                 <a:ea typeface="Meiryo" pitchFamily="34" charset="-122"/>
                 <a:cs typeface="Meiryo" pitchFamily="34" charset="-120"/>
               </a:rPr>
-              <a:t>試作品の開発</a:t>
+              <a:t>記録と報告を自動に</a:t>
+            </a:r>
+            <a:endParaRPr lang="en-US" sz="1100" dirty="0"/>
+          </a:p>
+        </p:txBody>
+      </p:sp>
+      <p:sp>
+        <p:nvSpPr>
+          <p:cNvPr id="8" name="Text 5"/>
+          <p:cNvSpPr txBox="1"/>
+          <p:nvPr/>
+        </p:nvSpPr>
+        <p:spPr>
+          <a:xfrm>
+            <a:off x="502920" y="2743200"/>
+            <a:ext cx="2441448" cy="1188720"/>
+          </a:xfrm>
+          <a:prstGeom prst="rect">
+            <a:avLst/>
+          </a:prstGeom>
+          <a:noFill/>
+          <a:ln/>
+        </p:spPr>
+        <p:txBody>
+          <a:bodyPr wrap="square" lIns="0" tIns="0" rIns="0" bIns="0" rtlCol="0" anchor="t"/>
+          <a:lstStyle/>
+          <a:p>
+            <a:pPr algn="l" indent="0" marL="0">
+              <a:lnSpc>
+                <a:spcPct val="115000"/>
+              </a:lnSpc>
+              <a:spcAft>
+                <a:spcPts val="400"/>
+              </a:spcAft>
+              <a:buNone/>
+            </a:pPr>
+            <a:r>
+              <a:rPr lang="en-US" sz="950" dirty="0">
+                <a:solidFill>
+                  <a:srgbClr val="1A1A1A"/>
+                </a:solidFill>
+                <a:latin typeface="Meiryo" pitchFamily="34" charset="0"/>
+                <a:ea typeface="Meiryo" pitchFamily="34" charset="-122"/>
+                <a:cs typeface="Meiryo" pitchFamily="34" charset="-120"/>
+              </a:rPr>
+              <a:t>・関東の電気工事会社3社で有償試験導入</a:t>
             </a:r>
             <a:endParaRPr lang="en-US" sz="950" dirty="0"/>
           </a:p>
@@ -29944,33 +32289,274 @@
               <a:lnSpc>
                 <a:spcPct val="115000"/>
               </a:lnSpc>
-              <a:buNone/>
-            </a:pPr>
-            <a:r>
-              <a:rPr lang="en-US" sz="800" dirty="0">
-                <a:solidFill>
-                  <a:srgbClr val="4D4D4D"/>
-                </a:solidFill>
-                <a:latin typeface="Meiryo" pitchFamily="34" charset="0"/>
-                <a:ea typeface="Meiryo" pitchFamily="34" charset="-122"/>
-                <a:cs typeface="Meiryo" pitchFamily="34" charset="-120"/>
-              </a:rPr>
-              <a:t>クラウド・生成AI・外注エンジニア</a:t>
+              <a:spcAft>
+                <a:spcPts val="400"/>
+              </a:spcAft>
+              <a:buNone/>
+            </a:pPr>
+            <a:r>
+              <a:rPr lang="en-US" sz="950" dirty="0">
+                <a:solidFill>
+                  <a:srgbClr val="1A1A1A"/>
+                </a:solidFill>
+                <a:latin typeface="Meiryo" pitchFamily="34" charset="0"/>
+                <a:ea typeface="Meiryo" pitchFamily="34" charset="-122"/>
+                <a:cs typeface="Meiryo" pitchFamily="34" charset="-120"/>
+              </a:rPr>
+              <a:t>・赤字。準備期は500万円で試作品と実証</a:t>
             </a:r>
             <a:endParaRPr lang="en-US" sz="950" dirty="0"/>
           </a:p>
-        </p:txBody>
-      </p:sp>
-      <p:sp>
-        <p:nvSpPr>
-          <p:cNvPr id="7" name="Shape 4"/>
+          <a:p>
+            <a:pPr algn="l" indent="0" marL="0">
+              <a:lnSpc>
+                <a:spcPct val="115000"/>
+              </a:lnSpc>
+              <a:spcAft>
+                <a:spcPts val="400"/>
+              </a:spcAft>
+              <a:buNone/>
+            </a:pPr>
+            <a:r>
+              <a:rPr lang="en-US" sz="950" dirty="0">
+                <a:solidFill>
+                  <a:srgbClr val="1A1A1A"/>
+                </a:solidFill>
+                <a:latin typeface="Meiryo" pitchFamily="34" charset="0"/>
+                <a:ea typeface="Meiryo" pitchFamily="34" charset="-122"/>
+                <a:cs typeface="Meiryo" pitchFamily="34" charset="-120"/>
+              </a:rPr>
+              <a:t>・資金：出資・公庫融資・CVC</a:t>
+            </a:r>
+            <a:endParaRPr lang="en-US" sz="950" dirty="0"/>
+          </a:p>
+        </p:txBody>
+      </p:sp>
+      <p:sp>
+        <p:nvSpPr>
+          <p:cNvPr id="9" name="life-1"/>
           <p:cNvSpPr/>
           <p:nvPr/>
         </p:nvSpPr>
         <p:spPr>
           <a:xfrm>
-            <a:off x="2103120" y="1435608"/>
-            <a:ext cx="1737360" cy="237744"/>
+            <a:off x="3214116" y="1417320"/>
+            <a:ext cx="2715768" cy="2468880"/>
+          </a:xfrm>
+          <a:prstGeom prst="rect">
+            <a:avLst/>
+          </a:prstGeom>
+          <a:solidFill>
+            <a:srgbClr val="4D4D4D"/>
+          </a:solidFill>
+          <a:ln/>
+        </p:spPr>
+      </p:sp>
+      <p:sp>
+        <p:nvSpPr>
+          <p:cNvPr id="10" name="Text 7"/>
+          <p:cNvSpPr txBox="1"/>
+          <p:nvPr/>
+        </p:nvSpPr>
+        <p:spPr>
+          <a:xfrm>
+            <a:off x="3351276" y="1508760"/>
+            <a:ext cx="2441448" cy="566928"/>
+          </a:xfrm>
+          <a:prstGeom prst="rect">
+            <a:avLst/>
+          </a:prstGeom>
+          <a:noFill/>
+          <a:ln/>
+        </p:spPr>
+        <p:txBody>
+          <a:bodyPr wrap="square" lIns="0" tIns="0" rIns="0" bIns="0" rtlCol="0" anchor="t"/>
+          <a:lstStyle/>
+          <a:p>
+            <a:pPr algn="l" indent="0" marL="0">
+              <a:lnSpc>
+                <a:spcPct val="115000"/>
+              </a:lnSpc>
+              <a:buNone/>
+            </a:pPr>
+            <a:r>
+              <a:rPr lang="en-US" sz="1800" b="1" dirty="0">
+                <a:solidFill>
+                  <a:srgbClr val="FFFFFF"/>
+                </a:solidFill>
+                <a:latin typeface="Meiryo" pitchFamily="34" charset="0"/>
+                <a:ea typeface="Meiryo" pitchFamily="34" charset="-122"/>
+                <a:cs typeface="Meiryo" pitchFamily="34" charset="-120"/>
+              </a:rPr>
+              <a:t>成長期</a:t>
+            </a:r>
+            <a:endParaRPr lang="en-US" sz="1400" dirty="0"/>
+          </a:p>
+          <a:p>
+            <a:pPr algn="l" indent="0" marL="0">
+              <a:lnSpc>
+                <a:spcPct val="115000"/>
+              </a:lnSpc>
+              <a:buNone/>
+            </a:pPr>
+            <a:r>
+              <a:rPr lang="en-US" sz="950" dirty="0">
+                <a:solidFill>
+                  <a:srgbClr val="FFFFFF"/>
+                </a:solidFill>
+                <a:latin typeface="Meiryo" pitchFamily="34" charset="0"/>
+                <a:ea typeface="Meiryo" pitchFamily="34" charset="-122"/>
+                <a:cs typeface="Meiryo" pitchFamily="34" charset="-120"/>
+              </a:rPr>
+              <a:t>3〜5年目</a:t>
+            </a:r>
+            <a:endParaRPr lang="en-US" sz="1400" dirty="0"/>
+          </a:p>
+        </p:txBody>
+      </p:sp>
+      <p:sp>
+        <p:nvSpPr>
+          <p:cNvPr id="11" name="Text 8"/>
+          <p:cNvSpPr txBox="1"/>
+          <p:nvPr/>
+        </p:nvSpPr>
+        <p:spPr>
+          <a:xfrm>
+            <a:off x="3351276" y="2103120"/>
+            <a:ext cx="2441448" cy="274320"/>
+          </a:xfrm>
+          <a:prstGeom prst="rect">
+            <a:avLst/>
+          </a:prstGeom>
+          <a:noFill/>
+          <a:ln/>
+        </p:spPr>
+        <p:txBody>
+          <a:bodyPr wrap="square" lIns="0" tIns="0" rIns="0" bIns="0" rtlCol="0" anchor="t"/>
+          <a:lstStyle/>
+          <a:p>
+            <a:pPr algn="l" indent="0" marL="0">
+              <a:lnSpc>
+                <a:spcPct val="115000"/>
+              </a:lnSpc>
+              <a:buNone/>
+            </a:pPr>
+            <a:r>
+              <a:rPr lang="en-US" sz="1100" b="1" dirty="0">
+                <a:solidFill>
+                  <a:srgbClr val="FFFFFF"/>
+                </a:solidFill>
+                <a:latin typeface="Meiryo" pitchFamily="34" charset="0"/>
+                <a:ea typeface="Meiryo" pitchFamily="34" charset="-122"/>
+                <a:cs typeface="Meiryo" pitchFamily="34" charset="-120"/>
+              </a:rPr>
+              <a:t>照合して品質を守る</a:t>
+            </a:r>
+            <a:endParaRPr lang="en-US" sz="1100" dirty="0"/>
+          </a:p>
+        </p:txBody>
+      </p:sp>
+      <p:sp>
+        <p:nvSpPr>
+          <p:cNvPr id="12" name="Text 9"/>
+          <p:cNvSpPr txBox="1"/>
+          <p:nvPr/>
+        </p:nvSpPr>
+        <p:spPr>
+          <a:xfrm>
+            <a:off x="3351276" y="2423160"/>
+            <a:ext cx="2441448" cy="1188720"/>
+          </a:xfrm>
+          <a:prstGeom prst="rect">
+            <a:avLst/>
+          </a:prstGeom>
+          <a:noFill/>
+          <a:ln/>
+        </p:spPr>
+        <p:txBody>
+          <a:bodyPr wrap="square" lIns="0" tIns="0" rIns="0" bIns="0" rtlCol="0" anchor="t"/>
+          <a:lstStyle/>
+          <a:p>
+            <a:pPr algn="l" indent="0" marL="0">
+              <a:lnSpc>
+                <a:spcPct val="115000"/>
+              </a:lnSpc>
+              <a:spcAft>
+                <a:spcPts val="400"/>
+              </a:spcAft>
+              <a:buNone/>
+            </a:pPr>
+            <a:r>
+              <a:rPr lang="en-US" sz="950" dirty="0">
+                <a:solidFill>
+                  <a:srgbClr val="FFFFFF"/>
+                </a:solidFill>
+                <a:latin typeface="Meiryo" pitchFamily="34" charset="0"/>
+                <a:ea typeface="Meiryo" pitchFamily="34" charset="-122"/>
+                <a:cs typeface="Meiryo" pitchFamily="34" charset="-120"/>
+              </a:rPr>
+              <a:t>・30→85拠点。大手1社から協力会社へ</a:t>
+            </a:r>
+            <a:endParaRPr lang="en-US" sz="950" dirty="0"/>
+          </a:p>
+          <a:p>
+            <a:pPr algn="l" indent="0" marL="0">
+              <a:lnSpc>
+                <a:spcPct val="115000"/>
+              </a:lnSpc>
+              <a:spcAft>
+                <a:spcPts val="400"/>
+              </a:spcAft>
+              <a:buNone/>
+            </a:pPr>
+            <a:r>
+              <a:rPr lang="en-US" sz="950" dirty="0">
+                <a:solidFill>
+                  <a:srgbClr val="FFFFFF"/>
+                </a:solidFill>
+                <a:latin typeface="Meiryo" pitchFamily="34" charset="0"/>
+                <a:ea typeface="Meiryo" pitchFamily="34" charset="-122"/>
+                <a:cs typeface="Meiryo" pitchFamily="34" charset="-120"/>
+              </a:rPr>
+              <a:t>・4年目に黒字化、5年目 営業利益率21%</a:t>
+            </a:r>
+            <a:endParaRPr lang="en-US" sz="950" dirty="0"/>
+          </a:p>
+          <a:p>
+            <a:pPr algn="l" indent="0" marL="0">
+              <a:lnSpc>
+                <a:spcPct val="115000"/>
+              </a:lnSpc>
+              <a:spcAft>
+                <a:spcPts val="400"/>
+              </a:spcAft>
+              <a:buNone/>
+            </a:pPr>
+            <a:r>
+              <a:rPr lang="en-US" sz="950" dirty="0">
+                <a:solidFill>
+                  <a:srgbClr val="FFFFFF"/>
+                </a:solidFill>
+                <a:latin typeface="Meiryo" pitchFamily="34" charset="0"/>
+                <a:ea typeface="Meiryo" pitchFamily="34" charset="-122"/>
+                <a:cs typeface="Meiryo" pitchFamily="34" charset="-120"/>
+              </a:rPr>
+              <a:t>・資金：自己資金＋予備の資本性ローン</a:t>
+            </a:r>
+            <a:endParaRPr lang="en-US" sz="950" dirty="0"/>
+          </a:p>
+        </p:txBody>
+      </p:sp>
+      <p:sp>
+        <p:nvSpPr>
+          <p:cNvPr id="13" name="life-2"/>
+          <p:cNvSpPr/>
+          <p:nvPr/>
+        </p:nvSpPr>
+        <p:spPr>
+          <a:xfrm>
+            <a:off x="6062472" y="1097280"/>
+            <a:ext cx="2715768" cy="2788920"/>
           </a:xfrm>
           <a:prstGeom prst="rect">
             <a:avLst/>
@@ -29983,14 +32569,229 @@
       </p:sp>
       <p:sp>
         <p:nvSpPr>
-          <p:cNvPr id="8" name="Text 5"/>
+          <p:cNvPr id="14" name="Text 11"/>
           <p:cNvSpPr txBox="1"/>
           <p:nvPr/>
         </p:nvSpPr>
         <p:spPr>
           <a:xfrm>
-            <a:off x="3886200" y="1399032"/>
-            <a:ext cx="457200" cy="310896"/>
+            <a:off x="6199632" y="1188720"/>
+            <a:ext cx="2441448" cy="566928"/>
+          </a:xfrm>
+          <a:prstGeom prst="rect">
+            <a:avLst/>
+          </a:prstGeom>
+          <a:noFill/>
+          <a:ln/>
+        </p:spPr>
+        <p:txBody>
+          <a:bodyPr wrap="square" lIns="0" tIns="0" rIns="0" bIns="0" rtlCol="0" anchor="t"/>
+          <a:lstStyle/>
+          <a:p>
+            <a:pPr algn="l" indent="0" marL="0">
+              <a:lnSpc>
+                <a:spcPct val="115000"/>
+              </a:lnSpc>
+              <a:buNone/>
+            </a:pPr>
+            <a:r>
+              <a:rPr lang="en-US" sz="1800" b="1" dirty="0">
+                <a:solidFill>
+                  <a:srgbClr val="FFFFFF"/>
+                </a:solidFill>
+                <a:latin typeface="Meiryo" pitchFamily="34" charset="0"/>
+                <a:ea typeface="Meiryo" pitchFamily="34" charset="-122"/>
+                <a:cs typeface="Meiryo" pitchFamily="34" charset="-120"/>
+              </a:rPr>
+              <a:t>成熟期</a:t>
+            </a:r>
+            <a:endParaRPr lang="en-US" sz="1400" dirty="0"/>
+          </a:p>
+          <a:p>
+            <a:pPr algn="l" indent="0" marL="0">
+              <a:lnSpc>
+                <a:spcPct val="115000"/>
+              </a:lnSpc>
+              <a:buNone/>
+            </a:pPr>
+            <a:r>
+              <a:rPr lang="en-US" sz="950" dirty="0">
+                <a:solidFill>
+                  <a:srgbClr val="FFFFFF"/>
+                </a:solidFill>
+                <a:latin typeface="Meiryo" pitchFamily="34" charset="0"/>
+                <a:ea typeface="Meiryo" pitchFamily="34" charset="-122"/>
+                <a:cs typeface="Meiryo" pitchFamily="34" charset="-120"/>
+              </a:rPr>
+              <a:t>6年目〜</a:t>
+            </a:r>
+            <a:endParaRPr lang="en-US" sz="1400" dirty="0"/>
+          </a:p>
+        </p:txBody>
+      </p:sp>
+      <p:sp>
+        <p:nvSpPr>
+          <p:cNvPr id="15" name="Text 12"/>
+          <p:cNvSpPr txBox="1"/>
+          <p:nvPr/>
+        </p:nvSpPr>
+        <p:spPr>
+          <a:xfrm>
+            <a:off x="6199632" y="1783080"/>
+            <a:ext cx="2441448" cy="274320"/>
+          </a:xfrm>
+          <a:prstGeom prst="rect">
+            <a:avLst/>
+          </a:prstGeom>
+          <a:noFill/>
+          <a:ln/>
+        </p:spPr>
+        <p:txBody>
+          <a:bodyPr wrap="square" lIns="0" tIns="0" rIns="0" bIns="0" rtlCol="0" anchor="t"/>
+          <a:lstStyle/>
+          <a:p>
+            <a:pPr algn="l" indent="0" marL="0">
+              <a:lnSpc>
+                <a:spcPct val="115000"/>
+              </a:lnSpc>
+              <a:buNone/>
+            </a:pPr>
+            <a:r>
+              <a:rPr lang="en-US" sz="1100" b="1" dirty="0">
+                <a:solidFill>
+                  <a:srgbClr val="FFFFFF"/>
+                </a:solidFill>
+                <a:latin typeface="Meiryo" pitchFamily="34" charset="0"/>
+                <a:ea typeface="Meiryo" pitchFamily="34" charset="-122"/>
+                <a:cs typeface="Meiryo" pitchFamily="34" charset="-120"/>
+              </a:rPr>
+              <a:t>作業をAIが学ぶ（フィジカルAI）</a:t>
+            </a:r>
+            <a:endParaRPr lang="en-US" sz="1100" dirty="0"/>
+          </a:p>
+        </p:txBody>
+      </p:sp>
+      <p:sp>
+        <p:nvSpPr>
+          <p:cNvPr id="16" name="Text 13"/>
+          <p:cNvSpPr txBox="1"/>
+          <p:nvPr/>
+        </p:nvSpPr>
+        <p:spPr>
+          <a:xfrm>
+            <a:off x="6199632" y="2103120"/>
+            <a:ext cx="2441448" cy="1188720"/>
+          </a:xfrm>
+          <a:prstGeom prst="rect">
+            <a:avLst/>
+          </a:prstGeom>
+          <a:noFill/>
+          <a:ln/>
+        </p:spPr>
+        <p:txBody>
+          <a:bodyPr wrap="square" lIns="0" tIns="0" rIns="0" bIns="0" rtlCol="0" anchor="t"/>
+          <a:lstStyle/>
+          <a:p>
+            <a:pPr algn="l" indent="0" marL="0">
+              <a:lnSpc>
+                <a:spcPct val="115000"/>
+              </a:lnSpc>
+              <a:spcAft>
+                <a:spcPts val="400"/>
+              </a:spcAft>
+              <a:buNone/>
+            </a:pPr>
+            <a:r>
+              <a:rPr lang="en-US" sz="950" dirty="0">
+                <a:solidFill>
+                  <a:srgbClr val="FFFFFF"/>
+                </a:solidFill>
+                <a:latin typeface="Meiryo" pitchFamily="34" charset="0"/>
+                <a:ea typeface="Meiryo" pitchFamily="34" charset="-122"/>
+                <a:cs typeface="Meiryo" pitchFamily="34" charset="-120"/>
+              </a:rPr>
+              <a:t>・電線・素材の工場へ拡大、海外へ輸出</a:t>
+            </a:r>
+            <a:endParaRPr lang="en-US" sz="950" dirty="0"/>
+          </a:p>
+          <a:p>
+            <a:pPr algn="l" indent="0" marL="0">
+              <a:lnSpc>
+                <a:spcPct val="115000"/>
+              </a:lnSpc>
+              <a:spcAft>
+                <a:spcPts val="400"/>
+              </a:spcAft>
+              <a:buNone/>
+            </a:pPr>
+            <a:r>
+              <a:rPr lang="en-US" sz="950" dirty="0">
+                <a:solidFill>
+                  <a:srgbClr val="FFFFFF"/>
+                </a:solidFill>
+                <a:latin typeface="Meiryo" pitchFamily="34" charset="0"/>
+                <a:ea typeface="Meiryo" pitchFamily="34" charset="-122"/>
+                <a:cs typeface="Meiryo" pitchFamily="34" charset="-120"/>
+              </a:rPr>
+              <a:t>・蓄積した作業データでロボットに教える</a:t>
+            </a:r>
+            <a:endParaRPr lang="en-US" sz="950" dirty="0"/>
+          </a:p>
+          <a:p>
+            <a:pPr algn="l" indent="0" marL="0">
+              <a:lnSpc>
+                <a:spcPct val="115000"/>
+              </a:lnSpc>
+              <a:spcAft>
+                <a:spcPts val="400"/>
+              </a:spcAft>
+              <a:buNone/>
+            </a:pPr>
+            <a:r>
+              <a:rPr lang="en-US" sz="950" dirty="0">
+                <a:solidFill>
+                  <a:srgbClr val="FFFFFF"/>
+                </a:solidFill>
+                <a:latin typeface="Meiryo" pitchFamily="34" charset="0"/>
+                <a:ea typeface="Meiryo" pitchFamily="34" charset="-122"/>
+                <a:cs typeface="Meiryo" pitchFamily="34" charset="-120"/>
+              </a:rPr>
+              <a:t>・上場を目指す（資本市場から調達）</a:t>
+            </a:r>
+            <a:endParaRPr lang="en-US" sz="950" dirty="0"/>
+          </a:p>
+        </p:txBody>
+      </p:sp>
+      <p:sp>
+        <p:nvSpPr>
+          <p:cNvPr id="17" name="Shape 14"/>
+          <p:cNvSpPr/>
+          <p:nvPr/>
+        </p:nvSpPr>
+        <p:spPr>
+          <a:xfrm>
+            <a:off x="365760" y="3977640"/>
+            <a:ext cx="8412480" cy="502920"/>
+          </a:xfrm>
+          <a:prstGeom prst="rect">
+            <a:avLst/>
+          </a:prstGeom>
+          <a:solidFill>
+            <a:srgbClr val="F2F2F2"/>
+          </a:solidFill>
+          <a:ln/>
+        </p:spPr>
+      </p:sp>
+      <p:sp>
+        <p:nvSpPr>
+          <p:cNvPr id="18" name="Text 15"/>
+          <p:cNvSpPr txBox="1"/>
+          <p:nvPr/>
+        </p:nvSpPr>
+        <p:spPr>
+          <a:xfrm>
+            <a:off x="502920" y="3977640"/>
+            <a:ext cx="8138160" cy="502920"/>
           </a:xfrm>
           <a:prstGeom prst="rect">
             <a:avLst/>
@@ -30009,7 +32810,7 @@
               <a:buNone/>
             </a:pPr>
             <a:r>
-              <a:rPr lang="en-US" sz="1100" b="1" dirty="0">
+              <a:rPr lang="en-US" sz="950" b="1" dirty="0">
                 <a:solidFill>
                   <a:srgbClr val="1A1A1A"/>
                 </a:solidFill>
@@ -30017,507 +32818,39 @@
                 <a:ea typeface="Meiryo" pitchFamily="34" charset="-122"/>
                 <a:cs typeface="Meiryo" pitchFamily="34" charset="-120"/>
               </a:rPr>
-              <a:t>250</a:t>
-            </a:r>
-            <a:endParaRPr lang="en-US" sz="1100" dirty="0"/>
-          </a:p>
-        </p:txBody>
-      </p:sp>
-      <p:sp>
-        <p:nvSpPr>
-          <p:cNvPr id="9" name="Text 6"/>
+              <a:t>国の方針：</a:t>
+            </a:r>
+            <a:pPr algn="l" indent="0" marL="0">
+              <a:lnSpc>
+                <a:spcPct val="115000"/>
+              </a:lnSpc>
+              <a:buNone/>
+            </a:pPr>
+            <a:r>
+              <a:rPr lang="en-US" sz="950" dirty="0">
+                <a:solidFill>
+                  <a:srgbClr val="1A1A1A"/>
+                </a:solidFill>
+                <a:latin typeface="Meiryo" pitchFamily="34" charset="0"/>
+                <a:ea typeface="Meiryo" pitchFamily="34" charset="-122"/>
+                <a:cs typeface="Meiryo" pitchFamily="34" charset="-120"/>
+              </a:rPr>
+              <a:t>「暗黙知が豊富な現場へのバーティカルAIの開発・実装を推進し、輸出も促進する」─ 内閣府「人工知能基本計画」（令和8年7月14日 閣議決定）</a:t>
+            </a:r>
+            <a:endParaRPr lang="en-US" sz="950" dirty="0"/>
+          </a:p>
+        </p:txBody>
+      </p:sp>
+      <p:sp>
+        <p:nvSpPr>
+          <p:cNvPr id="19" name="Text 16"/>
           <p:cNvSpPr txBox="1"/>
           <p:nvPr/>
         </p:nvSpPr>
         <p:spPr>
           <a:xfrm>
-            <a:off x="365760" y="1801368"/>
-            <a:ext cx="1691640" cy="420624"/>
-          </a:xfrm>
-          <a:prstGeom prst="rect">
-            <a:avLst/>
-          </a:prstGeom>
-          <a:noFill/>
-          <a:ln/>
-        </p:spPr>
-        <p:txBody>
-          <a:bodyPr wrap="square" lIns="0" tIns="0" rIns="0" bIns="0" rtlCol="0" anchor="ctr"/>
-          <a:lstStyle/>
-          <a:p>
-            <a:pPr algn="l" indent="0" marL="0">
-              <a:lnSpc>
-                <a:spcPct val="115000"/>
-              </a:lnSpc>
-              <a:buNone/>
-            </a:pPr>
-            <a:r>
-              <a:rPr lang="en-US" sz="950" b="1" dirty="0">
-                <a:solidFill>
-                  <a:srgbClr val="1A1A1A"/>
-                </a:solidFill>
-                <a:latin typeface="Meiryo" pitchFamily="34" charset="0"/>
-                <a:ea typeface="Meiryo" pitchFamily="34" charset="-122"/>
-                <a:cs typeface="Meiryo" pitchFamily="34" charset="-120"/>
-              </a:rPr>
-              <a:t>端末・機材</a:t>
-            </a:r>
-            <a:endParaRPr lang="en-US" sz="950" dirty="0"/>
-          </a:p>
-          <a:p>
-            <a:pPr algn="l" indent="0" marL="0">
-              <a:lnSpc>
-                <a:spcPct val="115000"/>
-              </a:lnSpc>
-              <a:buNone/>
-            </a:pPr>
-            <a:r>
-              <a:rPr lang="en-US" sz="800" dirty="0">
-                <a:solidFill>
-                  <a:srgbClr val="4D4D4D"/>
-                </a:solidFill>
-                <a:latin typeface="Meiryo" pitchFamily="34" charset="0"/>
-                <a:ea typeface="Meiryo" pitchFamily="34" charset="-122"/>
-                <a:cs typeface="Meiryo" pitchFamily="34" charset="-120"/>
-              </a:rPr>
-              <a:t>スマートグラス・ヘルメットカメラ 数台</a:t>
-            </a:r>
-            <a:endParaRPr lang="en-US" sz="950" dirty="0"/>
-          </a:p>
-        </p:txBody>
-      </p:sp>
-      <p:sp>
-        <p:nvSpPr>
-          <p:cNvPr id="10" name="Shape 7"/>
-          <p:cNvSpPr/>
-          <p:nvPr/>
-        </p:nvSpPr>
-        <p:spPr>
-          <a:xfrm>
-            <a:off x="2103120" y="1892808"/>
-            <a:ext cx="555955" cy="237744"/>
-          </a:xfrm>
-          <a:prstGeom prst="rect">
-            <a:avLst/>
-          </a:prstGeom>
-          <a:solidFill>
-            <a:srgbClr val="1A1A1A"/>
-          </a:solidFill>
-          <a:ln/>
-        </p:spPr>
-      </p:sp>
-      <p:sp>
-        <p:nvSpPr>
-          <p:cNvPr id="11" name="Text 8"/>
-          <p:cNvSpPr txBox="1"/>
-          <p:nvPr/>
-        </p:nvSpPr>
-        <p:spPr>
-          <a:xfrm>
-            <a:off x="2704795" y="1856232"/>
-            <a:ext cx="457200" cy="310896"/>
-          </a:xfrm>
-          <a:prstGeom prst="rect">
-            <a:avLst/>
-          </a:prstGeom>
-          <a:noFill/>
-          <a:ln/>
-        </p:spPr>
-        <p:txBody>
-          <a:bodyPr wrap="square" lIns="0" tIns="0" rIns="0" bIns="0" rtlCol="0" anchor="ctr"/>
-          <a:lstStyle/>
-          <a:p>
-            <a:pPr algn="l" indent="0" marL="0">
-              <a:lnSpc>
-                <a:spcPct val="115000"/>
-              </a:lnSpc>
-              <a:buNone/>
-            </a:pPr>
-            <a:r>
-              <a:rPr lang="en-US" sz="1100" b="1" dirty="0">
-                <a:solidFill>
-                  <a:srgbClr val="1A1A1A"/>
-                </a:solidFill>
-                <a:latin typeface="Meiryo" pitchFamily="34" charset="0"/>
-                <a:ea typeface="Meiryo" pitchFamily="34" charset="-122"/>
-                <a:cs typeface="Meiryo" pitchFamily="34" charset="-120"/>
-              </a:rPr>
-              <a:t>80</a:t>
-            </a:r>
-            <a:endParaRPr lang="en-US" sz="1100" dirty="0"/>
-          </a:p>
-        </p:txBody>
-      </p:sp>
-      <p:sp>
-        <p:nvSpPr>
-          <p:cNvPr id="12" name="Text 9"/>
-          <p:cNvSpPr txBox="1"/>
-          <p:nvPr/>
-        </p:nvSpPr>
-        <p:spPr>
-          <a:xfrm>
-            <a:off x="365760" y="2258568"/>
-            <a:ext cx="1691640" cy="420624"/>
-          </a:xfrm>
-          <a:prstGeom prst="rect">
-            <a:avLst/>
-          </a:prstGeom>
-          <a:noFill/>
-          <a:ln/>
-        </p:spPr>
-        <p:txBody>
-          <a:bodyPr wrap="square" lIns="0" tIns="0" rIns="0" bIns="0" rtlCol="0" anchor="ctr"/>
-          <a:lstStyle/>
-          <a:p>
-            <a:pPr algn="l" indent="0" marL="0">
-              <a:lnSpc>
-                <a:spcPct val="115000"/>
-              </a:lnSpc>
-              <a:buNone/>
-            </a:pPr>
-            <a:r>
-              <a:rPr lang="en-US" sz="950" b="1" dirty="0">
-                <a:solidFill>
-                  <a:srgbClr val="1A1A1A"/>
-                </a:solidFill>
-                <a:latin typeface="Meiryo" pitchFamily="34" charset="0"/>
-                <a:ea typeface="Meiryo" pitchFamily="34" charset="-122"/>
-                <a:cs typeface="Meiryo" pitchFamily="34" charset="-120"/>
-              </a:rPr>
-              <a:t>1拠点での実証</a:t>
-            </a:r>
-            <a:endParaRPr lang="en-US" sz="950" dirty="0"/>
-          </a:p>
-          <a:p>
-            <a:pPr algn="l" indent="0" marL="0">
-              <a:lnSpc>
-                <a:spcPct val="115000"/>
-              </a:lnSpc>
-              <a:buNone/>
-            </a:pPr>
-            <a:r>
-              <a:rPr lang="en-US" sz="800" dirty="0">
-                <a:solidFill>
-                  <a:srgbClr val="4D4D4D"/>
-                </a:solidFill>
-                <a:latin typeface="Meiryo" pitchFamily="34" charset="0"/>
-                <a:ea typeface="Meiryo" pitchFamily="34" charset="-122"/>
-                <a:cs typeface="Meiryo" pitchFamily="34" charset="-120"/>
-              </a:rPr>
-              <a:t>3か月の交通・設置・現場研修</a:t>
-            </a:r>
-            <a:endParaRPr lang="en-US" sz="950" dirty="0"/>
-          </a:p>
-        </p:txBody>
-      </p:sp>
-      <p:sp>
-        <p:nvSpPr>
-          <p:cNvPr id="13" name="Shape 10"/>
-          <p:cNvSpPr/>
-          <p:nvPr/>
-        </p:nvSpPr>
-        <p:spPr>
-          <a:xfrm>
-            <a:off x="2103120" y="2350008"/>
-            <a:ext cx="694944" cy="237744"/>
-          </a:xfrm>
-          <a:prstGeom prst="rect">
-            <a:avLst/>
-          </a:prstGeom>
-          <a:solidFill>
-            <a:srgbClr val="1A1A1A"/>
-          </a:solidFill>
-          <a:ln/>
-        </p:spPr>
-      </p:sp>
-      <p:sp>
-        <p:nvSpPr>
-          <p:cNvPr id="14" name="Text 11"/>
-          <p:cNvSpPr txBox="1"/>
-          <p:nvPr/>
-        </p:nvSpPr>
-        <p:spPr>
-          <a:xfrm>
-            <a:off x="2843784" y="2313432"/>
-            <a:ext cx="457200" cy="310896"/>
-          </a:xfrm>
-          <a:prstGeom prst="rect">
-            <a:avLst/>
-          </a:prstGeom>
-          <a:noFill/>
-          <a:ln/>
-        </p:spPr>
-        <p:txBody>
-          <a:bodyPr wrap="square" lIns="0" tIns="0" rIns="0" bIns="0" rtlCol="0" anchor="ctr"/>
-          <a:lstStyle/>
-          <a:p>
-            <a:pPr algn="l" indent="0" marL="0">
-              <a:lnSpc>
-                <a:spcPct val="115000"/>
-              </a:lnSpc>
-              <a:buNone/>
-            </a:pPr>
-            <a:r>
-              <a:rPr lang="en-US" sz="1100" b="1" dirty="0">
-                <a:solidFill>
-                  <a:srgbClr val="1A1A1A"/>
-                </a:solidFill>
-                <a:latin typeface="Meiryo" pitchFamily="34" charset="0"/>
-                <a:ea typeface="Meiryo" pitchFamily="34" charset="-122"/>
-                <a:cs typeface="Meiryo" pitchFamily="34" charset="-120"/>
-              </a:rPr>
-              <a:t>100</a:t>
-            </a:r>
-            <a:endParaRPr lang="en-US" sz="1100" dirty="0"/>
-          </a:p>
-        </p:txBody>
-      </p:sp>
-      <p:sp>
-        <p:nvSpPr>
-          <p:cNvPr id="15" name="Text 12"/>
-          <p:cNvSpPr txBox="1"/>
-          <p:nvPr/>
-        </p:nvSpPr>
-        <p:spPr>
-          <a:xfrm>
-            <a:off x="365760" y="2715768"/>
-            <a:ext cx="1691640" cy="420624"/>
-          </a:xfrm>
-          <a:prstGeom prst="rect">
-            <a:avLst/>
-          </a:prstGeom>
-          <a:noFill/>
-          <a:ln/>
-        </p:spPr>
-        <p:txBody>
-          <a:bodyPr wrap="square" lIns="0" tIns="0" rIns="0" bIns="0" rtlCol="0" anchor="ctr"/>
-          <a:lstStyle/>
-          <a:p>
-            <a:pPr algn="l" indent="0" marL="0">
-              <a:lnSpc>
-                <a:spcPct val="115000"/>
-              </a:lnSpc>
-              <a:buNone/>
-            </a:pPr>
-            <a:r>
-              <a:rPr lang="en-US" sz="950" b="1" dirty="0">
-                <a:solidFill>
-                  <a:srgbClr val="1A1A1A"/>
-                </a:solidFill>
-                <a:latin typeface="Meiryo" pitchFamily="34" charset="0"/>
-                <a:ea typeface="Meiryo" pitchFamily="34" charset="-122"/>
-                <a:cs typeface="Meiryo" pitchFamily="34" charset="-120"/>
-              </a:rPr>
-              <a:t>設立・契約・知財</a:t>
-            </a:r>
-            <a:endParaRPr lang="en-US" sz="950" dirty="0"/>
-          </a:p>
-          <a:p>
-            <a:pPr algn="l" indent="0" marL="0">
-              <a:lnSpc>
-                <a:spcPct val="115000"/>
-              </a:lnSpc>
-              <a:buNone/>
-            </a:pPr>
-            <a:r>
-              <a:rPr lang="en-US" sz="800" dirty="0">
-                <a:solidFill>
-                  <a:srgbClr val="4D4D4D"/>
-                </a:solidFill>
-                <a:latin typeface="Meiryo" pitchFamily="34" charset="0"/>
-                <a:ea typeface="Meiryo" pitchFamily="34" charset="-122"/>
-                <a:cs typeface="Meiryo" pitchFamily="34" charset="-120"/>
-              </a:rPr>
-              <a:t>法人設立、秘密保持・データ利用契約</a:t>
-            </a:r>
-            <a:endParaRPr lang="en-US" sz="950" dirty="0"/>
-          </a:p>
-        </p:txBody>
-      </p:sp>
-      <p:sp>
-        <p:nvSpPr>
-          <p:cNvPr id="16" name="Shape 13"/>
-          <p:cNvSpPr/>
-          <p:nvPr/>
-        </p:nvSpPr>
-        <p:spPr>
-          <a:xfrm>
-            <a:off x="2103120" y="2807208"/>
-            <a:ext cx="277978" cy="237744"/>
-          </a:xfrm>
-          <a:prstGeom prst="rect">
-            <a:avLst/>
-          </a:prstGeom>
-          <a:solidFill>
-            <a:srgbClr val="1A1A1A"/>
-          </a:solidFill>
-          <a:ln/>
-        </p:spPr>
-      </p:sp>
-      <p:sp>
-        <p:nvSpPr>
-          <p:cNvPr id="17" name="Text 14"/>
-          <p:cNvSpPr txBox="1"/>
-          <p:nvPr/>
-        </p:nvSpPr>
-        <p:spPr>
-          <a:xfrm>
-            <a:off x="2426818" y="2770632"/>
-            <a:ext cx="457200" cy="310896"/>
-          </a:xfrm>
-          <a:prstGeom prst="rect">
-            <a:avLst/>
-          </a:prstGeom>
-          <a:noFill/>
-          <a:ln/>
-        </p:spPr>
-        <p:txBody>
-          <a:bodyPr wrap="square" lIns="0" tIns="0" rIns="0" bIns="0" rtlCol="0" anchor="ctr"/>
-          <a:lstStyle/>
-          <a:p>
-            <a:pPr algn="l" indent="0" marL="0">
-              <a:lnSpc>
-                <a:spcPct val="115000"/>
-              </a:lnSpc>
-              <a:buNone/>
-            </a:pPr>
-            <a:r>
-              <a:rPr lang="en-US" sz="1100" b="1" dirty="0">
-                <a:solidFill>
-                  <a:srgbClr val="1A1A1A"/>
-                </a:solidFill>
-                <a:latin typeface="Meiryo" pitchFamily="34" charset="0"/>
-                <a:ea typeface="Meiryo" pitchFamily="34" charset="-122"/>
-                <a:cs typeface="Meiryo" pitchFamily="34" charset="-120"/>
-              </a:rPr>
-              <a:t>40</a:t>
-            </a:r>
-            <a:endParaRPr lang="en-US" sz="1100" dirty="0"/>
-          </a:p>
-        </p:txBody>
-      </p:sp>
-      <p:sp>
-        <p:nvSpPr>
-          <p:cNvPr id="18" name="Text 15"/>
-          <p:cNvSpPr txBox="1"/>
-          <p:nvPr/>
-        </p:nvSpPr>
-        <p:spPr>
-          <a:xfrm>
-            <a:off x="365760" y="3172968"/>
-            <a:ext cx="1691640" cy="420624"/>
-          </a:xfrm>
-          <a:prstGeom prst="rect">
-            <a:avLst/>
-          </a:prstGeom>
-          <a:noFill/>
-          <a:ln/>
-        </p:spPr>
-        <p:txBody>
-          <a:bodyPr wrap="square" lIns="0" tIns="0" rIns="0" bIns="0" rtlCol="0" anchor="ctr"/>
-          <a:lstStyle/>
-          <a:p>
-            <a:pPr algn="l" indent="0" marL="0">
-              <a:lnSpc>
-                <a:spcPct val="115000"/>
-              </a:lnSpc>
-              <a:buNone/>
-            </a:pPr>
-            <a:r>
-              <a:rPr lang="en-US" sz="950" b="1" dirty="0">
-                <a:solidFill>
-                  <a:srgbClr val="1A1A1A"/>
-                </a:solidFill>
-                <a:latin typeface="Meiryo" pitchFamily="34" charset="0"/>
-                <a:ea typeface="Meiryo" pitchFamily="34" charset="-122"/>
-                <a:cs typeface="Meiryo" pitchFamily="34" charset="-120"/>
-              </a:rPr>
-              <a:t>予備</a:t>
-            </a:r>
-            <a:endParaRPr lang="en-US" sz="950" dirty="0"/>
-          </a:p>
-          <a:p>
-            <a:pPr algn="l" indent="0" marL="0">
-              <a:lnSpc>
-                <a:spcPct val="115000"/>
-              </a:lnSpc>
-              <a:buNone/>
-            </a:pPr>
-            <a:endParaRPr lang="en-US" sz="950" dirty="0"/>
-          </a:p>
-        </p:txBody>
-      </p:sp>
-      <p:sp>
-        <p:nvSpPr>
-          <p:cNvPr id="19" name="Shape 16"/>
-          <p:cNvSpPr/>
-          <p:nvPr/>
-        </p:nvSpPr>
-        <p:spPr>
-          <a:xfrm>
-            <a:off x="2103120" y="3264408"/>
-            <a:ext cx="208483" cy="237744"/>
-          </a:xfrm>
-          <a:prstGeom prst="rect">
-            <a:avLst/>
-          </a:prstGeom>
-          <a:solidFill>
-            <a:srgbClr val="8C8C8C"/>
-          </a:solidFill>
-          <a:ln/>
-        </p:spPr>
-      </p:sp>
-      <p:sp>
-        <p:nvSpPr>
-          <p:cNvPr id="20" name="Text 17"/>
-          <p:cNvSpPr txBox="1"/>
-          <p:nvPr/>
-        </p:nvSpPr>
-        <p:spPr>
-          <a:xfrm>
-            <a:off x="2357323" y="3227832"/>
-            <a:ext cx="457200" cy="310896"/>
-          </a:xfrm>
-          <a:prstGeom prst="rect">
-            <a:avLst/>
-          </a:prstGeom>
-          <a:noFill/>
-          <a:ln/>
-        </p:spPr>
-        <p:txBody>
-          <a:bodyPr wrap="square" lIns="0" tIns="0" rIns="0" bIns="0" rtlCol="0" anchor="ctr"/>
-          <a:lstStyle/>
-          <a:p>
-            <a:pPr algn="l" indent="0" marL="0">
-              <a:lnSpc>
-                <a:spcPct val="115000"/>
-              </a:lnSpc>
-              <a:buNone/>
-            </a:pPr>
-            <a:r>
-              <a:rPr lang="en-US" sz="1100" b="1" dirty="0">
-                <a:solidFill>
-                  <a:srgbClr val="1A1A1A"/>
-                </a:solidFill>
-                <a:latin typeface="Meiryo" pitchFamily="34" charset="0"/>
-                <a:ea typeface="Meiryo" pitchFamily="34" charset="-122"/>
-                <a:cs typeface="Meiryo" pitchFamily="34" charset="-120"/>
-              </a:rPr>
-              <a:t>30</a:t>
-            </a:r>
-            <a:endParaRPr lang="en-US" sz="1100" dirty="0"/>
-          </a:p>
-        </p:txBody>
-      </p:sp>
-      <p:sp>
-        <p:nvSpPr>
-          <p:cNvPr id="21" name="Text 18"/>
-          <p:cNvSpPr txBox="1"/>
-          <p:nvPr/>
-        </p:nvSpPr>
-        <p:spPr>
-          <a:xfrm>
-            <a:off x="365760" y="3657600"/>
-            <a:ext cx="4023360" cy="274320"/>
+            <a:off x="365760" y="4572000"/>
+            <a:ext cx="8412480" cy="219456"/>
           </a:xfrm>
           <a:prstGeom prst="rect">
             <a:avLst/>
@@ -30536,620 +32869,6 @@
               <a:buNone/>
             </a:pPr>
             <a:r>
-              <a:rPr lang="en-US" sz="1200" b="1" dirty="0">
-                <a:solidFill>
-                  <a:srgbClr val="1A1A1A"/>
-                </a:solidFill>
-                <a:latin typeface="Meiryo" pitchFamily="34" charset="0"/>
-                <a:ea typeface="Meiryo" pitchFamily="34" charset="-122"/>
-                <a:cs typeface="Meiryo" pitchFamily="34" charset="-120"/>
-              </a:rPr>
-              <a:t>合計 500万円</a:t>
-            </a:r>
-            <a:endParaRPr lang="en-US" sz="1200" dirty="0"/>
-          </a:p>
-        </p:txBody>
-      </p:sp>
-      <p:sp>
-        <p:nvSpPr>
-          <p:cNvPr id="22" name="Text 19"/>
-          <p:cNvSpPr txBox="1"/>
-          <p:nvPr/>
-        </p:nvSpPr>
-        <p:spPr>
-          <a:xfrm>
-            <a:off x="4617720" y="1051560"/>
-            <a:ext cx="4160520" cy="237744"/>
-          </a:xfrm>
-          <a:prstGeom prst="rect">
-            <a:avLst/>
-          </a:prstGeom>
-          <a:noFill/>
-          <a:ln/>
-        </p:spPr>
-        <p:txBody>
-          <a:bodyPr wrap="square" lIns="0" tIns="0" rIns="0" bIns="0" rtlCol="0" anchor="t"/>
-          <a:lstStyle/>
-          <a:p>
-            <a:pPr algn="l" indent="0" marL="0">
-              <a:lnSpc>
-                <a:spcPct val="115000"/>
-              </a:lnSpc>
-              <a:buNone/>
-            </a:pPr>
-            <a:r>
-              <a:rPr lang="en-US" sz="1050" b="1" dirty="0">
-                <a:solidFill>
-                  <a:srgbClr val="1A1A1A"/>
-                </a:solidFill>
-                <a:latin typeface="Meiryo" pitchFamily="34" charset="0"/>
-                <a:ea typeface="Meiryo" pitchFamily="34" charset="-122"/>
-                <a:cs typeface="Meiryo" pitchFamily="34" charset="-120"/>
-              </a:rPr>
-              <a:t>マイルストーン</a:t>
-            </a:r>
-            <a:endParaRPr lang="en-US" sz="1050" dirty="0"/>
-          </a:p>
-        </p:txBody>
-      </p:sp>
-      <p:sp>
-        <p:nvSpPr>
-          <p:cNvPr id="23" name="Shape 20"/>
-          <p:cNvSpPr/>
-          <p:nvPr/>
-        </p:nvSpPr>
-        <p:spPr>
-          <a:xfrm>
-            <a:off x="4617720" y="1399032"/>
-            <a:ext cx="685800" cy="310896"/>
-          </a:xfrm>
-          <a:prstGeom prst="rect">
-            <a:avLst/>
-          </a:prstGeom>
-          <a:solidFill>
-            <a:srgbClr val="1A1A1A"/>
-          </a:solidFill>
-          <a:ln/>
-        </p:spPr>
-      </p:sp>
-      <p:sp>
-        <p:nvSpPr>
-          <p:cNvPr id="24" name="Text 21"/>
-          <p:cNvSpPr txBox="1"/>
-          <p:nvPr/>
-        </p:nvSpPr>
-        <p:spPr>
-          <a:xfrm>
-            <a:off x="4617720" y="1399032"/>
-            <a:ext cx="685800" cy="310896"/>
-          </a:xfrm>
-          <a:prstGeom prst="rect">
-            <a:avLst/>
-          </a:prstGeom>
-          <a:noFill/>
-          <a:ln/>
-        </p:spPr>
-        <p:txBody>
-          <a:bodyPr wrap="square" lIns="0" tIns="0" rIns="0" bIns="0" rtlCol="0" anchor="ctr"/>
-          <a:lstStyle/>
-          <a:p>
-            <a:pPr algn="ctr" indent="0" marL="0">
-              <a:lnSpc>
-                <a:spcPct val="115000"/>
-              </a:lnSpc>
-              <a:buNone/>
-            </a:pPr>
-            <a:r>
-              <a:rPr lang="en-US" sz="950" b="1" dirty="0">
-                <a:solidFill>
-                  <a:srgbClr val="FFFFFF"/>
-                </a:solidFill>
-                <a:latin typeface="Meiryo" pitchFamily="34" charset="0"/>
-                <a:ea typeface="Meiryo" pitchFamily="34" charset="-122"/>
-                <a:cs typeface="Meiryo" pitchFamily="34" charset="-120"/>
-              </a:rPr>
-              <a:t>3か月</a:t>
-            </a:r>
-            <a:endParaRPr lang="en-US" sz="950" dirty="0"/>
-          </a:p>
-        </p:txBody>
-      </p:sp>
-      <p:sp>
-        <p:nvSpPr>
-          <p:cNvPr id="25" name="Text 22"/>
-          <p:cNvSpPr txBox="1"/>
-          <p:nvPr/>
-        </p:nvSpPr>
-        <p:spPr>
-          <a:xfrm>
-            <a:off x="5394960" y="1344168"/>
-            <a:ext cx="3383280" cy="420624"/>
-          </a:xfrm>
-          <a:prstGeom prst="rect">
-            <a:avLst/>
-          </a:prstGeom>
-          <a:noFill/>
-          <a:ln/>
-        </p:spPr>
-        <p:txBody>
-          <a:bodyPr wrap="square" lIns="0" tIns="0" rIns="0" bIns="0" rtlCol="0" anchor="ctr"/>
-          <a:lstStyle/>
-          <a:p>
-            <a:pPr algn="l" indent="0" marL="0">
-              <a:lnSpc>
-                <a:spcPct val="115000"/>
-              </a:lnSpc>
-              <a:buNone/>
-            </a:pPr>
-            <a:r>
-              <a:rPr lang="en-US" sz="950" dirty="0">
-                <a:solidFill>
-                  <a:srgbClr val="1A1A1A"/>
-                </a:solidFill>
-                <a:latin typeface="Meiryo" pitchFamily="34" charset="0"/>
-                <a:ea typeface="Meiryo" pitchFamily="34" charset="-122"/>
-                <a:cs typeface="Meiryo" pitchFamily="34" charset="-120"/>
-              </a:rPr>
-              <a:t>試作品：一人称の記録 → 写真の自動抽出 → 報告書の自動作成</a:t>
-            </a:r>
-            <a:endParaRPr lang="en-US" sz="950" dirty="0"/>
-          </a:p>
-        </p:txBody>
-      </p:sp>
-      <p:sp>
-        <p:nvSpPr>
-          <p:cNvPr id="26" name="Shape 23"/>
-          <p:cNvSpPr/>
-          <p:nvPr/>
-        </p:nvSpPr>
-        <p:spPr>
-          <a:xfrm>
-            <a:off x="4617720" y="1856232"/>
-            <a:ext cx="685800" cy="310896"/>
-          </a:xfrm>
-          <a:prstGeom prst="rect">
-            <a:avLst/>
-          </a:prstGeom>
-          <a:solidFill>
-            <a:srgbClr val="1A1A1A"/>
-          </a:solidFill>
-          <a:ln/>
-        </p:spPr>
-      </p:sp>
-      <p:sp>
-        <p:nvSpPr>
-          <p:cNvPr id="27" name="Text 24"/>
-          <p:cNvSpPr txBox="1"/>
-          <p:nvPr/>
-        </p:nvSpPr>
-        <p:spPr>
-          <a:xfrm>
-            <a:off x="4617720" y="1856232"/>
-            <a:ext cx="685800" cy="310896"/>
-          </a:xfrm>
-          <a:prstGeom prst="rect">
-            <a:avLst/>
-          </a:prstGeom>
-          <a:noFill/>
-          <a:ln/>
-        </p:spPr>
-        <p:txBody>
-          <a:bodyPr wrap="square" lIns="0" tIns="0" rIns="0" bIns="0" rtlCol="0" anchor="ctr"/>
-          <a:lstStyle/>
-          <a:p>
-            <a:pPr algn="ctr" indent="0" marL="0">
-              <a:lnSpc>
-                <a:spcPct val="115000"/>
-              </a:lnSpc>
-              <a:buNone/>
-            </a:pPr>
-            <a:r>
-              <a:rPr lang="en-US" sz="950" b="1" dirty="0">
-                <a:solidFill>
-                  <a:srgbClr val="FFFFFF"/>
-                </a:solidFill>
-                <a:latin typeface="Meiryo" pitchFamily="34" charset="0"/>
-                <a:ea typeface="Meiryo" pitchFamily="34" charset="-122"/>
-                <a:cs typeface="Meiryo" pitchFamily="34" charset="-120"/>
-              </a:rPr>
-              <a:t>6か月</a:t>
-            </a:r>
-            <a:endParaRPr lang="en-US" sz="950" dirty="0"/>
-          </a:p>
-        </p:txBody>
-      </p:sp>
-      <p:sp>
-        <p:nvSpPr>
-          <p:cNvPr id="28" name="Text 25"/>
-          <p:cNvSpPr txBox="1"/>
-          <p:nvPr/>
-        </p:nvSpPr>
-        <p:spPr>
-          <a:xfrm>
-            <a:off x="5394960" y="1801368"/>
-            <a:ext cx="3383280" cy="420624"/>
-          </a:xfrm>
-          <a:prstGeom prst="rect">
-            <a:avLst/>
-          </a:prstGeom>
-          <a:noFill/>
-          <a:ln/>
-        </p:spPr>
-        <p:txBody>
-          <a:bodyPr wrap="square" lIns="0" tIns="0" rIns="0" bIns="0" rtlCol="0" anchor="ctr"/>
-          <a:lstStyle/>
-          <a:p>
-            <a:pPr algn="l" indent="0" marL="0">
-              <a:lnSpc>
-                <a:spcPct val="115000"/>
-              </a:lnSpc>
-              <a:buNone/>
-            </a:pPr>
-            <a:r>
-              <a:rPr lang="en-US" sz="950" dirty="0">
-                <a:solidFill>
-                  <a:srgbClr val="1A1A1A"/>
-                </a:solidFill>
-                <a:latin typeface="Meiryo" pitchFamily="34" charset="0"/>
-                <a:ea typeface="Meiryo" pitchFamily="34" charset="-122"/>
-                <a:cs typeface="Meiryo" pitchFamily="34" charset="-120"/>
-              </a:rPr>
-              <a:t>1拠点で実証：報告書の作成時間がどれだけ減ったかを実測</a:t>
-            </a:r>
-            <a:endParaRPr lang="en-US" sz="950" dirty="0"/>
-          </a:p>
-        </p:txBody>
-      </p:sp>
-      <p:sp>
-        <p:nvSpPr>
-          <p:cNvPr id="29" name="Shape 26"/>
-          <p:cNvSpPr/>
-          <p:nvPr/>
-        </p:nvSpPr>
-        <p:spPr>
-          <a:xfrm>
-            <a:off x="4617720" y="2313432"/>
-            <a:ext cx="685800" cy="310896"/>
-          </a:xfrm>
-          <a:prstGeom prst="rect">
-            <a:avLst/>
-          </a:prstGeom>
-          <a:solidFill>
-            <a:srgbClr val="1A1A1A"/>
-          </a:solidFill>
-          <a:ln/>
-        </p:spPr>
-      </p:sp>
-      <p:sp>
-        <p:nvSpPr>
-          <p:cNvPr id="30" name="Text 27"/>
-          <p:cNvSpPr txBox="1"/>
-          <p:nvPr/>
-        </p:nvSpPr>
-        <p:spPr>
-          <a:xfrm>
-            <a:off x="4617720" y="2313432"/>
-            <a:ext cx="685800" cy="310896"/>
-          </a:xfrm>
-          <a:prstGeom prst="rect">
-            <a:avLst/>
-          </a:prstGeom>
-          <a:noFill/>
-          <a:ln/>
-        </p:spPr>
-        <p:txBody>
-          <a:bodyPr wrap="square" lIns="0" tIns="0" rIns="0" bIns="0" rtlCol="0" anchor="ctr"/>
-          <a:lstStyle/>
-          <a:p>
-            <a:pPr algn="ctr" indent="0" marL="0">
-              <a:lnSpc>
-                <a:spcPct val="115000"/>
-              </a:lnSpc>
-              <a:buNone/>
-            </a:pPr>
-            <a:r>
-              <a:rPr lang="en-US" sz="950" b="1" dirty="0">
-                <a:solidFill>
-                  <a:srgbClr val="FFFFFF"/>
-                </a:solidFill>
-                <a:latin typeface="Meiryo" pitchFamily="34" charset="0"/>
-                <a:ea typeface="Meiryo" pitchFamily="34" charset="-122"/>
-                <a:cs typeface="Meiryo" pitchFamily="34" charset="-120"/>
-              </a:rPr>
-              <a:t>6か月</a:t>
-            </a:r>
-            <a:endParaRPr lang="en-US" sz="950" dirty="0"/>
-          </a:p>
-        </p:txBody>
-      </p:sp>
-      <p:sp>
-        <p:nvSpPr>
-          <p:cNvPr id="31" name="Text 28"/>
-          <p:cNvSpPr txBox="1"/>
-          <p:nvPr/>
-        </p:nvSpPr>
-        <p:spPr>
-          <a:xfrm>
-            <a:off x="5394960" y="2258568"/>
-            <a:ext cx="3383280" cy="420624"/>
-          </a:xfrm>
-          <a:prstGeom prst="rect">
-            <a:avLst/>
-          </a:prstGeom>
-          <a:noFill/>
-          <a:ln/>
-        </p:spPr>
-        <p:txBody>
-          <a:bodyPr wrap="square" lIns="0" tIns="0" rIns="0" bIns="0" rtlCol="0" anchor="ctr"/>
-          <a:lstStyle/>
-          <a:p>
-            <a:pPr algn="l" indent="0" marL="0">
-              <a:lnSpc>
-                <a:spcPct val="115000"/>
-              </a:lnSpc>
-              <a:buNone/>
-            </a:pPr>
-            <a:r>
-              <a:rPr lang="en-US" sz="950" dirty="0">
-                <a:solidFill>
-                  <a:srgbClr val="1A1A1A"/>
-                </a:solidFill>
-                <a:latin typeface="Meiryo" pitchFamily="34" charset="0"/>
-                <a:ea typeface="Meiryo" pitchFamily="34" charset="-122"/>
-                <a:cs typeface="Meiryo" pitchFamily="34" charset="-120"/>
-              </a:rPr>
-              <a:t>有償試験導入3拠点の契約、公庫融資の申込、CVCとの交渉開始</a:t>
-            </a:r>
-            <a:endParaRPr lang="en-US" sz="950" dirty="0"/>
-          </a:p>
-        </p:txBody>
-      </p:sp>
-      <p:sp>
-        <p:nvSpPr>
-          <p:cNvPr id="32" name="return"/>
-          <p:cNvSpPr/>
-          <p:nvPr/>
-        </p:nvSpPr>
-        <p:spPr>
-          <a:xfrm>
-            <a:off x="4617720" y="2834640"/>
-            <a:ext cx="4160520" cy="1143000"/>
-          </a:xfrm>
-          <a:prstGeom prst="rect">
-            <a:avLst/>
-          </a:prstGeom>
-          <a:solidFill>
-            <a:srgbClr val="FFFFFF"/>
-          </a:solidFill>
-          <a:ln w="19050">
-            <a:solidFill>
-              <a:srgbClr val="1A1A1A"/>
-            </a:solidFill>
-            <a:prstDash val="solid"/>
-          </a:ln>
-        </p:spPr>
-      </p:sp>
-      <p:sp>
-        <p:nvSpPr>
-          <p:cNvPr id="33" name="Text 30"/>
-          <p:cNvSpPr txBox="1"/>
-          <p:nvPr/>
-        </p:nvSpPr>
-        <p:spPr>
-          <a:xfrm>
-            <a:off x="4754880" y="2880360"/>
-            <a:ext cx="3886200" cy="256032"/>
-          </a:xfrm>
-          <a:prstGeom prst="rect">
-            <a:avLst/>
-          </a:prstGeom>
-          <a:noFill/>
-          <a:ln/>
-        </p:spPr>
-        <p:txBody>
-          <a:bodyPr wrap="square" lIns="0" tIns="0" rIns="0" bIns="0" rtlCol="0" anchor="t"/>
-          <a:lstStyle/>
-          <a:p>
-            <a:pPr algn="l" indent="0" marL="0">
-              <a:lnSpc>
-                <a:spcPct val="115000"/>
-              </a:lnSpc>
-              <a:buNone/>
-            </a:pPr>
-            <a:r>
-              <a:rPr lang="en-US" sz="1050" b="1" dirty="0">
-                <a:solidFill>
-                  <a:srgbClr val="1A1A1A"/>
-                </a:solidFill>
-                <a:latin typeface="Meiryo" pitchFamily="34" charset="0"/>
-                <a:ea typeface="Meiryo" pitchFamily="34" charset="-122"/>
-                <a:cs typeface="Meiryo" pitchFamily="34" charset="-120"/>
-              </a:rPr>
-              <a:t>出資者へのリターン（提案）</a:t>
-            </a:r>
-            <a:endParaRPr lang="en-US" sz="1050" dirty="0"/>
-          </a:p>
-        </p:txBody>
-      </p:sp>
-      <p:sp>
-        <p:nvSpPr>
-          <p:cNvPr id="34" name="Text 31"/>
-          <p:cNvSpPr txBox="1"/>
-          <p:nvPr/>
-        </p:nvSpPr>
-        <p:spPr>
-          <a:xfrm>
-            <a:off x="4754880" y="3154680"/>
-            <a:ext cx="3886200" cy="786384"/>
-          </a:xfrm>
-          <a:prstGeom prst="rect">
-            <a:avLst/>
-          </a:prstGeom>
-          <a:noFill/>
-          <a:ln/>
-        </p:spPr>
-        <p:txBody>
-          <a:bodyPr wrap="square" lIns="0" tIns="0" rIns="0" bIns="0" rtlCol="0" anchor="t"/>
-          <a:lstStyle/>
-          <a:p>
-            <a:pPr algn="l" indent="0" marL="0">
-              <a:lnSpc>
-                <a:spcPct val="115000"/>
-              </a:lnSpc>
-              <a:spcAft>
-                <a:spcPts val="300"/>
-              </a:spcAft>
-              <a:buNone/>
-            </a:pPr>
-            <a:r>
-              <a:rPr lang="en-US" sz="900" b="1" dirty="0">
-                <a:solidFill>
-                  <a:srgbClr val="1A1A1A"/>
-                </a:solidFill>
-                <a:latin typeface="Meiryo" pitchFamily="34" charset="0"/>
-                <a:ea typeface="Meiryo" pitchFamily="34" charset="-122"/>
-                <a:cs typeface="Meiryo" pitchFamily="34" charset="-120"/>
-              </a:rPr>
-              <a:t>条件：</a:t>
-            </a:r>
-            <a:pPr algn="l" indent="0" marL="0">
-              <a:lnSpc>
-                <a:spcPct val="115000"/>
-              </a:lnSpc>
-              <a:spcAft>
-                <a:spcPts val="300"/>
-              </a:spcAft>
-              <a:buNone/>
-            </a:pPr>
-            <a:r>
-              <a:rPr lang="en-US" sz="900" dirty="0">
-                <a:solidFill>
-                  <a:srgbClr val="1A1A1A"/>
-                </a:solidFill>
-                <a:latin typeface="Meiryo" pitchFamily="34" charset="0"/>
-                <a:ea typeface="Meiryo" pitchFamily="34" charset="-122"/>
-                <a:cs typeface="Meiryo" pitchFamily="34" charset="-120"/>
-              </a:rPr>
-              <a:t>500万円で発行済株式の10%（評価額 出資前4,500万円）</a:t>
-            </a:r>
-            <a:endParaRPr lang="en-US" sz="900" dirty="0"/>
-          </a:p>
-          <a:p>
-            <a:pPr algn="l" indent="0" marL="0">
-              <a:lnSpc>
-                <a:spcPct val="115000"/>
-              </a:lnSpc>
-              <a:spcAft>
-                <a:spcPts val="300"/>
-              </a:spcAft>
-              <a:buNone/>
-            </a:pPr>
-            <a:r>
-              <a:rPr lang="en-US" sz="900" b="1" dirty="0">
-                <a:solidFill>
-                  <a:srgbClr val="1A1A1A"/>
-                </a:solidFill>
-                <a:latin typeface="Meiryo" pitchFamily="34" charset="0"/>
-                <a:ea typeface="Meiryo" pitchFamily="34" charset="-122"/>
-                <a:cs typeface="Meiryo" pitchFamily="34" charset="-120"/>
-              </a:rPr>
-              <a:t>出口：</a:t>
-            </a:r>
-            <a:pPr algn="l" indent="0" marL="0">
-              <a:lnSpc>
-                <a:spcPct val="115000"/>
-              </a:lnSpc>
-              <a:spcAft>
-                <a:spcPts val="300"/>
-              </a:spcAft>
-              <a:buNone/>
-            </a:pPr>
-            <a:r>
-              <a:rPr lang="en-US" sz="900" dirty="0">
-                <a:solidFill>
-                  <a:srgbClr val="1A1A1A"/>
-                </a:solidFill>
-                <a:latin typeface="Meiryo" pitchFamily="34" charset="0"/>
-                <a:ea typeface="Meiryo" pitchFamily="34" charset="-122"/>
-                <a:cs typeface="Meiryo" pitchFamily="34" charset="-120"/>
-              </a:rPr>
-              <a:t>成熟期の上場、または事業会社への売却</a:t>
-            </a:r>
-            <a:endParaRPr lang="en-US" sz="900" dirty="0"/>
-          </a:p>
-          <a:p>
-            <a:pPr algn="l" indent="0" marL="0">
-              <a:lnSpc>
-                <a:spcPct val="115000"/>
-              </a:lnSpc>
-              <a:spcAft>
-                <a:spcPts val="300"/>
-              </a:spcAft>
-              <a:buNone/>
-            </a:pPr>
-            <a:r>
-              <a:rPr lang="en-US" sz="900" b="1" dirty="0">
-                <a:solidFill>
-                  <a:srgbClr val="1A1A1A"/>
-                </a:solidFill>
-                <a:latin typeface="Meiryo" pitchFamily="34" charset="0"/>
-                <a:ea typeface="Meiryo" pitchFamily="34" charset="-122"/>
-                <a:cs typeface="Meiryo" pitchFamily="34" charset="-120"/>
-              </a:rPr>
-              <a:t>お願い：</a:t>
-            </a:r>
-            <a:pPr algn="l" indent="0" marL="0">
-              <a:lnSpc>
-                <a:spcPct val="115000"/>
-              </a:lnSpc>
-              <a:spcAft>
-                <a:spcPts val="300"/>
-              </a:spcAft>
-              <a:buNone/>
-            </a:pPr>
-            <a:r>
-              <a:rPr lang="en-US" sz="900" dirty="0">
-                <a:solidFill>
-                  <a:srgbClr val="1A1A1A"/>
-                </a:solidFill>
-                <a:latin typeface="Meiryo" pitchFamily="34" charset="0"/>
-                <a:ea typeface="Meiryo" pitchFamily="34" charset="-122"/>
-                <a:cs typeface="Meiryo" pitchFamily="34" charset="-120"/>
-              </a:rPr>
-              <a:t>資金に加え、製造業・建設業の実証先のご紹介</a:t>
-            </a:r>
-            <a:endParaRPr lang="en-US" sz="900" dirty="0"/>
-          </a:p>
-        </p:txBody>
-      </p:sp>
-      <p:sp>
-        <p:nvSpPr>
-          <p:cNvPr id="35" name="Text 32"/>
-          <p:cNvSpPr txBox="1"/>
-          <p:nvPr/>
-        </p:nvSpPr>
-        <p:spPr>
-          <a:xfrm>
-            <a:off x="365760" y="4572000"/>
-            <a:ext cx="8412480" cy="219456"/>
-          </a:xfrm>
-          <a:prstGeom prst="rect">
-            <a:avLst/>
-          </a:prstGeom>
-          <a:noFill/>
-          <a:ln/>
-        </p:spPr>
-        <p:txBody>
-          <a:bodyPr wrap="square" lIns="0" tIns="0" rIns="0" bIns="0" rtlCol="0" anchor="t"/>
-          <a:lstStyle/>
-          <a:p>
-            <a:pPr algn="l" indent="0" marL="0">
-              <a:lnSpc>
-                <a:spcPct val="115000"/>
-              </a:lnSpc>
-              <a:buNone/>
-            </a:pPr>
-            <a:r>
               <a:rPr lang="en-US" sz="800" dirty="0">
                 <a:solidFill>
                   <a:srgbClr val="8C8C8C"/>
@@ -31158,7 +32877,7 @@
                 <a:ea typeface="Meiryo" pitchFamily="34" charset="-122"/>
                 <a:cs typeface="Meiryo" pitchFamily="34" charset="-120"/>
               </a:rPr>
-              <a:t>出資条件は提案であり、交渉により決める</a:t>
+              <a:t>上場は目標であり、時期・市場は成長期の実績を見て判断する</a:t>
             </a:r>
             <a:endParaRPr lang="en-US" sz="800" dirty="0"/>
           </a:p>
@@ -31273,6 +32992,1470 @@
                 <a:ea typeface="Meiryo" pitchFamily="34" charset="-122"/>
                 <a:cs typeface="Meiryo" pitchFamily="34" charset="-120"/>
               </a:rPr>
+              <a:t>希望金額 500万円 ─ 6か月以内に最初の1拠点を動かす</a:t>
+            </a:r>
+            <a:endParaRPr lang="en-US" sz="2000" dirty="0"/>
+          </a:p>
+        </p:txBody>
+      </p:sp>
+      <p:sp>
+        <p:nvSpPr>
+          <p:cNvPr id="4" name="lead"/>
+          <p:cNvSpPr txBox="1"/>
+          <p:nvPr/>
+        </p:nvSpPr>
+        <p:spPr>
+          <a:xfrm>
+            <a:off x="365760" y="658368"/>
+            <a:ext cx="7955280" cy="256032"/>
+          </a:xfrm>
+          <a:prstGeom prst="rect">
+            <a:avLst/>
+          </a:prstGeom>
+          <a:noFill/>
+          <a:ln/>
+        </p:spPr>
+        <p:txBody>
+          <a:bodyPr wrap="square" lIns="0" tIns="0" rIns="0" bIns="0" rtlCol="0" anchor="ctr"/>
+          <a:lstStyle/>
+          <a:p>
+            <a:pPr algn="l" indent="0" marL="0">
+              <a:lnSpc>
+                <a:spcPct val="115000"/>
+              </a:lnSpc>
+              <a:buNone/>
+            </a:pPr>
+            <a:r>
+              <a:rPr lang="en-US" sz="1200" dirty="0">
+                <a:solidFill>
+                  <a:srgbClr val="4D4D4D"/>
+                </a:solidFill>
+                <a:latin typeface="Meiryo" pitchFamily="34" charset="0"/>
+                <a:ea typeface="Meiryo" pitchFamily="34" charset="-122"/>
+                <a:cs typeface="Meiryo" pitchFamily="34" charset="-120"/>
+              </a:rPr>
+              <a:t>準備期の資金。創業者の給料はゼロで、すべて試作品と実証に使う</a:t>
+            </a:r>
+            <a:endParaRPr lang="en-US" sz="1200" dirty="0"/>
+          </a:p>
+        </p:txBody>
+      </p:sp>
+      <p:sp>
+        <p:nvSpPr>
+          <p:cNvPr id="5" name="Text 2"/>
+          <p:cNvSpPr txBox="1"/>
+          <p:nvPr/>
+        </p:nvSpPr>
+        <p:spPr>
+          <a:xfrm>
+            <a:off x="365760" y="1051560"/>
+            <a:ext cx="4023360" cy="237744"/>
+          </a:xfrm>
+          <a:prstGeom prst="rect">
+            <a:avLst/>
+          </a:prstGeom>
+          <a:noFill/>
+          <a:ln/>
+        </p:spPr>
+        <p:txBody>
+          <a:bodyPr wrap="square" lIns="0" tIns="0" rIns="0" bIns="0" rtlCol="0" anchor="t"/>
+          <a:lstStyle/>
+          <a:p>
+            <a:pPr algn="l" indent="0" marL="0">
+              <a:lnSpc>
+                <a:spcPct val="115000"/>
+              </a:lnSpc>
+              <a:buNone/>
+            </a:pPr>
+            <a:r>
+              <a:rPr lang="en-US" sz="1050" b="1" dirty="0">
+                <a:solidFill>
+                  <a:srgbClr val="1A1A1A"/>
+                </a:solidFill>
+                <a:latin typeface="Meiryo" pitchFamily="34" charset="0"/>
+                <a:ea typeface="Meiryo" pitchFamily="34" charset="-122"/>
+                <a:cs typeface="Meiryo" pitchFamily="34" charset="-120"/>
+              </a:rPr>
+              <a:t>使い道（万円）</a:t>
+            </a:r>
+            <a:endParaRPr lang="en-US" sz="1050" dirty="0"/>
+          </a:p>
+        </p:txBody>
+      </p:sp>
+      <p:sp>
+        <p:nvSpPr>
+          <p:cNvPr id="6" name="Text 3"/>
+          <p:cNvSpPr txBox="1"/>
+          <p:nvPr/>
+        </p:nvSpPr>
+        <p:spPr>
+          <a:xfrm>
+            <a:off x="365760" y="1344168"/>
+            <a:ext cx="1691640" cy="420624"/>
+          </a:xfrm>
+          <a:prstGeom prst="rect">
+            <a:avLst/>
+          </a:prstGeom>
+          <a:noFill/>
+          <a:ln/>
+        </p:spPr>
+        <p:txBody>
+          <a:bodyPr wrap="square" lIns="0" tIns="0" rIns="0" bIns="0" rtlCol="0" anchor="ctr"/>
+          <a:lstStyle/>
+          <a:p>
+            <a:pPr algn="l" indent="0" marL="0">
+              <a:lnSpc>
+                <a:spcPct val="115000"/>
+              </a:lnSpc>
+              <a:buNone/>
+            </a:pPr>
+            <a:r>
+              <a:rPr lang="en-US" sz="950" b="1" dirty="0">
+                <a:solidFill>
+                  <a:srgbClr val="1A1A1A"/>
+                </a:solidFill>
+                <a:latin typeface="Meiryo" pitchFamily="34" charset="0"/>
+                <a:ea typeface="Meiryo" pitchFamily="34" charset="-122"/>
+                <a:cs typeface="Meiryo" pitchFamily="34" charset="-120"/>
+              </a:rPr>
+              <a:t>試作品の開発</a:t>
+            </a:r>
+            <a:endParaRPr lang="en-US" sz="950" dirty="0"/>
+          </a:p>
+          <a:p>
+            <a:pPr algn="l" indent="0" marL="0">
+              <a:lnSpc>
+                <a:spcPct val="115000"/>
+              </a:lnSpc>
+              <a:buNone/>
+            </a:pPr>
+            <a:r>
+              <a:rPr lang="en-US" sz="800" dirty="0">
+                <a:solidFill>
+                  <a:srgbClr val="4D4D4D"/>
+                </a:solidFill>
+                <a:latin typeface="Meiryo" pitchFamily="34" charset="0"/>
+                <a:ea typeface="Meiryo" pitchFamily="34" charset="-122"/>
+                <a:cs typeface="Meiryo" pitchFamily="34" charset="-120"/>
+              </a:rPr>
+              <a:t>クラウド・生成AI・外注エンジニア</a:t>
+            </a:r>
+            <a:endParaRPr lang="en-US" sz="950" dirty="0"/>
+          </a:p>
+        </p:txBody>
+      </p:sp>
+      <p:sp>
+        <p:nvSpPr>
+          <p:cNvPr id="7" name="Shape 4"/>
+          <p:cNvSpPr/>
+          <p:nvPr/>
+        </p:nvSpPr>
+        <p:spPr>
+          <a:xfrm>
+            <a:off x="2103120" y="1435608"/>
+            <a:ext cx="1737360" cy="237744"/>
+          </a:xfrm>
+          <a:prstGeom prst="rect">
+            <a:avLst/>
+          </a:prstGeom>
+          <a:solidFill>
+            <a:srgbClr val="1A1A1A"/>
+          </a:solidFill>
+          <a:ln/>
+        </p:spPr>
+      </p:sp>
+      <p:sp>
+        <p:nvSpPr>
+          <p:cNvPr id="8" name="Text 5"/>
+          <p:cNvSpPr txBox="1"/>
+          <p:nvPr/>
+        </p:nvSpPr>
+        <p:spPr>
+          <a:xfrm>
+            <a:off x="3886200" y="1399032"/>
+            <a:ext cx="457200" cy="310896"/>
+          </a:xfrm>
+          <a:prstGeom prst="rect">
+            <a:avLst/>
+          </a:prstGeom>
+          <a:noFill/>
+          <a:ln/>
+        </p:spPr>
+        <p:txBody>
+          <a:bodyPr wrap="square" lIns="0" tIns="0" rIns="0" bIns="0" rtlCol="0" anchor="ctr"/>
+          <a:lstStyle/>
+          <a:p>
+            <a:pPr algn="l" indent="0" marL="0">
+              <a:lnSpc>
+                <a:spcPct val="115000"/>
+              </a:lnSpc>
+              <a:buNone/>
+            </a:pPr>
+            <a:r>
+              <a:rPr lang="en-US" sz="1100" b="1" dirty="0">
+                <a:solidFill>
+                  <a:srgbClr val="1A1A1A"/>
+                </a:solidFill>
+                <a:latin typeface="Meiryo" pitchFamily="34" charset="0"/>
+                <a:ea typeface="Meiryo" pitchFamily="34" charset="-122"/>
+                <a:cs typeface="Meiryo" pitchFamily="34" charset="-120"/>
+              </a:rPr>
+              <a:t>250</a:t>
+            </a:r>
+            <a:endParaRPr lang="en-US" sz="1100" dirty="0"/>
+          </a:p>
+        </p:txBody>
+      </p:sp>
+      <p:sp>
+        <p:nvSpPr>
+          <p:cNvPr id="9" name="Text 6"/>
+          <p:cNvSpPr txBox="1"/>
+          <p:nvPr/>
+        </p:nvSpPr>
+        <p:spPr>
+          <a:xfrm>
+            <a:off x="365760" y="1801368"/>
+            <a:ext cx="1691640" cy="420624"/>
+          </a:xfrm>
+          <a:prstGeom prst="rect">
+            <a:avLst/>
+          </a:prstGeom>
+          <a:noFill/>
+          <a:ln/>
+        </p:spPr>
+        <p:txBody>
+          <a:bodyPr wrap="square" lIns="0" tIns="0" rIns="0" bIns="0" rtlCol="0" anchor="ctr"/>
+          <a:lstStyle/>
+          <a:p>
+            <a:pPr algn="l" indent="0" marL="0">
+              <a:lnSpc>
+                <a:spcPct val="115000"/>
+              </a:lnSpc>
+              <a:buNone/>
+            </a:pPr>
+            <a:r>
+              <a:rPr lang="en-US" sz="950" b="1" dirty="0">
+                <a:solidFill>
+                  <a:srgbClr val="1A1A1A"/>
+                </a:solidFill>
+                <a:latin typeface="Meiryo" pitchFamily="34" charset="0"/>
+                <a:ea typeface="Meiryo" pitchFamily="34" charset="-122"/>
+                <a:cs typeface="Meiryo" pitchFamily="34" charset="-120"/>
+              </a:rPr>
+              <a:t>端末・機材</a:t>
+            </a:r>
+            <a:endParaRPr lang="en-US" sz="950" dirty="0"/>
+          </a:p>
+          <a:p>
+            <a:pPr algn="l" indent="0" marL="0">
+              <a:lnSpc>
+                <a:spcPct val="115000"/>
+              </a:lnSpc>
+              <a:buNone/>
+            </a:pPr>
+            <a:r>
+              <a:rPr lang="en-US" sz="800" dirty="0">
+                <a:solidFill>
+                  <a:srgbClr val="4D4D4D"/>
+                </a:solidFill>
+                <a:latin typeface="Meiryo" pitchFamily="34" charset="0"/>
+                <a:ea typeface="Meiryo" pitchFamily="34" charset="-122"/>
+                <a:cs typeface="Meiryo" pitchFamily="34" charset="-120"/>
+              </a:rPr>
+              <a:t>スマートグラス・ヘルメットカメラ 数台</a:t>
+            </a:r>
+            <a:endParaRPr lang="en-US" sz="950" dirty="0"/>
+          </a:p>
+        </p:txBody>
+      </p:sp>
+      <p:sp>
+        <p:nvSpPr>
+          <p:cNvPr id="10" name="Shape 7"/>
+          <p:cNvSpPr/>
+          <p:nvPr/>
+        </p:nvSpPr>
+        <p:spPr>
+          <a:xfrm>
+            <a:off x="2103120" y="1892808"/>
+            <a:ext cx="555955" cy="237744"/>
+          </a:xfrm>
+          <a:prstGeom prst="rect">
+            <a:avLst/>
+          </a:prstGeom>
+          <a:solidFill>
+            <a:srgbClr val="1A1A1A"/>
+          </a:solidFill>
+          <a:ln/>
+        </p:spPr>
+      </p:sp>
+      <p:sp>
+        <p:nvSpPr>
+          <p:cNvPr id="11" name="Text 8"/>
+          <p:cNvSpPr txBox="1"/>
+          <p:nvPr/>
+        </p:nvSpPr>
+        <p:spPr>
+          <a:xfrm>
+            <a:off x="2704795" y="1856232"/>
+            <a:ext cx="457200" cy="310896"/>
+          </a:xfrm>
+          <a:prstGeom prst="rect">
+            <a:avLst/>
+          </a:prstGeom>
+          <a:noFill/>
+          <a:ln/>
+        </p:spPr>
+        <p:txBody>
+          <a:bodyPr wrap="square" lIns="0" tIns="0" rIns="0" bIns="0" rtlCol="0" anchor="ctr"/>
+          <a:lstStyle/>
+          <a:p>
+            <a:pPr algn="l" indent="0" marL="0">
+              <a:lnSpc>
+                <a:spcPct val="115000"/>
+              </a:lnSpc>
+              <a:buNone/>
+            </a:pPr>
+            <a:r>
+              <a:rPr lang="en-US" sz="1100" b="1" dirty="0">
+                <a:solidFill>
+                  <a:srgbClr val="1A1A1A"/>
+                </a:solidFill>
+                <a:latin typeface="Meiryo" pitchFamily="34" charset="0"/>
+                <a:ea typeface="Meiryo" pitchFamily="34" charset="-122"/>
+                <a:cs typeface="Meiryo" pitchFamily="34" charset="-120"/>
+              </a:rPr>
+              <a:t>80</a:t>
+            </a:r>
+            <a:endParaRPr lang="en-US" sz="1100" dirty="0"/>
+          </a:p>
+        </p:txBody>
+      </p:sp>
+      <p:sp>
+        <p:nvSpPr>
+          <p:cNvPr id="12" name="Text 9"/>
+          <p:cNvSpPr txBox="1"/>
+          <p:nvPr/>
+        </p:nvSpPr>
+        <p:spPr>
+          <a:xfrm>
+            <a:off x="365760" y="2258568"/>
+            <a:ext cx="1691640" cy="420624"/>
+          </a:xfrm>
+          <a:prstGeom prst="rect">
+            <a:avLst/>
+          </a:prstGeom>
+          <a:noFill/>
+          <a:ln/>
+        </p:spPr>
+        <p:txBody>
+          <a:bodyPr wrap="square" lIns="0" tIns="0" rIns="0" bIns="0" rtlCol="0" anchor="ctr"/>
+          <a:lstStyle/>
+          <a:p>
+            <a:pPr algn="l" indent="0" marL="0">
+              <a:lnSpc>
+                <a:spcPct val="115000"/>
+              </a:lnSpc>
+              <a:buNone/>
+            </a:pPr>
+            <a:r>
+              <a:rPr lang="en-US" sz="950" b="1" dirty="0">
+                <a:solidFill>
+                  <a:srgbClr val="1A1A1A"/>
+                </a:solidFill>
+                <a:latin typeface="Meiryo" pitchFamily="34" charset="0"/>
+                <a:ea typeface="Meiryo" pitchFamily="34" charset="-122"/>
+                <a:cs typeface="Meiryo" pitchFamily="34" charset="-120"/>
+              </a:rPr>
+              <a:t>1拠点での実証</a:t>
+            </a:r>
+            <a:endParaRPr lang="en-US" sz="950" dirty="0"/>
+          </a:p>
+          <a:p>
+            <a:pPr algn="l" indent="0" marL="0">
+              <a:lnSpc>
+                <a:spcPct val="115000"/>
+              </a:lnSpc>
+              <a:buNone/>
+            </a:pPr>
+            <a:r>
+              <a:rPr lang="en-US" sz="800" dirty="0">
+                <a:solidFill>
+                  <a:srgbClr val="4D4D4D"/>
+                </a:solidFill>
+                <a:latin typeface="Meiryo" pitchFamily="34" charset="0"/>
+                <a:ea typeface="Meiryo" pitchFamily="34" charset="-122"/>
+                <a:cs typeface="Meiryo" pitchFamily="34" charset="-120"/>
+              </a:rPr>
+              <a:t>3か月の交通・設置・現場研修</a:t>
+            </a:r>
+            <a:endParaRPr lang="en-US" sz="950" dirty="0"/>
+          </a:p>
+        </p:txBody>
+      </p:sp>
+      <p:sp>
+        <p:nvSpPr>
+          <p:cNvPr id="13" name="Shape 10"/>
+          <p:cNvSpPr/>
+          <p:nvPr/>
+        </p:nvSpPr>
+        <p:spPr>
+          <a:xfrm>
+            <a:off x="2103120" y="2350008"/>
+            <a:ext cx="694944" cy="237744"/>
+          </a:xfrm>
+          <a:prstGeom prst="rect">
+            <a:avLst/>
+          </a:prstGeom>
+          <a:solidFill>
+            <a:srgbClr val="1A1A1A"/>
+          </a:solidFill>
+          <a:ln/>
+        </p:spPr>
+      </p:sp>
+      <p:sp>
+        <p:nvSpPr>
+          <p:cNvPr id="14" name="Text 11"/>
+          <p:cNvSpPr txBox="1"/>
+          <p:nvPr/>
+        </p:nvSpPr>
+        <p:spPr>
+          <a:xfrm>
+            <a:off x="2843784" y="2313432"/>
+            <a:ext cx="457200" cy="310896"/>
+          </a:xfrm>
+          <a:prstGeom prst="rect">
+            <a:avLst/>
+          </a:prstGeom>
+          <a:noFill/>
+          <a:ln/>
+        </p:spPr>
+        <p:txBody>
+          <a:bodyPr wrap="square" lIns="0" tIns="0" rIns="0" bIns="0" rtlCol="0" anchor="ctr"/>
+          <a:lstStyle/>
+          <a:p>
+            <a:pPr algn="l" indent="0" marL="0">
+              <a:lnSpc>
+                <a:spcPct val="115000"/>
+              </a:lnSpc>
+              <a:buNone/>
+            </a:pPr>
+            <a:r>
+              <a:rPr lang="en-US" sz="1100" b="1" dirty="0">
+                <a:solidFill>
+                  <a:srgbClr val="1A1A1A"/>
+                </a:solidFill>
+                <a:latin typeface="Meiryo" pitchFamily="34" charset="0"/>
+                <a:ea typeface="Meiryo" pitchFamily="34" charset="-122"/>
+                <a:cs typeface="Meiryo" pitchFamily="34" charset="-120"/>
+              </a:rPr>
+              <a:t>100</a:t>
+            </a:r>
+            <a:endParaRPr lang="en-US" sz="1100" dirty="0"/>
+          </a:p>
+        </p:txBody>
+      </p:sp>
+      <p:sp>
+        <p:nvSpPr>
+          <p:cNvPr id="15" name="Text 12"/>
+          <p:cNvSpPr txBox="1"/>
+          <p:nvPr/>
+        </p:nvSpPr>
+        <p:spPr>
+          <a:xfrm>
+            <a:off x="365760" y="2715768"/>
+            <a:ext cx="1691640" cy="420624"/>
+          </a:xfrm>
+          <a:prstGeom prst="rect">
+            <a:avLst/>
+          </a:prstGeom>
+          <a:noFill/>
+          <a:ln/>
+        </p:spPr>
+        <p:txBody>
+          <a:bodyPr wrap="square" lIns="0" tIns="0" rIns="0" bIns="0" rtlCol="0" anchor="ctr"/>
+          <a:lstStyle/>
+          <a:p>
+            <a:pPr algn="l" indent="0" marL="0">
+              <a:lnSpc>
+                <a:spcPct val="115000"/>
+              </a:lnSpc>
+              <a:buNone/>
+            </a:pPr>
+            <a:r>
+              <a:rPr lang="en-US" sz="950" b="1" dirty="0">
+                <a:solidFill>
+                  <a:srgbClr val="1A1A1A"/>
+                </a:solidFill>
+                <a:latin typeface="Meiryo" pitchFamily="34" charset="0"/>
+                <a:ea typeface="Meiryo" pitchFamily="34" charset="-122"/>
+                <a:cs typeface="Meiryo" pitchFamily="34" charset="-120"/>
+              </a:rPr>
+              <a:t>設立・契約・知財</a:t>
+            </a:r>
+            <a:endParaRPr lang="en-US" sz="950" dirty="0"/>
+          </a:p>
+          <a:p>
+            <a:pPr algn="l" indent="0" marL="0">
+              <a:lnSpc>
+                <a:spcPct val="115000"/>
+              </a:lnSpc>
+              <a:buNone/>
+            </a:pPr>
+            <a:r>
+              <a:rPr lang="en-US" sz="800" dirty="0">
+                <a:solidFill>
+                  <a:srgbClr val="4D4D4D"/>
+                </a:solidFill>
+                <a:latin typeface="Meiryo" pitchFamily="34" charset="0"/>
+                <a:ea typeface="Meiryo" pitchFamily="34" charset="-122"/>
+                <a:cs typeface="Meiryo" pitchFamily="34" charset="-120"/>
+              </a:rPr>
+              <a:t>法人設立、秘密保持・データ利用契約</a:t>
+            </a:r>
+            <a:endParaRPr lang="en-US" sz="950" dirty="0"/>
+          </a:p>
+        </p:txBody>
+      </p:sp>
+      <p:sp>
+        <p:nvSpPr>
+          <p:cNvPr id="16" name="Shape 13"/>
+          <p:cNvSpPr/>
+          <p:nvPr/>
+        </p:nvSpPr>
+        <p:spPr>
+          <a:xfrm>
+            <a:off x="2103120" y="2807208"/>
+            <a:ext cx="277978" cy="237744"/>
+          </a:xfrm>
+          <a:prstGeom prst="rect">
+            <a:avLst/>
+          </a:prstGeom>
+          <a:solidFill>
+            <a:srgbClr val="1A1A1A"/>
+          </a:solidFill>
+          <a:ln/>
+        </p:spPr>
+      </p:sp>
+      <p:sp>
+        <p:nvSpPr>
+          <p:cNvPr id="17" name="Text 14"/>
+          <p:cNvSpPr txBox="1"/>
+          <p:nvPr/>
+        </p:nvSpPr>
+        <p:spPr>
+          <a:xfrm>
+            <a:off x="2426818" y="2770632"/>
+            <a:ext cx="457200" cy="310896"/>
+          </a:xfrm>
+          <a:prstGeom prst="rect">
+            <a:avLst/>
+          </a:prstGeom>
+          <a:noFill/>
+          <a:ln/>
+        </p:spPr>
+        <p:txBody>
+          <a:bodyPr wrap="square" lIns="0" tIns="0" rIns="0" bIns="0" rtlCol="0" anchor="ctr"/>
+          <a:lstStyle/>
+          <a:p>
+            <a:pPr algn="l" indent="0" marL="0">
+              <a:lnSpc>
+                <a:spcPct val="115000"/>
+              </a:lnSpc>
+              <a:buNone/>
+            </a:pPr>
+            <a:r>
+              <a:rPr lang="en-US" sz="1100" b="1" dirty="0">
+                <a:solidFill>
+                  <a:srgbClr val="1A1A1A"/>
+                </a:solidFill>
+                <a:latin typeface="Meiryo" pitchFamily="34" charset="0"/>
+                <a:ea typeface="Meiryo" pitchFamily="34" charset="-122"/>
+                <a:cs typeface="Meiryo" pitchFamily="34" charset="-120"/>
+              </a:rPr>
+              <a:t>40</a:t>
+            </a:r>
+            <a:endParaRPr lang="en-US" sz="1100" dirty="0"/>
+          </a:p>
+        </p:txBody>
+      </p:sp>
+      <p:sp>
+        <p:nvSpPr>
+          <p:cNvPr id="18" name="Text 15"/>
+          <p:cNvSpPr txBox="1"/>
+          <p:nvPr/>
+        </p:nvSpPr>
+        <p:spPr>
+          <a:xfrm>
+            <a:off x="365760" y="3172968"/>
+            <a:ext cx="1691640" cy="420624"/>
+          </a:xfrm>
+          <a:prstGeom prst="rect">
+            <a:avLst/>
+          </a:prstGeom>
+          <a:noFill/>
+          <a:ln/>
+        </p:spPr>
+        <p:txBody>
+          <a:bodyPr wrap="square" lIns="0" tIns="0" rIns="0" bIns="0" rtlCol="0" anchor="ctr"/>
+          <a:lstStyle/>
+          <a:p>
+            <a:pPr algn="l" indent="0" marL="0">
+              <a:lnSpc>
+                <a:spcPct val="115000"/>
+              </a:lnSpc>
+              <a:buNone/>
+            </a:pPr>
+            <a:r>
+              <a:rPr lang="en-US" sz="950" b="1" dirty="0">
+                <a:solidFill>
+                  <a:srgbClr val="1A1A1A"/>
+                </a:solidFill>
+                <a:latin typeface="Meiryo" pitchFamily="34" charset="0"/>
+                <a:ea typeface="Meiryo" pitchFamily="34" charset="-122"/>
+                <a:cs typeface="Meiryo" pitchFamily="34" charset="-120"/>
+              </a:rPr>
+              <a:t>予備</a:t>
+            </a:r>
+            <a:endParaRPr lang="en-US" sz="950" dirty="0"/>
+          </a:p>
+          <a:p>
+            <a:pPr algn="l" indent="0" marL="0">
+              <a:lnSpc>
+                <a:spcPct val="115000"/>
+              </a:lnSpc>
+              <a:buNone/>
+            </a:pPr>
+            <a:endParaRPr lang="en-US" sz="950" dirty="0"/>
+          </a:p>
+        </p:txBody>
+      </p:sp>
+      <p:sp>
+        <p:nvSpPr>
+          <p:cNvPr id="19" name="Shape 16"/>
+          <p:cNvSpPr/>
+          <p:nvPr/>
+        </p:nvSpPr>
+        <p:spPr>
+          <a:xfrm>
+            <a:off x="2103120" y="3264408"/>
+            <a:ext cx="208483" cy="237744"/>
+          </a:xfrm>
+          <a:prstGeom prst="rect">
+            <a:avLst/>
+          </a:prstGeom>
+          <a:solidFill>
+            <a:srgbClr val="8C8C8C"/>
+          </a:solidFill>
+          <a:ln/>
+        </p:spPr>
+      </p:sp>
+      <p:sp>
+        <p:nvSpPr>
+          <p:cNvPr id="20" name="Text 17"/>
+          <p:cNvSpPr txBox="1"/>
+          <p:nvPr/>
+        </p:nvSpPr>
+        <p:spPr>
+          <a:xfrm>
+            <a:off x="2357323" y="3227832"/>
+            <a:ext cx="457200" cy="310896"/>
+          </a:xfrm>
+          <a:prstGeom prst="rect">
+            <a:avLst/>
+          </a:prstGeom>
+          <a:noFill/>
+          <a:ln/>
+        </p:spPr>
+        <p:txBody>
+          <a:bodyPr wrap="square" lIns="0" tIns="0" rIns="0" bIns="0" rtlCol="0" anchor="ctr"/>
+          <a:lstStyle/>
+          <a:p>
+            <a:pPr algn="l" indent="0" marL="0">
+              <a:lnSpc>
+                <a:spcPct val="115000"/>
+              </a:lnSpc>
+              <a:buNone/>
+            </a:pPr>
+            <a:r>
+              <a:rPr lang="en-US" sz="1100" b="1" dirty="0">
+                <a:solidFill>
+                  <a:srgbClr val="1A1A1A"/>
+                </a:solidFill>
+                <a:latin typeface="Meiryo" pitchFamily="34" charset="0"/>
+                <a:ea typeface="Meiryo" pitchFamily="34" charset="-122"/>
+                <a:cs typeface="Meiryo" pitchFamily="34" charset="-120"/>
+              </a:rPr>
+              <a:t>30</a:t>
+            </a:r>
+            <a:endParaRPr lang="en-US" sz="1100" dirty="0"/>
+          </a:p>
+        </p:txBody>
+      </p:sp>
+      <p:sp>
+        <p:nvSpPr>
+          <p:cNvPr id="21" name="Text 18"/>
+          <p:cNvSpPr txBox="1"/>
+          <p:nvPr/>
+        </p:nvSpPr>
+        <p:spPr>
+          <a:xfrm>
+            <a:off x="365760" y="3657600"/>
+            <a:ext cx="4023360" cy="274320"/>
+          </a:xfrm>
+          <a:prstGeom prst="rect">
+            <a:avLst/>
+          </a:prstGeom>
+          <a:noFill/>
+          <a:ln/>
+        </p:spPr>
+        <p:txBody>
+          <a:bodyPr wrap="square" lIns="0" tIns="0" rIns="0" bIns="0" rtlCol="0" anchor="t"/>
+          <a:lstStyle/>
+          <a:p>
+            <a:pPr algn="l" indent="0" marL="0">
+              <a:lnSpc>
+                <a:spcPct val="115000"/>
+              </a:lnSpc>
+              <a:buNone/>
+            </a:pPr>
+            <a:r>
+              <a:rPr lang="en-US" sz="1200" b="1" dirty="0">
+                <a:solidFill>
+                  <a:srgbClr val="1A1A1A"/>
+                </a:solidFill>
+                <a:latin typeface="Meiryo" pitchFamily="34" charset="0"/>
+                <a:ea typeface="Meiryo" pitchFamily="34" charset="-122"/>
+                <a:cs typeface="Meiryo" pitchFamily="34" charset="-120"/>
+              </a:rPr>
+              <a:t>合計 500万円</a:t>
+            </a:r>
+            <a:endParaRPr lang="en-US" sz="1200" dirty="0"/>
+          </a:p>
+        </p:txBody>
+      </p:sp>
+      <p:sp>
+        <p:nvSpPr>
+          <p:cNvPr id="22" name="Text 19"/>
+          <p:cNvSpPr txBox="1"/>
+          <p:nvPr/>
+        </p:nvSpPr>
+        <p:spPr>
+          <a:xfrm>
+            <a:off x="4617720" y="1051560"/>
+            <a:ext cx="4160520" cy="237744"/>
+          </a:xfrm>
+          <a:prstGeom prst="rect">
+            <a:avLst/>
+          </a:prstGeom>
+          <a:noFill/>
+          <a:ln/>
+        </p:spPr>
+        <p:txBody>
+          <a:bodyPr wrap="square" lIns="0" tIns="0" rIns="0" bIns="0" rtlCol="0" anchor="t"/>
+          <a:lstStyle/>
+          <a:p>
+            <a:pPr algn="l" indent="0" marL="0">
+              <a:lnSpc>
+                <a:spcPct val="115000"/>
+              </a:lnSpc>
+              <a:buNone/>
+            </a:pPr>
+            <a:r>
+              <a:rPr lang="en-US" sz="1050" b="1" dirty="0">
+                <a:solidFill>
+                  <a:srgbClr val="1A1A1A"/>
+                </a:solidFill>
+                <a:latin typeface="Meiryo" pitchFamily="34" charset="0"/>
+                <a:ea typeface="Meiryo" pitchFamily="34" charset="-122"/>
+                <a:cs typeface="Meiryo" pitchFamily="34" charset="-120"/>
+              </a:rPr>
+              <a:t>マイルストーン</a:t>
+            </a:r>
+            <a:endParaRPr lang="en-US" sz="1050" dirty="0"/>
+          </a:p>
+        </p:txBody>
+      </p:sp>
+      <p:sp>
+        <p:nvSpPr>
+          <p:cNvPr id="23" name="Shape 20"/>
+          <p:cNvSpPr/>
+          <p:nvPr/>
+        </p:nvSpPr>
+        <p:spPr>
+          <a:xfrm>
+            <a:off x="4617720" y="1399032"/>
+            <a:ext cx="685800" cy="310896"/>
+          </a:xfrm>
+          <a:prstGeom prst="rect">
+            <a:avLst/>
+          </a:prstGeom>
+          <a:solidFill>
+            <a:srgbClr val="1A1A1A"/>
+          </a:solidFill>
+          <a:ln/>
+        </p:spPr>
+      </p:sp>
+      <p:sp>
+        <p:nvSpPr>
+          <p:cNvPr id="24" name="Text 21"/>
+          <p:cNvSpPr txBox="1"/>
+          <p:nvPr/>
+        </p:nvSpPr>
+        <p:spPr>
+          <a:xfrm>
+            <a:off x="4617720" y="1399032"/>
+            <a:ext cx="685800" cy="310896"/>
+          </a:xfrm>
+          <a:prstGeom prst="rect">
+            <a:avLst/>
+          </a:prstGeom>
+          <a:noFill/>
+          <a:ln/>
+        </p:spPr>
+        <p:txBody>
+          <a:bodyPr wrap="square" lIns="0" tIns="0" rIns="0" bIns="0" rtlCol="0" anchor="ctr"/>
+          <a:lstStyle/>
+          <a:p>
+            <a:pPr algn="ctr" indent="0" marL="0">
+              <a:lnSpc>
+                <a:spcPct val="115000"/>
+              </a:lnSpc>
+              <a:buNone/>
+            </a:pPr>
+            <a:r>
+              <a:rPr lang="en-US" sz="950" b="1" dirty="0">
+                <a:solidFill>
+                  <a:srgbClr val="FFFFFF"/>
+                </a:solidFill>
+                <a:latin typeface="Meiryo" pitchFamily="34" charset="0"/>
+                <a:ea typeface="Meiryo" pitchFamily="34" charset="-122"/>
+                <a:cs typeface="Meiryo" pitchFamily="34" charset="-120"/>
+              </a:rPr>
+              <a:t>3か月</a:t>
+            </a:r>
+            <a:endParaRPr lang="en-US" sz="950" dirty="0"/>
+          </a:p>
+        </p:txBody>
+      </p:sp>
+      <p:sp>
+        <p:nvSpPr>
+          <p:cNvPr id="25" name="Text 22"/>
+          <p:cNvSpPr txBox="1"/>
+          <p:nvPr/>
+        </p:nvSpPr>
+        <p:spPr>
+          <a:xfrm>
+            <a:off x="5394960" y="1344168"/>
+            <a:ext cx="3383280" cy="420624"/>
+          </a:xfrm>
+          <a:prstGeom prst="rect">
+            <a:avLst/>
+          </a:prstGeom>
+          <a:noFill/>
+          <a:ln/>
+        </p:spPr>
+        <p:txBody>
+          <a:bodyPr wrap="square" lIns="0" tIns="0" rIns="0" bIns="0" rtlCol="0" anchor="ctr"/>
+          <a:lstStyle/>
+          <a:p>
+            <a:pPr algn="l" indent="0" marL="0">
+              <a:lnSpc>
+                <a:spcPct val="115000"/>
+              </a:lnSpc>
+              <a:buNone/>
+            </a:pPr>
+            <a:r>
+              <a:rPr lang="en-US" sz="950" dirty="0">
+                <a:solidFill>
+                  <a:srgbClr val="1A1A1A"/>
+                </a:solidFill>
+                <a:latin typeface="Meiryo" pitchFamily="34" charset="0"/>
+                <a:ea typeface="Meiryo" pitchFamily="34" charset="-122"/>
+                <a:cs typeface="Meiryo" pitchFamily="34" charset="-120"/>
+              </a:rPr>
+              <a:t>試作品：一人称の記録 → 写真の自動抽出 → 報告書の自動作成</a:t>
+            </a:r>
+            <a:endParaRPr lang="en-US" sz="950" dirty="0"/>
+          </a:p>
+        </p:txBody>
+      </p:sp>
+      <p:sp>
+        <p:nvSpPr>
+          <p:cNvPr id="26" name="Shape 23"/>
+          <p:cNvSpPr/>
+          <p:nvPr/>
+        </p:nvSpPr>
+        <p:spPr>
+          <a:xfrm>
+            <a:off x="4617720" y="1856232"/>
+            <a:ext cx="685800" cy="310896"/>
+          </a:xfrm>
+          <a:prstGeom prst="rect">
+            <a:avLst/>
+          </a:prstGeom>
+          <a:solidFill>
+            <a:srgbClr val="1A1A1A"/>
+          </a:solidFill>
+          <a:ln/>
+        </p:spPr>
+      </p:sp>
+      <p:sp>
+        <p:nvSpPr>
+          <p:cNvPr id="27" name="Text 24"/>
+          <p:cNvSpPr txBox="1"/>
+          <p:nvPr/>
+        </p:nvSpPr>
+        <p:spPr>
+          <a:xfrm>
+            <a:off x="4617720" y="1856232"/>
+            <a:ext cx="685800" cy="310896"/>
+          </a:xfrm>
+          <a:prstGeom prst="rect">
+            <a:avLst/>
+          </a:prstGeom>
+          <a:noFill/>
+          <a:ln/>
+        </p:spPr>
+        <p:txBody>
+          <a:bodyPr wrap="square" lIns="0" tIns="0" rIns="0" bIns="0" rtlCol="0" anchor="ctr"/>
+          <a:lstStyle/>
+          <a:p>
+            <a:pPr algn="ctr" indent="0" marL="0">
+              <a:lnSpc>
+                <a:spcPct val="115000"/>
+              </a:lnSpc>
+              <a:buNone/>
+            </a:pPr>
+            <a:r>
+              <a:rPr lang="en-US" sz="950" b="1" dirty="0">
+                <a:solidFill>
+                  <a:srgbClr val="FFFFFF"/>
+                </a:solidFill>
+                <a:latin typeface="Meiryo" pitchFamily="34" charset="0"/>
+                <a:ea typeface="Meiryo" pitchFamily="34" charset="-122"/>
+                <a:cs typeface="Meiryo" pitchFamily="34" charset="-120"/>
+              </a:rPr>
+              <a:t>6か月</a:t>
+            </a:r>
+            <a:endParaRPr lang="en-US" sz="950" dirty="0"/>
+          </a:p>
+        </p:txBody>
+      </p:sp>
+      <p:sp>
+        <p:nvSpPr>
+          <p:cNvPr id="28" name="Text 25"/>
+          <p:cNvSpPr txBox="1"/>
+          <p:nvPr/>
+        </p:nvSpPr>
+        <p:spPr>
+          <a:xfrm>
+            <a:off x="5394960" y="1801368"/>
+            <a:ext cx="3383280" cy="420624"/>
+          </a:xfrm>
+          <a:prstGeom prst="rect">
+            <a:avLst/>
+          </a:prstGeom>
+          <a:noFill/>
+          <a:ln/>
+        </p:spPr>
+        <p:txBody>
+          <a:bodyPr wrap="square" lIns="0" tIns="0" rIns="0" bIns="0" rtlCol="0" anchor="ctr"/>
+          <a:lstStyle/>
+          <a:p>
+            <a:pPr algn="l" indent="0" marL="0">
+              <a:lnSpc>
+                <a:spcPct val="115000"/>
+              </a:lnSpc>
+              <a:buNone/>
+            </a:pPr>
+            <a:r>
+              <a:rPr lang="en-US" sz="950" dirty="0">
+                <a:solidFill>
+                  <a:srgbClr val="1A1A1A"/>
+                </a:solidFill>
+                <a:latin typeface="Meiryo" pitchFamily="34" charset="0"/>
+                <a:ea typeface="Meiryo" pitchFamily="34" charset="-122"/>
+                <a:cs typeface="Meiryo" pitchFamily="34" charset="-120"/>
+              </a:rPr>
+              <a:t>1拠点で実証：報告書の作成時間がどれだけ減ったかを実測</a:t>
+            </a:r>
+            <a:endParaRPr lang="en-US" sz="950" dirty="0"/>
+          </a:p>
+        </p:txBody>
+      </p:sp>
+      <p:sp>
+        <p:nvSpPr>
+          <p:cNvPr id="29" name="Shape 26"/>
+          <p:cNvSpPr/>
+          <p:nvPr/>
+        </p:nvSpPr>
+        <p:spPr>
+          <a:xfrm>
+            <a:off x="4617720" y="2313432"/>
+            <a:ext cx="685800" cy="310896"/>
+          </a:xfrm>
+          <a:prstGeom prst="rect">
+            <a:avLst/>
+          </a:prstGeom>
+          <a:solidFill>
+            <a:srgbClr val="1A1A1A"/>
+          </a:solidFill>
+          <a:ln/>
+        </p:spPr>
+      </p:sp>
+      <p:sp>
+        <p:nvSpPr>
+          <p:cNvPr id="30" name="Text 27"/>
+          <p:cNvSpPr txBox="1"/>
+          <p:nvPr/>
+        </p:nvSpPr>
+        <p:spPr>
+          <a:xfrm>
+            <a:off x="4617720" y="2313432"/>
+            <a:ext cx="685800" cy="310896"/>
+          </a:xfrm>
+          <a:prstGeom prst="rect">
+            <a:avLst/>
+          </a:prstGeom>
+          <a:noFill/>
+          <a:ln/>
+        </p:spPr>
+        <p:txBody>
+          <a:bodyPr wrap="square" lIns="0" tIns="0" rIns="0" bIns="0" rtlCol="0" anchor="ctr"/>
+          <a:lstStyle/>
+          <a:p>
+            <a:pPr algn="ctr" indent="0" marL="0">
+              <a:lnSpc>
+                <a:spcPct val="115000"/>
+              </a:lnSpc>
+              <a:buNone/>
+            </a:pPr>
+            <a:r>
+              <a:rPr lang="en-US" sz="950" b="1" dirty="0">
+                <a:solidFill>
+                  <a:srgbClr val="FFFFFF"/>
+                </a:solidFill>
+                <a:latin typeface="Meiryo" pitchFamily="34" charset="0"/>
+                <a:ea typeface="Meiryo" pitchFamily="34" charset="-122"/>
+                <a:cs typeface="Meiryo" pitchFamily="34" charset="-120"/>
+              </a:rPr>
+              <a:t>6か月</a:t>
+            </a:r>
+            <a:endParaRPr lang="en-US" sz="950" dirty="0"/>
+          </a:p>
+        </p:txBody>
+      </p:sp>
+      <p:sp>
+        <p:nvSpPr>
+          <p:cNvPr id="31" name="Text 28"/>
+          <p:cNvSpPr txBox="1"/>
+          <p:nvPr/>
+        </p:nvSpPr>
+        <p:spPr>
+          <a:xfrm>
+            <a:off x="5394960" y="2258568"/>
+            <a:ext cx="3383280" cy="420624"/>
+          </a:xfrm>
+          <a:prstGeom prst="rect">
+            <a:avLst/>
+          </a:prstGeom>
+          <a:noFill/>
+          <a:ln/>
+        </p:spPr>
+        <p:txBody>
+          <a:bodyPr wrap="square" lIns="0" tIns="0" rIns="0" bIns="0" rtlCol="0" anchor="ctr"/>
+          <a:lstStyle/>
+          <a:p>
+            <a:pPr algn="l" indent="0" marL="0">
+              <a:lnSpc>
+                <a:spcPct val="115000"/>
+              </a:lnSpc>
+              <a:buNone/>
+            </a:pPr>
+            <a:r>
+              <a:rPr lang="en-US" sz="950" dirty="0">
+                <a:solidFill>
+                  <a:srgbClr val="1A1A1A"/>
+                </a:solidFill>
+                <a:latin typeface="Meiryo" pitchFamily="34" charset="0"/>
+                <a:ea typeface="Meiryo" pitchFamily="34" charset="-122"/>
+                <a:cs typeface="Meiryo" pitchFamily="34" charset="-120"/>
+              </a:rPr>
+              <a:t>有償試験導入3拠点の契約、公庫融資の申込、CVCとの交渉開始</a:t>
+            </a:r>
+            <a:endParaRPr lang="en-US" sz="950" dirty="0"/>
+          </a:p>
+        </p:txBody>
+      </p:sp>
+      <p:sp>
+        <p:nvSpPr>
+          <p:cNvPr id="32" name="return"/>
+          <p:cNvSpPr/>
+          <p:nvPr/>
+        </p:nvSpPr>
+        <p:spPr>
+          <a:xfrm>
+            <a:off x="4617720" y="2834640"/>
+            <a:ext cx="4160520" cy="1143000"/>
+          </a:xfrm>
+          <a:prstGeom prst="rect">
+            <a:avLst/>
+          </a:prstGeom>
+          <a:solidFill>
+            <a:srgbClr val="FFFFFF"/>
+          </a:solidFill>
+          <a:ln w="19050">
+            <a:solidFill>
+              <a:srgbClr val="1A1A1A"/>
+            </a:solidFill>
+            <a:prstDash val="solid"/>
+          </a:ln>
+        </p:spPr>
+      </p:sp>
+      <p:sp>
+        <p:nvSpPr>
+          <p:cNvPr id="33" name="Text 30"/>
+          <p:cNvSpPr txBox="1"/>
+          <p:nvPr/>
+        </p:nvSpPr>
+        <p:spPr>
+          <a:xfrm>
+            <a:off x="4754880" y="2880360"/>
+            <a:ext cx="3886200" cy="256032"/>
+          </a:xfrm>
+          <a:prstGeom prst="rect">
+            <a:avLst/>
+          </a:prstGeom>
+          <a:noFill/>
+          <a:ln/>
+        </p:spPr>
+        <p:txBody>
+          <a:bodyPr wrap="square" lIns="0" tIns="0" rIns="0" bIns="0" rtlCol="0" anchor="t"/>
+          <a:lstStyle/>
+          <a:p>
+            <a:pPr algn="l" indent="0" marL="0">
+              <a:lnSpc>
+                <a:spcPct val="115000"/>
+              </a:lnSpc>
+              <a:buNone/>
+            </a:pPr>
+            <a:r>
+              <a:rPr lang="en-US" sz="1050" b="1" dirty="0">
+                <a:solidFill>
+                  <a:srgbClr val="1A1A1A"/>
+                </a:solidFill>
+                <a:latin typeface="Meiryo" pitchFamily="34" charset="0"/>
+                <a:ea typeface="Meiryo" pitchFamily="34" charset="-122"/>
+                <a:cs typeface="Meiryo" pitchFamily="34" charset="-120"/>
+              </a:rPr>
+              <a:t>出資者へのリターン（提案）</a:t>
+            </a:r>
+            <a:endParaRPr lang="en-US" sz="1050" dirty="0"/>
+          </a:p>
+        </p:txBody>
+      </p:sp>
+      <p:sp>
+        <p:nvSpPr>
+          <p:cNvPr id="34" name="Text 31"/>
+          <p:cNvSpPr txBox="1"/>
+          <p:nvPr/>
+        </p:nvSpPr>
+        <p:spPr>
+          <a:xfrm>
+            <a:off x="4754880" y="3154680"/>
+            <a:ext cx="3886200" cy="786384"/>
+          </a:xfrm>
+          <a:prstGeom prst="rect">
+            <a:avLst/>
+          </a:prstGeom>
+          <a:noFill/>
+          <a:ln/>
+        </p:spPr>
+        <p:txBody>
+          <a:bodyPr wrap="square" lIns="0" tIns="0" rIns="0" bIns="0" rtlCol="0" anchor="t"/>
+          <a:lstStyle/>
+          <a:p>
+            <a:pPr algn="l" indent="0" marL="0">
+              <a:lnSpc>
+                <a:spcPct val="115000"/>
+              </a:lnSpc>
+              <a:spcAft>
+                <a:spcPts val="300"/>
+              </a:spcAft>
+              <a:buNone/>
+            </a:pPr>
+            <a:r>
+              <a:rPr lang="en-US" sz="900" b="1" dirty="0">
+                <a:solidFill>
+                  <a:srgbClr val="1A1A1A"/>
+                </a:solidFill>
+                <a:latin typeface="Meiryo" pitchFamily="34" charset="0"/>
+                <a:ea typeface="Meiryo" pitchFamily="34" charset="-122"/>
+                <a:cs typeface="Meiryo" pitchFamily="34" charset="-120"/>
+              </a:rPr>
+              <a:t>条件：</a:t>
+            </a:r>
+            <a:pPr algn="l" indent="0" marL="0">
+              <a:lnSpc>
+                <a:spcPct val="115000"/>
+              </a:lnSpc>
+              <a:spcAft>
+                <a:spcPts val="300"/>
+              </a:spcAft>
+              <a:buNone/>
+            </a:pPr>
+            <a:r>
+              <a:rPr lang="en-US" sz="900" dirty="0">
+                <a:solidFill>
+                  <a:srgbClr val="1A1A1A"/>
+                </a:solidFill>
+                <a:latin typeface="Meiryo" pitchFamily="34" charset="0"/>
+                <a:ea typeface="Meiryo" pitchFamily="34" charset="-122"/>
+                <a:cs typeface="Meiryo" pitchFamily="34" charset="-120"/>
+              </a:rPr>
+              <a:t>500万円で発行済株式の10%（評価額 出資前4,500万円）</a:t>
+            </a:r>
+            <a:endParaRPr lang="en-US" sz="900" dirty="0"/>
+          </a:p>
+          <a:p>
+            <a:pPr algn="l" indent="0" marL="0">
+              <a:lnSpc>
+                <a:spcPct val="115000"/>
+              </a:lnSpc>
+              <a:spcAft>
+                <a:spcPts val="300"/>
+              </a:spcAft>
+              <a:buNone/>
+            </a:pPr>
+            <a:r>
+              <a:rPr lang="en-US" sz="900" b="1" dirty="0">
+                <a:solidFill>
+                  <a:srgbClr val="1A1A1A"/>
+                </a:solidFill>
+                <a:latin typeface="Meiryo" pitchFamily="34" charset="0"/>
+                <a:ea typeface="Meiryo" pitchFamily="34" charset="-122"/>
+                <a:cs typeface="Meiryo" pitchFamily="34" charset="-120"/>
+              </a:rPr>
+              <a:t>出口：</a:t>
+            </a:r>
+            <a:pPr algn="l" indent="0" marL="0">
+              <a:lnSpc>
+                <a:spcPct val="115000"/>
+              </a:lnSpc>
+              <a:spcAft>
+                <a:spcPts val="300"/>
+              </a:spcAft>
+              <a:buNone/>
+            </a:pPr>
+            <a:r>
+              <a:rPr lang="en-US" sz="900" dirty="0">
+                <a:solidFill>
+                  <a:srgbClr val="1A1A1A"/>
+                </a:solidFill>
+                <a:latin typeface="Meiryo" pitchFamily="34" charset="0"/>
+                <a:ea typeface="Meiryo" pitchFamily="34" charset="-122"/>
+                <a:cs typeface="Meiryo" pitchFamily="34" charset="-120"/>
+              </a:rPr>
+              <a:t>成熟期の上場、または事業会社への売却</a:t>
+            </a:r>
+            <a:endParaRPr lang="en-US" sz="900" dirty="0"/>
+          </a:p>
+          <a:p>
+            <a:pPr algn="l" indent="0" marL="0">
+              <a:lnSpc>
+                <a:spcPct val="115000"/>
+              </a:lnSpc>
+              <a:spcAft>
+                <a:spcPts val="300"/>
+              </a:spcAft>
+              <a:buNone/>
+            </a:pPr>
+            <a:r>
+              <a:rPr lang="en-US" sz="900" b="1" dirty="0">
+                <a:solidFill>
+                  <a:srgbClr val="1A1A1A"/>
+                </a:solidFill>
+                <a:latin typeface="Meiryo" pitchFamily="34" charset="0"/>
+                <a:ea typeface="Meiryo" pitchFamily="34" charset="-122"/>
+                <a:cs typeface="Meiryo" pitchFamily="34" charset="-120"/>
+              </a:rPr>
+              <a:t>お願い：</a:t>
+            </a:r>
+            <a:pPr algn="l" indent="0" marL="0">
+              <a:lnSpc>
+                <a:spcPct val="115000"/>
+              </a:lnSpc>
+              <a:spcAft>
+                <a:spcPts val="300"/>
+              </a:spcAft>
+              <a:buNone/>
+            </a:pPr>
+            <a:r>
+              <a:rPr lang="en-US" sz="900" dirty="0">
+                <a:solidFill>
+                  <a:srgbClr val="1A1A1A"/>
+                </a:solidFill>
+                <a:latin typeface="Meiryo" pitchFamily="34" charset="0"/>
+                <a:ea typeface="Meiryo" pitchFamily="34" charset="-122"/>
+                <a:cs typeface="Meiryo" pitchFamily="34" charset="-120"/>
+              </a:rPr>
+              <a:t>資金に加え、製造業・建設業の実証先のご紹介</a:t>
+            </a:r>
+            <a:endParaRPr lang="en-US" sz="900" dirty="0"/>
+          </a:p>
+        </p:txBody>
+      </p:sp>
+      <p:sp>
+        <p:nvSpPr>
+          <p:cNvPr id="35" name="Text 32"/>
+          <p:cNvSpPr txBox="1"/>
+          <p:nvPr/>
+        </p:nvSpPr>
+        <p:spPr>
+          <a:xfrm>
+            <a:off x="365760" y="4572000"/>
+            <a:ext cx="8412480" cy="219456"/>
+          </a:xfrm>
+          <a:prstGeom prst="rect">
+            <a:avLst/>
+          </a:prstGeom>
+          <a:noFill/>
+          <a:ln/>
+        </p:spPr>
+        <p:txBody>
+          <a:bodyPr wrap="square" lIns="0" tIns="0" rIns="0" bIns="0" rtlCol="0" anchor="t"/>
+          <a:lstStyle/>
+          <a:p>
+            <a:pPr algn="l" indent="0" marL="0">
+              <a:lnSpc>
+                <a:spcPct val="115000"/>
+              </a:lnSpc>
+              <a:buNone/>
+            </a:pPr>
+            <a:r>
+              <a:rPr lang="en-US" sz="800" dirty="0">
+                <a:solidFill>
+                  <a:srgbClr val="8C8C8C"/>
+                </a:solidFill>
+                <a:latin typeface="Meiryo" pitchFamily="34" charset="0"/>
+                <a:ea typeface="Meiryo" pitchFamily="34" charset="-122"/>
+                <a:cs typeface="Meiryo" pitchFamily="34" charset="-120"/>
+              </a:rPr>
+              <a:t>出資条件は提案であり、交渉により決める</a:t>
+            </a:r>
+            <a:endParaRPr lang="en-US" sz="800" dirty="0"/>
+          </a:p>
+        </p:txBody>
+      </p:sp>
+      <p:sp>
+        <p:nvSpPr>
+          <p:cNvPr id="25" name="Slide Number Placeholder 0"/>
+          <p:cNvSpPr>
+            <a:spLocks noGrp="1"/>
+          </p:cNvSpPr>
+          <p:nvPr>
+            <p:ph type="sldNum" sz="quarter" idx="4294967295"/>
+          </p:nvPr>
+        </p:nvSpPr>
+        <p:spPr>
+          <a:xfrm>
+            <a:off x="365760" y="4837176"/>
+            <a:ext cx="320040" cy="201168"/>
+          </a:xfrm>
+          <a:prstGeom prst="rect">
+            <a:avLst/>
+          </a:prstGeom>
+          <a:extLst>
+            <a:ext uri="{C572A759-6A51-4108-AA02-DFA0A04FC94B}">
+              <ma14:wrappingTextBoxFlag xmlns:ma14="http://schemas.microsoft.com/office/mac/drawingml/2011/main" val="0"/>
+            </a:ext>
+          </a:extLst>
+        </p:spPr>
+        <p:txBody>
+          <a:bodyPr lIns="0" tIns="0" rIns="0" bIns="0"/>
+          <a:lstStyle>
+            <a:lvl1pPr>
+              <a:defRPr sz="850">
+                <a:solidFill>
+                  <a:srgbClr val="8C8C8C"/>
+                </a:solidFill>
+                <a:latin typeface="Meiryo"/>
+                <a:ea typeface="Meiryo"/>
+                <a:cs typeface="Meiryo"/>
+              </a:defRPr>
+            </a:lvl1pPr>
+          </a:lstStyle>
+          <a:p>
+            <a:pPr algn="l"/>
+            <a:fld id="{F7021451-1387-4CA6-816F-3879F97B5CBC}" type="slidenum">
+              <a:rPr b="0" lang="en-US"/>
+              <a:t>24</a:t>
+            </a:fld>
+            <a:endParaRPr lang="en-US"/>
+          </a:p>
+        </p:txBody>
+      </p:sp>
+    </p:spTree>
+  </p:cSld>
+  <p:clrMapOvr>
+    <a:masterClrMapping/>
+  </p:clrMapOvr>
+</p:sld>
+</file>
+
+<file path=ppt/slides/slide25.xml><?xml version="1.0" encoding="utf-8"?>
+<p:sld xmlns:a="http://schemas.openxmlformats.org/drawingml/2006/main" xmlns:r="http://schemas.openxmlformats.org/officeDocument/2006/relationships" xmlns:p="http://schemas.openxmlformats.org/presentationml/2006/main">
+  <p:cSld name="Slide 25">
+    <p:spTree>
+      <p:nvGrpSpPr>
+        <p:cNvPr id="1" name=""/>
+        <p:cNvGrpSpPr/>
+        <p:nvPr/>
+      </p:nvGrpSpPr>
+      <p:grpSpPr>
+        <a:xfrm>
+          <a:off x="0" y="0"/>
+          <a:ext cx="0" cy="0"/>
+          <a:chOff x="0" y="0"/>
+          <a:chExt cx="0" cy="0"/>
+        </a:xfrm>
+      </p:grpSpPr>
+      <p:sp>
+        <p:nvSpPr>
+          <p:cNvPr id="3" name="title"/>
+          <p:cNvSpPr txBox="1"/>
+          <p:nvPr/>
+        </p:nvSpPr>
+        <p:spPr>
+          <a:xfrm>
+            <a:off x="365760" y="256032"/>
+            <a:ext cx="7955280" cy="384048"/>
+          </a:xfrm>
+          <a:prstGeom prst="rect">
+            <a:avLst/>
+          </a:prstGeom>
+          <a:noFill/>
+          <a:ln/>
+        </p:spPr>
+        <p:txBody>
+          <a:bodyPr wrap="square" lIns="0" tIns="0" rIns="0" bIns="0" rtlCol="0" anchor="ctr"/>
+          <a:lstStyle/>
+          <a:p>
+            <a:pPr algn="l" indent="0" marL="0">
+              <a:lnSpc>
+                <a:spcPct val="115000"/>
+              </a:lnSpc>
+              <a:buNone/>
+            </a:pPr>
+            <a:r>
+              <a:rPr lang="en-US" sz="2000" b="1" dirty="0">
+                <a:solidFill>
+                  <a:srgbClr val="1A1A1A"/>
+                </a:solidFill>
+                <a:latin typeface="Meiryo" pitchFamily="34" charset="0"/>
+                <a:ea typeface="Meiryo" pitchFamily="34" charset="-122"/>
+                <a:cs typeface="Meiryo" pitchFamily="34" charset="-120"/>
+              </a:rPr>
               <a:t>リスク ─ 最大のリスクは自分。だから役割と判断基準を先に決める</a:t>
             </a:r>
             <a:endParaRPr lang="en-US" sz="2000" dirty="0"/>
@@ -32025,7 +35208,7 @@
             <a:pPr algn="l"/>
             <a:fld id="{F7021451-1387-4CA6-816F-3879F97B5CBC}" type="slidenum">
               <a:rPr b="0" lang="en-US"/>
-              <a:t>24</a:t>
+              <a:t>25</a:t>
             </a:fld>
             <a:endParaRPr lang="en-US"/>
           </a:p>
